--- a/public/fun/pack/pptx/birthday/돌잔치_11_성장기록중심_라일락골목.pptx
+++ b/public/fun/pack/pptx/birthday/돌잔치_11_성장기록중심_라일락골목.pptx
@@ -3286,14 +3286,6 @@
 <file path=ppt/slides/slide1.xml><?xml version="1.0" encoding="utf-8"?>
 <p:sld xmlns:a="http://schemas.openxmlformats.org/drawingml/2006/main" xmlns:p="http://schemas.openxmlformats.org/presentationml/2006/main" xmlns:r="http://schemas.openxmlformats.org/officeDocument/2006/relationships">
   <p:cSld>
-    <p:bg>
-      <p:bgPr>
-        <a:solidFill>
-          <a:srgbClr val="FFFFFF"/>
-        </a:solidFill>
-        <a:effectLst/>
-      </p:bgPr>
-    </p:bg>
     <p:spTree>
       <p:nvGrpSpPr>
         <p:cNvPr id="1" name=""/>
@@ -3301,383 +3293,30 @@
         <p:nvPr/>
       </p:nvGrpSpPr>
       <p:grpSpPr/>
-      <p:sp>
-        <p:nvSpPr>
-          <p:cNvPr id="3" name="장식"/>
-          <p:cNvSpPr/>
+      <p:pic>
+        <p:nvPicPr>
+          <p:cNvPr id="3" name="표지 그림" descr="birthday-11.jpg"/>
+          <p:cNvPicPr>
+            <a:picLocks noChangeAspect="1"/>
+          </p:cNvPicPr>
           <p:nvPr/>
-        </p:nvSpPr>
-        <p:spPr>
-          <a:xfrm>
-            <a:off x="7071183" y="-1714500"/>
-            <a:ext cx="7886700" cy="7886700"/>
-          </a:xfrm>
-          <a:prstGeom prst="ellipse">
+        </p:nvPicPr>
+        <p:blipFill>
+          <a:blip r:embed="rId2"/>
+          <a:stretch>
+            <a:fillRect/>
+          </a:stretch>
+        </p:blipFill>
+        <p:spPr>
+          <a:xfrm>
+            <a:off x="0" y="0"/>
+            <a:ext cx="12191695" cy="6858000"/>
+          </a:xfrm>
+          <a:prstGeom prst="rect">
             <a:avLst/>
           </a:prstGeom>
-          <a:solidFill>
-            <a:srgbClr val="E3D3EE"/>
-          </a:solidFill>
-          <a:ln>
-            <a:noFill/>
-          </a:ln>
-        </p:spPr>
-        <p:txBody>
-          <a:bodyPr rtlCol="0" anchor="ctr"/>
-          <a:lstStyle/>
-          <a:p>
-            <a:pPr algn="ctr"/>
-          </a:p>
-        </p:txBody>
-      </p:sp>
-      <p:sp>
-        <p:nvSpPr>
-          <p:cNvPr id="4" name="장식"/>
-          <p:cNvSpPr/>
-          <p:nvPr/>
-        </p:nvSpPr>
-        <p:spPr>
-          <a:xfrm>
-            <a:off x="9509522" y="3977639"/>
-            <a:ext cx="3429000" cy="3429000"/>
-          </a:xfrm>
-          <a:prstGeom prst="ellipse">
-            <a:avLst/>
-          </a:prstGeom>
-          <a:solidFill>
-            <a:srgbClr val="8C56B3"/>
-          </a:solidFill>
-          <a:ln>
-            <a:noFill/>
-          </a:ln>
-        </p:spPr>
-        <p:txBody>
-          <a:bodyPr rtlCol="0" anchor="ctr"/>
-          <a:lstStyle/>
-          <a:p>
-            <a:pPr algn="ctr"/>
-          </a:p>
-        </p:txBody>
-      </p:sp>
-      <p:sp>
-        <p:nvSpPr>
-          <p:cNvPr id="5" name="장식"/>
-          <p:cNvSpPr/>
-          <p:nvPr/>
-        </p:nvSpPr>
-        <p:spPr>
-          <a:xfrm>
-            <a:off x="8548094" y="665468"/>
-            <a:ext cx="439711" cy="439711"/>
-          </a:xfrm>
-          <a:prstGeom prst="ellipse">
-            <a:avLst/>
-          </a:prstGeom>
-          <a:solidFill>
-            <a:srgbClr val="8C56B3"/>
-          </a:solidFill>
-          <a:ln>
-            <a:noFill/>
-          </a:ln>
-        </p:spPr>
-        <p:txBody>
-          <a:bodyPr rtlCol="0" anchor="ctr"/>
-          <a:lstStyle/>
-          <a:p>
-            <a:pPr algn="ctr"/>
-          </a:p>
-        </p:txBody>
-      </p:sp>
-      <p:sp>
-        <p:nvSpPr>
-          <p:cNvPr id="6" name="장식"/>
-          <p:cNvSpPr/>
-          <p:nvPr/>
-        </p:nvSpPr>
-        <p:spPr>
-          <a:xfrm>
-            <a:off x="9870174" y="2648211"/>
-            <a:ext cx="325546" cy="325546"/>
-          </a:xfrm>
-          <a:prstGeom prst="ellipse">
-            <a:avLst/>
-          </a:prstGeom>
-          <a:solidFill>
-            <a:srgbClr val="E3D3EE"/>
-          </a:solidFill>
-          <a:ln>
-            <a:noFill/>
-          </a:ln>
-        </p:spPr>
-        <p:txBody>
-          <a:bodyPr rtlCol="0" anchor="ctr"/>
-          <a:lstStyle/>
-          <a:p>
-            <a:pPr algn="ctr"/>
-          </a:p>
-        </p:txBody>
-      </p:sp>
-      <p:sp>
-        <p:nvSpPr>
-          <p:cNvPr id="7" name="장식"/>
-          <p:cNvSpPr/>
-          <p:nvPr/>
-        </p:nvSpPr>
-        <p:spPr>
-          <a:xfrm>
-            <a:off x="10456902" y="844189"/>
-            <a:ext cx="428847" cy="428847"/>
-          </a:xfrm>
-          <a:prstGeom prst="ellipse">
-            <a:avLst/>
-          </a:prstGeom>
-          <a:solidFill>
-            <a:srgbClr val="868D3F"/>
-          </a:solidFill>
-          <a:ln>
-            <a:noFill/>
-          </a:ln>
-        </p:spPr>
-        <p:txBody>
-          <a:bodyPr rtlCol="0" anchor="ctr"/>
-          <a:lstStyle/>
-          <a:p>
-            <a:pPr algn="ctr"/>
-          </a:p>
-        </p:txBody>
-      </p:sp>
-      <p:sp>
-        <p:nvSpPr>
-          <p:cNvPr id="8" name="장식"/>
-          <p:cNvSpPr/>
-          <p:nvPr/>
-        </p:nvSpPr>
-        <p:spPr>
-          <a:xfrm>
-            <a:off x="10327883" y="2558810"/>
-            <a:ext cx="383917" cy="383917"/>
-          </a:xfrm>
-          <a:prstGeom prst="ellipse">
-            <a:avLst/>
-          </a:prstGeom>
-          <a:solidFill>
-            <a:srgbClr val="8C56B3"/>
-          </a:solidFill>
-          <a:ln>
-            <a:noFill/>
-          </a:ln>
-        </p:spPr>
-        <p:txBody>
-          <a:bodyPr rtlCol="0" anchor="ctr"/>
-          <a:lstStyle/>
-          <a:p>
-            <a:pPr algn="ctr"/>
-          </a:p>
-        </p:txBody>
-      </p:sp>
-      <p:sp>
-        <p:nvSpPr>
-          <p:cNvPr id="9" name="장식"/>
-          <p:cNvSpPr/>
-          <p:nvPr/>
-        </p:nvSpPr>
-        <p:spPr>
-          <a:xfrm>
-            <a:off x="8985224" y="371263"/>
-            <a:ext cx="271256" cy="271256"/>
-          </a:xfrm>
-          <a:prstGeom prst="ellipse">
-            <a:avLst/>
-          </a:prstGeom>
-          <a:solidFill>
-            <a:srgbClr val="E3D3EE"/>
-          </a:solidFill>
-          <a:ln>
-            <a:noFill/>
-          </a:ln>
-        </p:spPr>
-        <p:txBody>
-          <a:bodyPr rtlCol="0" anchor="ctr"/>
-          <a:lstStyle/>
-          <a:p>
-            <a:pPr algn="ctr"/>
-          </a:p>
-        </p:txBody>
-      </p:sp>
-      <p:sp>
-        <p:nvSpPr>
-          <p:cNvPr id="10" name="장식"/>
-          <p:cNvSpPr/>
-          <p:nvPr/>
-        </p:nvSpPr>
-        <p:spPr>
-          <a:xfrm>
-            <a:off x="10054636" y="427995"/>
-            <a:ext cx="294091" cy="294091"/>
-          </a:xfrm>
-          <a:prstGeom prst="ellipse">
-            <a:avLst/>
-          </a:prstGeom>
-          <a:solidFill>
-            <a:srgbClr val="868D3F"/>
-          </a:solidFill>
-          <a:ln>
-            <a:noFill/>
-          </a:ln>
-        </p:spPr>
-        <p:txBody>
-          <a:bodyPr rtlCol="0" anchor="ctr"/>
-          <a:lstStyle/>
-          <a:p>
-            <a:pPr algn="ctr"/>
-          </a:p>
-        </p:txBody>
-      </p:sp>
-      <p:sp>
-        <p:nvSpPr>
-          <p:cNvPr id="11" name="장식"/>
-          <p:cNvSpPr/>
-          <p:nvPr/>
-        </p:nvSpPr>
-        <p:spPr>
-          <a:xfrm>
-            <a:off x="10539235" y="2844566"/>
-            <a:ext cx="506986" cy="506986"/>
-          </a:xfrm>
-          <a:prstGeom prst="ellipse">
-            <a:avLst/>
-          </a:prstGeom>
-          <a:solidFill>
-            <a:srgbClr val="8C56B3"/>
-          </a:solidFill>
-          <a:ln>
-            <a:noFill/>
-          </a:ln>
-        </p:spPr>
-        <p:txBody>
-          <a:bodyPr rtlCol="0" anchor="ctr"/>
-          <a:lstStyle/>
-          <a:p>
-            <a:pPr algn="ctr"/>
-          </a:p>
-        </p:txBody>
-      </p:sp>
-      <p:sp>
-        <p:nvSpPr>
-          <p:cNvPr id="12" name="장식"/>
-          <p:cNvSpPr/>
-          <p:nvPr/>
-        </p:nvSpPr>
-        <p:spPr>
-          <a:xfrm>
-            <a:off x="9714677" y="793042"/>
-            <a:ext cx="486841" cy="486841"/>
-          </a:xfrm>
-          <a:prstGeom prst="ellipse">
-            <a:avLst/>
-          </a:prstGeom>
-          <a:solidFill>
-            <a:srgbClr val="E3D3EE"/>
-          </a:solidFill>
-          <a:ln>
-            <a:noFill/>
-          </a:ln>
-        </p:spPr>
-        <p:txBody>
-          <a:bodyPr rtlCol="0" anchor="ctr"/>
-          <a:lstStyle/>
-          <a:p>
-            <a:pPr algn="ctr"/>
-          </a:p>
-        </p:txBody>
-      </p:sp>
-      <p:sp>
-        <p:nvSpPr>
-          <p:cNvPr id="13" name="장식"/>
-          <p:cNvSpPr/>
-          <p:nvPr/>
-        </p:nvSpPr>
-        <p:spPr>
-          <a:xfrm>
-            <a:off x="9093804" y="730731"/>
-            <a:ext cx="496258" cy="496258"/>
-          </a:xfrm>
-          <a:prstGeom prst="ellipse">
-            <a:avLst/>
-          </a:prstGeom>
-          <a:solidFill>
-            <a:srgbClr val="868D3F"/>
-          </a:solidFill>
-          <a:ln>
-            <a:noFill/>
-          </a:ln>
-        </p:spPr>
-        <p:txBody>
-          <a:bodyPr rtlCol="0" anchor="ctr"/>
-          <a:lstStyle/>
-          <a:p>
-            <a:pPr algn="ctr"/>
-          </a:p>
-        </p:txBody>
-      </p:sp>
-      <p:sp>
-        <p:nvSpPr>
-          <p:cNvPr id="14" name="장식"/>
-          <p:cNvSpPr/>
-          <p:nvPr/>
-        </p:nvSpPr>
-        <p:spPr>
-          <a:xfrm>
-            <a:off x="8263488" y="21126"/>
-            <a:ext cx="405194" cy="405194"/>
-          </a:xfrm>
-          <a:prstGeom prst="ellipse">
-            <a:avLst/>
-          </a:prstGeom>
-          <a:solidFill>
-            <a:srgbClr val="8C56B3"/>
-          </a:solidFill>
-          <a:ln>
-            <a:noFill/>
-          </a:ln>
-        </p:spPr>
-        <p:txBody>
-          <a:bodyPr rtlCol="0" anchor="ctr"/>
-          <a:lstStyle/>
-          <a:p>
-            <a:pPr algn="ctr"/>
-          </a:p>
-        </p:txBody>
-      </p:sp>
-      <p:sp>
-        <p:nvSpPr>
-          <p:cNvPr id="15" name="장식"/>
-          <p:cNvSpPr/>
-          <p:nvPr/>
-        </p:nvSpPr>
-        <p:spPr>
-          <a:xfrm>
-            <a:off x="10553950" y="2861152"/>
-            <a:ext cx="241523" cy="241523"/>
-          </a:xfrm>
-          <a:prstGeom prst="ellipse">
-            <a:avLst/>
-          </a:prstGeom>
-          <a:solidFill>
-            <a:srgbClr val="E3D3EE"/>
-          </a:solidFill>
-          <a:ln>
-            <a:noFill/>
-          </a:ln>
-        </p:spPr>
-        <p:txBody>
-          <a:bodyPr rtlCol="0" anchor="ctr"/>
-          <a:lstStyle/>
-          <a:p>
-            <a:pPr algn="ctr"/>
-          </a:p>
-        </p:txBody>
-      </p:sp>
+        </p:spPr>
+      </p:pic>
       <p:sp>
         <p:nvSpPr>
           <p:cNvPr id="2" name="Title 1"/>
@@ -3691,7 +3330,7 @@
         <p:spPr>
           <a:xfrm>
             <a:off x="853418" y="2057400"/>
-            <a:ext cx="6705432" cy="1463040"/>
+            <a:ext cx="6095847" cy="1554480"/>
           </a:xfrm>
         </p:spPr>
         <p:txBody>
@@ -3718,13 +3357,13 @@
       </p:sp>
       <p:sp>
         <p:nvSpPr>
-          <p:cNvPr id="16" name="한 줄 문구"/>
+          <p:cNvPr id="4" name="한 줄 문구"/>
           <p:cNvSpPr txBox="1"/>
           <p:nvPr/>
         </p:nvSpPr>
         <p:spPr>
           <a:xfrm>
-            <a:off x="853418" y="3611880"/>
+            <a:off x="853418" y="3749039"/>
             <a:ext cx="6095847" cy="822960"/>
           </a:xfrm>
           <a:prstGeom prst="rect">
@@ -3749,20 +3388,20 @@
                   <a:srgbClr val="573371"/>
                 </a:solidFill>
               </a:rPr>
-              <a:t>라일락 향기처럼 달콤한 우리 아기</a:t>
-            </a:r>
-          </a:p>
-        </p:txBody>
-      </p:sp>
-      <p:sp>
-        <p:nvSpPr>
-          <p:cNvPr id="17" name="안내 문구"/>
+              <a:t>키는 얼마나, 몸무게는 얼마나 늘었을까요</a:t>
+            </a:r>
+          </a:p>
+        </p:txBody>
+      </p:sp>
+      <p:sp>
+        <p:nvSpPr>
+          <p:cNvPr id="5" name="안내 문구"/>
           <p:cNvSpPr txBox="1"/>
           <p:nvPr/>
         </p:nvSpPr>
         <p:spPr>
           <a:xfrm>
-            <a:off x="853418" y="4480560"/>
+            <a:off x="853418" y="4617720"/>
             <a:ext cx="6095847" cy="914400"/>
           </a:xfrm>
           <a:prstGeom prst="rect">
@@ -3787,7 +3426,7 @@
                   <a:srgbClr val="666666"/>
                 </a:solidFill>
               </a:rPr>
-              <a:t>아기 이름 · 2026. 00. 00</a:t>
+              <a:t>아기 이름 · 2027. 00. 00</a:t>
             </a:r>
           </a:p>
           <a:p>
@@ -3893,325 +3532,6 @@
       </p:sp>
       <p:sp>
         <p:nvSpPr>
-          <p:cNvPr id="5" name="장식"/>
-          <p:cNvSpPr/>
-          <p:nvPr/>
-        </p:nvSpPr>
-        <p:spPr>
-          <a:xfrm>
-            <a:off x="10902130" y="434860"/>
-            <a:ext cx="153549" cy="153549"/>
-          </a:xfrm>
-          <a:prstGeom prst="ellipse">
-            <a:avLst/>
-          </a:prstGeom>
-          <a:solidFill>
-            <a:srgbClr val="8C56B3"/>
-          </a:solidFill>
-          <a:ln>
-            <a:noFill/>
-          </a:ln>
-        </p:spPr>
-        <p:txBody>
-          <a:bodyPr rtlCol="0" anchor="ctr"/>
-          <a:lstStyle/>
-          <a:p>
-            <a:pPr algn="ctr"/>
-          </a:p>
-        </p:txBody>
-      </p:sp>
-      <p:sp>
-        <p:nvSpPr>
-          <p:cNvPr id="6" name="장식"/>
-          <p:cNvSpPr/>
-          <p:nvPr/>
-        </p:nvSpPr>
-        <p:spPr>
-          <a:xfrm>
-            <a:off x="11363808" y="1127246"/>
-            <a:ext cx="113682" cy="113682"/>
-          </a:xfrm>
-          <a:prstGeom prst="ellipse">
-            <a:avLst/>
-          </a:prstGeom>
-          <a:solidFill>
-            <a:srgbClr val="E3D3EE"/>
-          </a:solidFill>
-          <a:ln>
-            <a:noFill/>
-          </a:ln>
-        </p:spPr>
-        <p:txBody>
-          <a:bodyPr rtlCol="0" anchor="ctr"/>
-          <a:lstStyle/>
-          <a:p>
-            <a:pPr algn="ctr"/>
-          </a:p>
-        </p:txBody>
-      </p:sp>
-      <p:sp>
-        <p:nvSpPr>
-          <p:cNvPr id="7" name="장식"/>
-          <p:cNvSpPr/>
-          <p:nvPr/>
-        </p:nvSpPr>
-        <p:spPr>
-          <a:xfrm>
-            <a:off x="11568698" y="497270"/>
-            <a:ext cx="149756" cy="149756"/>
-          </a:xfrm>
-          <a:prstGeom prst="ellipse">
-            <a:avLst/>
-          </a:prstGeom>
-          <a:solidFill>
-            <a:srgbClr val="868D3F"/>
-          </a:solidFill>
-          <a:ln>
-            <a:noFill/>
-          </a:ln>
-        </p:spPr>
-        <p:txBody>
-          <a:bodyPr rtlCol="0" anchor="ctr"/>
-          <a:lstStyle/>
-          <a:p>
-            <a:pPr algn="ctr"/>
-          </a:p>
-        </p:txBody>
-      </p:sp>
-      <p:sp>
-        <p:nvSpPr>
-          <p:cNvPr id="8" name="장식"/>
-          <p:cNvSpPr/>
-          <p:nvPr/>
-        </p:nvSpPr>
-        <p:spPr>
-          <a:xfrm>
-            <a:off x="11523643" y="1096027"/>
-            <a:ext cx="134066" cy="134066"/>
-          </a:xfrm>
-          <a:prstGeom prst="ellipse">
-            <a:avLst/>
-          </a:prstGeom>
-          <a:solidFill>
-            <a:srgbClr val="8C56B3"/>
-          </a:solidFill>
-          <a:ln>
-            <a:noFill/>
-          </a:ln>
-        </p:spPr>
-        <p:txBody>
-          <a:bodyPr rtlCol="0" anchor="ctr"/>
-          <a:lstStyle/>
-          <a:p>
-            <a:pPr algn="ctr"/>
-          </a:p>
-        </p:txBody>
-      </p:sp>
-      <p:sp>
-        <p:nvSpPr>
-          <p:cNvPr id="9" name="장식"/>
-          <p:cNvSpPr/>
-          <p:nvPr/>
-        </p:nvSpPr>
-        <p:spPr>
-          <a:xfrm>
-            <a:off x="11054778" y="332121"/>
-            <a:ext cx="94724" cy="94724"/>
-          </a:xfrm>
-          <a:prstGeom prst="ellipse">
-            <a:avLst/>
-          </a:prstGeom>
-          <a:solidFill>
-            <a:srgbClr val="E3D3EE"/>
-          </a:solidFill>
-          <a:ln>
-            <a:noFill/>
-          </a:ln>
-        </p:spPr>
-        <p:txBody>
-          <a:bodyPr rtlCol="0" anchor="ctr"/>
-          <a:lstStyle/>
-          <a:p>
-            <a:pPr algn="ctr"/>
-          </a:p>
-        </p:txBody>
-      </p:sp>
-      <p:sp>
-        <p:nvSpPr>
-          <p:cNvPr id="10" name="장식"/>
-          <p:cNvSpPr/>
-          <p:nvPr/>
-        </p:nvSpPr>
-        <p:spPr>
-          <a:xfrm>
-            <a:off x="11428224" y="351933"/>
-            <a:ext cx="102698" cy="102698"/>
-          </a:xfrm>
-          <a:prstGeom prst="ellipse">
-            <a:avLst/>
-          </a:prstGeom>
-          <a:solidFill>
-            <a:srgbClr val="868D3F"/>
-          </a:solidFill>
-          <a:ln>
-            <a:noFill/>
-          </a:ln>
-        </p:spPr>
-        <p:txBody>
-          <a:bodyPr rtlCol="0" anchor="ctr"/>
-          <a:lstStyle/>
-          <a:p>
-            <a:pPr algn="ctr"/>
-          </a:p>
-        </p:txBody>
-      </p:sp>
-      <p:sp>
-        <p:nvSpPr>
-          <p:cNvPr id="11" name="장식"/>
-          <p:cNvSpPr/>
-          <p:nvPr/>
-        </p:nvSpPr>
-        <p:spPr>
-          <a:xfrm>
-            <a:off x="11597449" y="1195815"/>
-            <a:ext cx="177042" cy="177042"/>
-          </a:xfrm>
-          <a:prstGeom prst="ellipse">
-            <a:avLst/>
-          </a:prstGeom>
-          <a:solidFill>
-            <a:srgbClr val="8C56B3"/>
-          </a:solidFill>
-          <a:ln>
-            <a:noFill/>
-          </a:ln>
-        </p:spPr>
-        <p:txBody>
-          <a:bodyPr rtlCol="0" anchor="ctr"/>
-          <a:lstStyle/>
-          <a:p>
-            <a:pPr algn="ctr"/>
-          </a:p>
-        </p:txBody>
-      </p:sp>
-      <p:sp>
-        <p:nvSpPr>
-          <p:cNvPr id="12" name="장식"/>
-          <p:cNvSpPr/>
-          <p:nvPr/>
-        </p:nvSpPr>
-        <p:spPr>
-          <a:xfrm>
-            <a:off x="11309508" y="479409"/>
-            <a:ext cx="170008" cy="170008"/>
-          </a:xfrm>
-          <a:prstGeom prst="ellipse">
-            <a:avLst/>
-          </a:prstGeom>
-          <a:solidFill>
-            <a:srgbClr val="E3D3EE"/>
-          </a:solidFill>
-          <a:ln>
-            <a:noFill/>
-          </a:ln>
-        </p:spPr>
-        <p:txBody>
-          <a:bodyPr rtlCol="0" anchor="ctr"/>
-          <a:lstStyle/>
-          <a:p>
-            <a:pPr algn="ctr"/>
-          </a:p>
-        </p:txBody>
-      </p:sp>
-      <p:sp>
-        <p:nvSpPr>
-          <p:cNvPr id="13" name="장식"/>
-          <p:cNvSpPr/>
-          <p:nvPr/>
-        </p:nvSpPr>
-        <p:spPr>
-          <a:xfrm>
-            <a:off x="11092695" y="457650"/>
-            <a:ext cx="173296" cy="173296"/>
-          </a:xfrm>
-          <a:prstGeom prst="ellipse">
-            <a:avLst/>
-          </a:prstGeom>
-          <a:solidFill>
-            <a:srgbClr val="868D3F"/>
-          </a:solidFill>
-          <a:ln>
-            <a:noFill/>
-          </a:ln>
-        </p:spPr>
-        <p:txBody>
-          <a:bodyPr rtlCol="0" anchor="ctr"/>
-          <a:lstStyle/>
-          <a:p>
-            <a:pPr algn="ctr"/>
-          </a:p>
-        </p:txBody>
-      </p:sp>
-      <p:sp>
-        <p:nvSpPr>
-          <p:cNvPr id="14" name="장식"/>
-          <p:cNvSpPr/>
-          <p:nvPr/>
-        </p:nvSpPr>
-        <p:spPr>
-          <a:xfrm>
-            <a:off x="10802743" y="209851"/>
-            <a:ext cx="141496" cy="141496"/>
-          </a:xfrm>
-          <a:prstGeom prst="ellipse">
-            <a:avLst/>
-          </a:prstGeom>
-          <a:solidFill>
-            <a:srgbClr val="8C56B3"/>
-          </a:solidFill>
-          <a:ln>
-            <a:noFill/>
-          </a:ln>
-        </p:spPr>
-        <p:txBody>
-          <a:bodyPr rtlCol="0" anchor="ctr"/>
-          <a:lstStyle/>
-          <a:p>
-            <a:pPr algn="ctr"/>
-          </a:p>
-        </p:txBody>
-      </p:sp>
-      <p:sp>
-        <p:nvSpPr>
-          <p:cNvPr id="15" name="장식"/>
-          <p:cNvSpPr/>
-          <p:nvPr/>
-        </p:nvSpPr>
-        <p:spPr>
-          <a:xfrm>
-            <a:off x="11602587" y="1201606"/>
-            <a:ext cx="84341" cy="84341"/>
-          </a:xfrm>
-          <a:prstGeom prst="ellipse">
-            <a:avLst/>
-          </a:prstGeom>
-          <a:solidFill>
-            <a:srgbClr val="E3D3EE"/>
-          </a:solidFill>
-          <a:ln>
-            <a:noFill/>
-          </a:ln>
-        </p:spPr>
-        <p:txBody>
-          <a:bodyPr rtlCol="0" anchor="ctr"/>
-          <a:lstStyle/>
-          <a:p>
-            <a:pPr algn="ctr"/>
-          </a:p>
-        </p:txBody>
-      </p:sp>
-      <p:sp>
-        <p:nvSpPr>
           <p:cNvPr id="2" name="Title 1"/>
           <p:cNvSpPr>
             <a:spLocks noGrp="1"/>
@@ -4250,7 +3570,7 @@
       </p:sp>
       <p:sp>
         <p:nvSpPr>
-          <p:cNvPr id="16" name="사진 자리"/>
+          <p:cNvPr id="5" name="사진 자리"/>
           <p:cNvSpPr/>
           <p:nvPr/>
         </p:nvSpPr>
@@ -4298,7 +3618,7 @@
       </p:sp>
       <p:graphicFrame>
         <p:nvGraphicFramePr>
-          <p:cNvPr id="17" name="표"/>
+          <p:cNvPr id="6" name="표"/>
           <p:cNvGraphicFramePr>
             <a:graphicFrameLocks noGrp="1"/>
           </p:cNvGraphicFramePr>
@@ -4972,325 +4292,6 @@
       </p:sp>
       <p:sp>
         <p:nvSpPr>
-          <p:cNvPr id="5" name="장식"/>
-          <p:cNvSpPr/>
-          <p:nvPr/>
-        </p:nvSpPr>
-        <p:spPr>
-          <a:xfrm>
-            <a:off x="10902130" y="434860"/>
-            <a:ext cx="153549" cy="153549"/>
-          </a:xfrm>
-          <a:prstGeom prst="ellipse">
-            <a:avLst/>
-          </a:prstGeom>
-          <a:solidFill>
-            <a:srgbClr val="8C56B3"/>
-          </a:solidFill>
-          <a:ln>
-            <a:noFill/>
-          </a:ln>
-        </p:spPr>
-        <p:txBody>
-          <a:bodyPr rtlCol="0" anchor="ctr"/>
-          <a:lstStyle/>
-          <a:p>
-            <a:pPr algn="ctr"/>
-          </a:p>
-        </p:txBody>
-      </p:sp>
-      <p:sp>
-        <p:nvSpPr>
-          <p:cNvPr id="6" name="장식"/>
-          <p:cNvSpPr/>
-          <p:nvPr/>
-        </p:nvSpPr>
-        <p:spPr>
-          <a:xfrm>
-            <a:off x="11363808" y="1127246"/>
-            <a:ext cx="113682" cy="113682"/>
-          </a:xfrm>
-          <a:prstGeom prst="ellipse">
-            <a:avLst/>
-          </a:prstGeom>
-          <a:solidFill>
-            <a:srgbClr val="E3D3EE"/>
-          </a:solidFill>
-          <a:ln>
-            <a:noFill/>
-          </a:ln>
-        </p:spPr>
-        <p:txBody>
-          <a:bodyPr rtlCol="0" anchor="ctr"/>
-          <a:lstStyle/>
-          <a:p>
-            <a:pPr algn="ctr"/>
-          </a:p>
-        </p:txBody>
-      </p:sp>
-      <p:sp>
-        <p:nvSpPr>
-          <p:cNvPr id="7" name="장식"/>
-          <p:cNvSpPr/>
-          <p:nvPr/>
-        </p:nvSpPr>
-        <p:spPr>
-          <a:xfrm>
-            <a:off x="11568698" y="497270"/>
-            <a:ext cx="149756" cy="149756"/>
-          </a:xfrm>
-          <a:prstGeom prst="ellipse">
-            <a:avLst/>
-          </a:prstGeom>
-          <a:solidFill>
-            <a:srgbClr val="868D3F"/>
-          </a:solidFill>
-          <a:ln>
-            <a:noFill/>
-          </a:ln>
-        </p:spPr>
-        <p:txBody>
-          <a:bodyPr rtlCol="0" anchor="ctr"/>
-          <a:lstStyle/>
-          <a:p>
-            <a:pPr algn="ctr"/>
-          </a:p>
-        </p:txBody>
-      </p:sp>
-      <p:sp>
-        <p:nvSpPr>
-          <p:cNvPr id="8" name="장식"/>
-          <p:cNvSpPr/>
-          <p:nvPr/>
-        </p:nvSpPr>
-        <p:spPr>
-          <a:xfrm>
-            <a:off x="11523643" y="1096027"/>
-            <a:ext cx="134066" cy="134066"/>
-          </a:xfrm>
-          <a:prstGeom prst="ellipse">
-            <a:avLst/>
-          </a:prstGeom>
-          <a:solidFill>
-            <a:srgbClr val="8C56B3"/>
-          </a:solidFill>
-          <a:ln>
-            <a:noFill/>
-          </a:ln>
-        </p:spPr>
-        <p:txBody>
-          <a:bodyPr rtlCol="0" anchor="ctr"/>
-          <a:lstStyle/>
-          <a:p>
-            <a:pPr algn="ctr"/>
-          </a:p>
-        </p:txBody>
-      </p:sp>
-      <p:sp>
-        <p:nvSpPr>
-          <p:cNvPr id="9" name="장식"/>
-          <p:cNvSpPr/>
-          <p:nvPr/>
-        </p:nvSpPr>
-        <p:spPr>
-          <a:xfrm>
-            <a:off x="11054778" y="332121"/>
-            <a:ext cx="94724" cy="94724"/>
-          </a:xfrm>
-          <a:prstGeom prst="ellipse">
-            <a:avLst/>
-          </a:prstGeom>
-          <a:solidFill>
-            <a:srgbClr val="E3D3EE"/>
-          </a:solidFill>
-          <a:ln>
-            <a:noFill/>
-          </a:ln>
-        </p:spPr>
-        <p:txBody>
-          <a:bodyPr rtlCol="0" anchor="ctr"/>
-          <a:lstStyle/>
-          <a:p>
-            <a:pPr algn="ctr"/>
-          </a:p>
-        </p:txBody>
-      </p:sp>
-      <p:sp>
-        <p:nvSpPr>
-          <p:cNvPr id="10" name="장식"/>
-          <p:cNvSpPr/>
-          <p:nvPr/>
-        </p:nvSpPr>
-        <p:spPr>
-          <a:xfrm>
-            <a:off x="11428224" y="351933"/>
-            <a:ext cx="102698" cy="102698"/>
-          </a:xfrm>
-          <a:prstGeom prst="ellipse">
-            <a:avLst/>
-          </a:prstGeom>
-          <a:solidFill>
-            <a:srgbClr val="868D3F"/>
-          </a:solidFill>
-          <a:ln>
-            <a:noFill/>
-          </a:ln>
-        </p:spPr>
-        <p:txBody>
-          <a:bodyPr rtlCol="0" anchor="ctr"/>
-          <a:lstStyle/>
-          <a:p>
-            <a:pPr algn="ctr"/>
-          </a:p>
-        </p:txBody>
-      </p:sp>
-      <p:sp>
-        <p:nvSpPr>
-          <p:cNvPr id="11" name="장식"/>
-          <p:cNvSpPr/>
-          <p:nvPr/>
-        </p:nvSpPr>
-        <p:spPr>
-          <a:xfrm>
-            <a:off x="11597449" y="1195815"/>
-            <a:ext cx="177042" cy="177042"/>
-          </a:xfrm>
-          <a:prstGeom prst="ellipse">
-            <a:avLst/>
-          </a:prstGeom>
-          <a:solidFill>
-            <a:srgbClr val="8C56B3"/>
-          </a:solidFill>
-          <a:ln>
-            <a:noFill/>
-          </a:ln>
-        </p:spPr>
-        <p:txBody>
-          <a:bodyPr rtlCol="0" anchor="ctr"/>
-          <a:lstStyle/>
-          <a:p>
-            <a:pPr algn="ctr"/>
-          </a:p>
-        </p:txBody>
-      </p:sp>
-      <p:sp>
-        <p:nvSpPr>
-          <p:cNvPr id="12" name="장식"/>
-          <p:cNvSpPr/>
-          <p:nvPr/>
-        </p:nvSpPr>
-        <p:spPr>
-          <a:xfrm>
-            <a:off x="11309508" y="479409"/>
-            <a:ext cx="170008" cy="170008"/>
-          </a:xfrm>
-          <a:prstGeom prst="ellipse">
-            <a:avLst/>
-          </a:prstGeom>
-          <a:solidFill>
-            <a:srgbClr val="E3D3EE"/>
-          </a:solidFill>
-          <a:ln>
-            <a:noFill/>
-          </a:ln>
-        </p:spPr>
-        <p:txBody>
-          <a:bodyPr rtlCol="0" anchor="ctr"/>
-          <a:lstStyle/>
-          <a:p>
-            <a:pPr algn="ctr"/>
-          </a:p>
-        </p:txBody>
-      </p:sp>
-      <p:sp>
-        <p:nvSpPr>
-          <p:cNvPr id="13" name="장식"/>
-          <p:cNvSpPr/>
-          <p:nvPr/>
-        </p:nvSpPr>
-        <p:spPr>
-          <a:xfrm>
-            <a:off x="11092695" y="457650"/>
-            <a:ext cx="173296" cy="173296"/>
-          </a:xfrm>
-          <a:prstGeom prst="ellipse">
-            <a:avLst/>
-          </a:prstGeom>
-          <a:solidFill>
-            <a:srgbClr val="868D3F"/>
-          </a:solidFill>
-          <a:ln>
-            <a:noFill/>
-          </a:ln>
-        </p:spPr>
-        <p:txBody>
-          <a:bodyPr rtlCol="0" anchor="ctr"/>
-          <a:lstStyle/>
-          <a:p>
-            <a:pPr algn="ctr"/>
-          </a:p>
-        </p:txBody>
-      </p:sp>
-      <p:sp>
-        <p:nvSpPr>
-          <p:cNvPr id="14" name="장식"/>
-          <p:cNvSpPr/>
-          <p:nvPr/>
-        </p:nvSpPr>
-        <p:spPr>
-          <a:xfrm>
-            <a:off x="10802743" y="209851"/>
-            <a:ext cx="141496" cy="141496"/>
-          </a:xfrm>
-          <a:prstGeom prst="ellipse">
-            <a:avLst/>
-          </a:prstGeom>
-          <a:solidFill>
-            <a:srgbClr val="8C56B3"/>
-          </a:solidFill>
-          <a:ln>
-            <a:noFill/>
-          </a:ln>
-        </p:spPr>
-        <p:txBody>
-          <a:bodyPr rtlCol="0" anchor="ctr"/>
-          <a:lstStyle/>
-          <a:p>
-            <a:pPr algn="ctr"/>
-          </a:p>
-        </p:txBody>
-      </p:sp>
-      <p:sp>
-        <p:nvSpPr>
-          <p:cNvPr id="15" name="장식"/>
-          <p:cNvSpPr/>
-          <p:nvPr/>
-        </p:nvSpPr>
-        <p:spPr>
-          <a:xfrm>
-            <a:off x="11602587" y="1201606"/>
-            <a:ext cx="84341" cy="84341"/>
-          </a:xfrm>
-          <a:prstGeom prst="ellipse">
-            <a:avLst/>
-          </a:prstGeom>
-          <a:solidFill>
-            <a:srgbClr val="E3D3EE"/>
-          </a:solidFill>
-          <a:ln>
-            <a:noFill/>
-          </a:ln>
-        </p:spPr>
-        <p:txBody>
-          <a:bodyPr rtlCol="0" anchor="ctr"/>
-          <a:lstStyle/>
-          <a:p>
-            <a:pPr algn="ctr"/>
-          </a:p>
-        </p:txBody>
-      </p:sp>
-      <p:sp>
-        <p:nvSpPr>
           <p:cNvPr id="2" name="Title 1"/>
           <p:cNvSpPr>
             <a:spLocks noGrp="1"/>
@@ -5329,7 +4330,7 @@
       </p:sp>
       <p:sp>
         <p:nvSpPr>
-          <p:cNvPr id="16" name="타임라인 선"/>
+          <p:cNvPr id="5" name="타임라인 선"/>
           <p:cNvSpPr/>
           <p:nvPr/>
         </p:nvSpPr>
@@ -5358,7 +4359,7 @@
       </p:sp>
       <p:sp>
         <p:nvSpPr>
-          <p:cNvPr id="17" name="때 1"/>
+          <p:cNvPr id="6" name="때 1"/>
           <p:cNvSpPr/>
           <p:nvPr/>
         </p:nvSpPr>
@@ -5389,7 +4390,7 @@
       </p:sp>
       <p:sp>
         <p:nvSpPr>
-          <p:cNvPr id="18" name="TextBox 17"/>
+          <p:cNvPr id="7" name="TextBox 6"/>
           <p:cNvSpPr txBox="1"/>
           <p:nvPr/>
         </p:nvSpPr>
@@ -5427,7 +4428,7 @@
       </p:sp>
       <p:sp>
         <p:nvSpPr>
-          <p:cNvPr id="19" name="TextBox 18"/>
+          <p:cNvPr id="8" name="TextBox 7"/>
           <p:cNvSpPr txBox="1"/>
           <p:nvPr/>
         </p:nvSpPr>
@@ -5465,7 +4466,7 @@
       </p:sp>
       <p:sp>
         <p:nvSpPr>
-          <p:cNvPr id="20" name="TextBox 19"/>
+          <p:cNvPr id="9" name="TextBox 8"/>
           <p:cNvSpPr txBox="1"/>
           <p:nvPr/>
         </p:nvSpPr>
@@ -5503,7 +4504,7 @@
       </p:sp>
       <p:sp>
         <p:nvSpPr>
-          <p:cNvPr id="21" name="때 2"/>
+          <p:cNvPr id="10" name="때 2"/>
           <p:cNvSpPr/>
           <p:nvPr/>
         </p:nvSpPr>
@@ -5534,7 +4535,7 @@
       </p:sp>
       <p:sp>
         <p:nvSpPr>
-          <p:cNvPr id="22" name="TextBox 21"/>
+          <p:cNvPr id="11" name="TextBox 10"/>
           <p:cNvSpPr txBox="1"/>
           <p:nvPr/>
         </p:nvSpPr>
@@ -5572,7 +4573,7 @@
       </p:sp>
       <p:sp>
         <p:nvSpPr>
-          <p:cNvPr id="23" name="TextBox 22"/>
+          <p:cNvPr id="12" name="TextBox 11"/>
           <p:cNvSpPr txBox="1"/>
           <p:nvPr/>
         </p:nvSpPr>
@@ -5610,7 +4611,7 @@
       </p:sp>
       <p:sp>
         <p:nvSpPr>
-          <p:cNvPr id="24" name="TextBox 23"/>
+          <p:cNvPr id="13" name="TextBox 12"/>
           <p:cNvSpPr txBox="1"/>
           <p:nvPr/>
         </p:nvSpPr>
@@ -5648,7 +4649,7 @@
       </p:sp>
       <p:sp>
         <p:nvSpPr>
-          <p:cNvPr id="25" name="때 3"/>
+          <p:cNvPr id="14" name="때 3"/>
           <p:cNvSpPr/>
           <p:nvPr/>
         </p:nvSpPr>
@@ -5679,7 +4680,7 @@
       </p:sp>
       <p:sp>
         <p:nvSpPr>
-          <p:cNvPr id="26" name="TextBox 25"/>
+          <p:cNvPr id="15" name="TextBox 14"/>
           <p:cNvSpPr txBox="1"/>
           <p:nvPr/>
         </p:nvSpPr>
@@ -5717,7 +4718,7 @@
       </p:sp>
       <p:sp>
         <p:nvSpPr>
-          <p:cNvPr id="27" name="TextBox 26"/>
+          <p:cNvPr id="16" name="TextBox 15"/>
           <p:cNvSpPr txBox="1"/>
           <p:nvPr/>
         </p:nvSpPr>
@@ -5755,7 +4756,7 @@
       </p:sp>
       <p:sp>
         <p:nvSpPr>
-          <p:cNvPr id="28" name="TextBox 27"/>
+          <p:cNvPr id="17" name="TextBox 16"/>
           <p:cNvSpPr txBox="1"/>
           <p:nvPr/>
         </p:nvSpPr>
@@ -5793,7 +4794,7 @@
       </p:sp>
       <p:sp>
         <p:nvSpPr>
-          <p:cNvPr id="29" name="때 4"/>
+          <p:cNvPr id="18" name="때 4"/>
           <p:cNvSpPr/>
           <p:nvPr/>
         </p:nvSpPr>
@@ -5824,7 +4825,7 @@
       </p:sp>
       <p:sp>
         <p:nvSpPr>
-          <p:cNvPr id="30" name="TextBox 29"/>
+          <p:cNvPr id="19" name="TextBox 18"/>
           <p:cNvSpPr txBox="1"/>
           <p:nvPr/>
         </p:nvSpPr>
@@ -5862,7 +4863,7 @@
       </p:sp>
       <p:sp>
         <p:nvSpPr>
-          <p:cNvPr id="31" name="TextBox 30"/>
+          <p:cNvPr id="20" name="TextBox 19"/>
           <p:cNvSpPr txBox="1"/>
           <p:nvPr/>
         </p:nvSpPr>
@@ -5900,7 +4901,7 @@
       </p:sp>
       <p:sp>
         <p:nvSpPr>
-          <p:cNvPr id="32" name="TextBox 31"/>
+          <p:cNvPr id="21" name="TextBox 20"/>
           <p:cNvSpPr txBox="1"/>
           <p:nvPr/>
         </p:nvSpPr>
@@ -5938,7 +4939,7 @@
       </p:sp>
       <p:sp>
         <p:nvSpPr>
-          <p:cNvPr id="33" name="때 5"/>
+          <p:cNvPr id="22" name="때 5"/>
           <p:cNvSpPr/>
           <p:nvPr/>
         </p:nvSpPr>
@@ -5969,7 +4970,7 @@
       </p:sp>
       <p:sp>
         <p:nvSpPr>
-          <p:cNvPr id="34" name="TextBox 33"/>
+          <p:cNvPr id="23" name="TextBox 22"/>
           <p:cNvSpPr txBox="1"/>
           <p:nvPr/>
         </p:nvSpPr>
@@ -6007,7 +5008,7 @@
       </p:sp>
       <p:sp>
         <p:nvSpPr>
-          <p:cNvPr id="35" name="TextBox 34"/>
+          <p:cNvPr id="24" name="TextBox 23"/>
           <p:cNvSpPr txBox="1"/>
           <p:nvPr/>
         </p:nvSpPr>
@@ -6045,7 +5046,7 @@
       </p:sp>
       <p:sp>
         <p:nvSpPr>
-          <p:cNvPr id="36" name="TextBox 35"/>
+          <p:cNvPr id="25" name="TextBox 24"/>
           <p:cNvSpPr txBox="1"/>
           <p:nvPr/>
         </p:nvSpPr>
@@ -6167,325 +5168,6 @@
       </p:sp>
       <p:sp>
         <p:nvSpPr>
-          <p:cNvPr id="5" name="장식"/>
-          <p:cNvSpPr/>
-          <p:nvPr/>
-        </p:nvSpPr>
-        <p:spPr>
-          <a:xfrm>
-            <a:off x="10902130" y="434860"/>
-            <a:ext cx="153549" cy="153549"/>
-          </a:xfrm>
-          <a:prstGeom prst="ellipse">
-            <a:avLst/>
-          </a:prstGeom>
-          <a:solidFill>
-            <a:srgbClr val="8C56B3"/>
-          </a:solidFill>
-          <a:ln>
-            <a:noFill/>
-          </a:ln>
-        </p:spPr>
-        <p:txBody>
-          <a:bodyPr rtlCol="0" anchor="ctr"/>
-          <a:lstStyle/>
-          <a:p>
-            <a:pPr algn="ctr"/>
-          </a:p>
-        </p:txBody>
-      </p:sp>
-      <p:sp>
-        <p:nvSpPr>
-          <p:cNvPr id="6" name="장식"/>
-          <p:cNvSpPr/>
-          <p:nvPr/>
-        </p:nvSpPr>
-        <p:spPr>
-          <a:xfrm>
-            <a:off x="11363808" y="1127246"/>
-            <a:ext cx="113682" cy="113682"/>
-          </a:xfrm>
-          <a:prstGeom prst="ellipse">
-            <a:avLst/>
-          </a:prstGeom>
-          <a:solidFill>
-            <a:srgbClr val="E3D3EE"/>
-          </a:solidFill>
-          <a:ln>
-            <a:noFill/>
-          </a:ln>
-        </p:spPr>
-        <p:txBody>
-          <a:bodyPr rtlCol="0" anchor="ctr"/>
-          <a:lstStyle/>
-          <a:p>
-            <a:pPr algn="ctr"/>
-          </a:p>
-        </p:txBody>
-      </p:sp>
-      <p:sp>
-        <p:nvSpPr>
-          <p:cNvPr id="7" name="장식"/>
-          <p:cNvSpPr/>
-          <p:nvPr/>
-        </p:nvSpPr>
-        <p:spPr>
-          <a:xfrm>
-            <a:off x="11568698" y="497270"/>
-            <a:ext cx="149756" cy="149756"/>
-          </a:xfrm>
-          <a:prstGeom prst="ellipse">
-            <a:avLst/>
-          </a:prstGeom>
-          <a:solidFill>
-            <a:srgbClr val="868D3F"/>
-          </a:solidFill>
-          <a:ln>
-            <a:noFill/>
-          </a:ln>
-        </p:spPr>
-        <p:txBody>
-          <a:bodyPr rtlCol="0" anchor="ctr"/>
-          <a:lstStyle/>
-          <a:p>
-            <a:pPr algn="ctr"/>
-          </a:p>
-        </p:txBody>
-      </p:sp>
-      <p:sp>
-        <p:nvSpPr>
-          <p:cNvPr id="8" name="장식"/>
-          <p:cNvSpPr/>
-          <p:nvPr/>
-        </p:nvSpPr>
-        <p:spPr>
-          <a:xfrm>
-            <a:off x="11523643" y="1096027"/>
-            <a:ext cx="134066" cy="134066"/>
-          </a:xfrm>
-          <a:prstGeom prst="ellipse">
-            <a:avLst/>
-          </a:prstGeom>
-          <a:solidFill>
-            <a:srgbClr val="8C56B3"/>
-          </a:solidFill>
-          <a:ln>
-            <a:noFill/>
-          </a:ln>
-        </p:spPr>
-        <p:txBody>
-          <a:bodyPr rtlCol="0" anchor="ctr"/>
-          <a:lstStyle/>
-          <a:p>
-            <a:pPr algn="ctr"/>
-          </a:p>
-        </p:txBody>
-      </p:sp>
-      <p:sp>
-        <p:nvSpPr>
-          <p:cNvPr id="9" name="장식"/>
-          <p:cNvSpPr/>
-          <p:nvPr/>
-        </p:nvSpPr>
-        <p:spPr>
-          <a:xfrm>
-            <a:off x="11054778" y="332121"/>
-            <a:ext cx="94724" cy="94724"/>
-          </a:xfrm>
-          <a:prstGeom prst="ellipse">
-            <a:avLst/>
-          </a:prstGeom>
-          <a:solidFill>
-            <a:srgbClr val="E3D3EE"/>
-          </a:solidFill>
-          <a:ln>
-            <a:noFill/>
-          </a:ln>
-        </p:spPr>
-        <p:txBody>
-          <a:bodyPr rtlCol="0" anchor="ctr"/>
-          <a:lstStyle/>
-          <a:p>
-            <a:pPr algn="ctr"/>
-          </a:p>
-        </p:txBody>
-      </p:sp>
-      <p:sp>
-        <p:nvSpPr>
-          <p:cNvPr id="10" name="장식"/>
-          <p:cNvSpPr/>
-          <p:nvPr/>
-        </p:nvSpPr>
-        <p:spPr>
-          <a:xfrm>
-            <a:off x="11428224" y="351933"/>
-            <a:ext cx="102698" cy="102698"/>
-          </a:xfrm>
-          <a:prstGeom prst="ellipse">
-            <a:avLst/>
-          </a:prstGeom>
-          <a:solidFill>
-            <a:srgbClr val="868D3F"/>
-          </a:solidFill>
-          <a:ln>
-            <a:noFill/>
-          </a:ln>
-        </p:spPr>
-        <p:txBody>
-          <a:bodyPr rtlCol="0" anchor="ctr"/>
-          <a:lstStyle/>
-          <a:p>
-            <a:pPr algn="ctr"/>
-          </a:p>
-        </p:txBody>
-      </p:sp>
-      <p:sp>
-        <p:nvSpPr>
-          <p:cNvPr id="11" name="장식"/>
-          <p:cNvSpPr/>
-          <p:nvPr/>
-        </p:nvSpPr>
-        <p:spPr>
-          <a:xfrm>
-            <a:off x="11597449" y="1195815"/>
-            <a:ext cx="177042" cy="177042"/>
-          </a:xfrm>
-          <a:prstGeom prst="ellipse">
-            <a:avLst/>
-          </a:prstGeom>
-          <a:solidFill>
-            <a:srgbClr val="8C56B3"/>
-          </a:solidFill>
-          <a:ln>
-            <a:noFill/>
-          </a:ln>
-        </p:spPr>
-        <p:txBody>
-          <a:bodyPr rtlCol="0" anchor="ctr"/>
-          <a:lstStyle/>
-          <a:p>
-            <a:pPr algn="ctr"/>
-          </a:p>
-        </p:txBody>
-      </p:sp>
-      <p:sp>
-        <p:nvSpPr>
-          <p:cNvPr id="12" name="장식"/>
-          <p:cNvSpPr/>
-          <p:nvPr/>
-        </p:nvSpPr>
-        <p:spPr>
-          <a:xfrm>
-            <a:off x="11309508" y="479409"/>
-            <a:ext cx="170008" cy="170008"/>
-          </a:xfrm>
-          <a:prstGeom prst="ellipse">
-            <a:avLst/>
-          </a:prstGeom>
-          <a:solidFill>
-            <a:srgbClr val="E3D3EE"/>
-          </a:solidFill>
-          <a:ln>
-            <a:noFill/>
-          </a:ln>
-        </p:spPr>
-        <p:txBody>
-          <a:bodyPr rtlCol="0" anchor="ctr"/>
-          <a:lstStyle/>
-          <a:p>
-            <a:pPr algn="ctr"/>
-          </a:p>
-        </p:txBody>
-      </p:sp>
-      <p:sp>
-        <p:nvSpPr>
-          <p:cNvPr id="13" name="장식"/>
-          <p:cNvSpPr/>
-          <p:nvPr/>
-        </p:nvSpPr>
-        <p:spPr>
-          <a:xfrm>
-            <a:off x="11092695" y="457650"/>
-            <a:ext cx="173296" cy="173296"/>
-          </a:xfrm>
-          <a:prstGeom prst="ellipse">
-            <a:avLst/>
-          </a:prstGeom>
-          <a:solidFill>
-            <a:srgbClr val="868D3F"/>
-          </a:solidFill>
-          <a:ln>
-            <a:noFill/>
-          </a:ln>
-        </p:spPr>
-        <p:txBody>
-          <a:bodyPr rtlCol="0" anchor="ctr"/>
-          <a:lstStyle/>
-          <a:p>
-            <a:pPr algn="ctr"/>
-          </a:p>
-        </p:txBody>
-      </p:sp>
-      <p:sp>
-        <p:nvSpPr>
-          <p:cNvPr id="14" name="장식"/>
-          <p:cNvSpPr/>
-          <p:nvPr/>
-        </p:nvSpPr>
-        <p:spPr>
-          <a:xfrm>
-            <a:off x="10802743" y="209851"/>
-            <a:ext cx="141496" cy="141496"/>
-          </a:xfrm>
-          <a:prstGeom prst="ellipse">
-            <a:avLst/>
-          </a:prstGeom>
-          <a:solidFill>
-            <a:srgbClr val="8C56B3"/>
-          </a:solidFill>
-          <a:ln>
-            <a:noFill/>
-          </a:ln>
-        </p:spPr>
-        <p:txBody>
-          <a:bodyPr rtlCol="0" anchor="ctr"/>
-          <a:lstStyle/>
-          <a:p>
-            <a:pPr algn="ctr"/>
-          </a:p>
-        </p:txBody>
-      </p:sp>
-      <p:sp>
-        <p:nvSpPr>
-          <p:cNvPr id="15" name="장식"/>
-          <p:cNvSpPr/>
-          <p:nvPr/>
-        </p:nvSpPr>
-        <p:spPr>
-          <a:xfrm>
-            <a:off x="11602587" y="1201606"/>
-            <a:ext cx="84341" cy="84341"/>
-          </a:xfrm>
-          <a:prstGeom prst="ellipse">
-            <a:avLst/>
-          </a:prstGeom>
-          <a:solidFill>
-            <a:srgbClr val="E3D3EE"/>
-          </a:solidFill>
-          <a:ln>
-            <a:noFill/>
-          </a:ln>
-        </p:spPr>
-        <p:txBody>
-          <a:bodyPr rtlCol="0" anchor="ctr"/>
-          <a:lstStyle/>
-          <a:p>
-            <a:pPr algn="ctr"/>
-          </a:p>
-        </p:txBody>
-      </p:sp>
-      <p:sp>
-        <p:nvSpPr>
           <p:cNvPr id="2" name="Title 1"/>
           <p:cNvSpPr>
             <a:spLocks noGrp="1"/>
@@ -6524,7 +5206,7 @@
       </p:sp>
       <p:graphicFrame>
         <p:nvGraphicFramePr>
-          <p:cNvPr id="16" name="표"/>
+          <p:cNvPr id="5" name="표"/>
           <p:cNvGraphicFramePr>
             <a:graphicFrameLocks noGrp="1"/>
           </p:cNvGraphicFramePr>
@@ -7565,325 +6247,6 @@
       </p:sp>
       <p:sp>
         <p:nvSpPr>
-          <p:cNvPr id="5" name="장식"/>
-          <p:cNvSpPr/>
-          <p:nvPr/>
-        </p:nvSpPr>
-        <p:spPr>
-          <a:xfrm>
-            <a:off x="10902130" y="434860"/>
-            <a:ext cx="153549" cy="153549"/>
-          </a:xfrm>
-          <a:prstGeom prst="ellipse">
-            <a:avLst/>
-          </a:prstGeom>
-          <a:solidFill>
-            <a:srgbClr val="8C56B3"/>
-          </a:solidFill>
-          <a:ln>
-            <a:noFill/>
-          </a:ln>
-        </p:spPr>
-        <p:txBody>
-          <a:bodyPr rtlCol="0" anchor="ctr"/>
-          <a:lstStyle/>
-          <a:p>
-            <a:pPr algn="ctr"/>
-          </a:p>
-        </p:txBody>
-      </p:sp>
-      <p:sp>
-        <p:nvSpPr>
-          <p:cNvPr id="6" name="장식"/>
-          <p:cNvSpPr/>
-          <p:nvPr/>
-        </p:nvSpPr>
-        <p:spPr>
-          <a:xfrm>
-            <a:off x="11363808" y="1127246"/>
-            <a:ext cx="113682" cy="113682"/>
-          </a:xfrm>
-          <a:prstGeom prst="ellipse">
-            <a:avLst/>
-          </a:prstGeom>
-          <a:solidFill>
-            <a:srgbClr val="E3D3EE"/>
-          </a:solidFill>
-          <a:ln>
-            <a:noFill/>
-          </a:ln>
-        </p:spPr>
-        <p:txBody>
-          <a:bodyPr rtlCol="0" anchor="ctr"/>
-          <a:lstStyle/>
-          <a:p>
-            <a:pPr algn="ctr"/>
-          </a:p>
-        </p:txBody>
-      </p:sp>
-      <p:sp>
-        <p:nvSpPr>
-          <p:cNvPr id="7" name="장식"/>
-          <p:cNvSpPr/>
-          <p:nvPr/>
-        </p:nvSpPr>
-        <p:spPr>
-          <a:xfrm>
-            <a:off x="11568698" y="497270"/>
-            <a:ext cx="149756" cy="149756"/>
-          </a:xfrm>
-          <a:prstGeom prst="ellipse">
-            <a:avLst/>
-          </a:prstGeom>
-          <a:solidFill>
-            <a:srgbClr val="868D3F"/>
-          </a:solidFill>
-          <a:ln>
-            <a:noFill/>
-          </a:ln>
-        </p:spPr>
-        <p:txBody>
-          <a:bodyPr rtlCol="0" anchor="ctr"/>
-          <a:lstStyle/>
-          <a:p>
-            <a:pPr algn="ctr"/>
-          </a:p>
-        </p:txBody>
-      </p:sp>
-      <p:sp>
-        <p:nvSpPr>
-          <p:cNvPr id="8" name="장식"/>
-          <p:cNvSpPr/>
-          <p:nvPr/>
-        </p:nvSpPr>
-        <p:spPr>
-          <a:xfrm>
-            <a:off x="11523643" y="1096027"/>
-            <a:ext cx="134066" cy="134066"/>
-          </a:xfrm>
-          <a:prstGeom prst="ellipse">
-            <a:avLst/>
-          </a:prstGeom>
-          <a:solidFill>
-            <a:srgbClr val="8C56B3"/>
-          </a:solidFill>
-          <a:ln>
-            <a:noFill/>
-          </a:ln>
-        </p:spPr>
-        <p:txBody>
-          <a:bodyPr rtlCol="0" anchor="ctr"/>
-          <a:lstStyle/>
-          <a:p>
-            <a:pPr algn="ctr"/>
-          </a:p>
-        </p:txBody>
-      </p:sp>
-      <p:sp>
-        <p:nvSpPr>
-          <p:cNvPr id="9" name="장식"/>
-          <p:cNvSpPr/>
-          <p:nvPr/>
-        </p:nvSpPr>
-        <p:spPr>
-          <a:xfrm>
-            <a:off x="11054778" y="332121"/>
-            <a:ext cx="94724" cy="94724"/>
-          </a:xfrm>
-          <a:prstGeom prst="ellipse">
-            <a:avLst/>
-          </a:prstGeom>
-          <a:solidFill>
-            <a:srgbClr val="E3D3EE"/>
-          </a:solidFill>
-          <a:ln>
-            <a:noFill/>
-          </a:ln>
-        </p:spPr>
-        <p:txBody>
-          <a:bodyPr rtlCol="0" anchor="ctr"/>
-          <a:lstStyle/>
-          <a:p>
-            <a:pPr algn="ctr"/>
-          </a:p>
-        </p:txBody>
-      </p:sp>
-      <p:sp>
-        <p:nvSpPr>
-          <p:cNvPr id="10" name="장식"/>
-          <p:cNvSpPr/>
-          <p:nvPr/>
-        </p:nvSpPr>
-        <p:spPr>
-          <a:xfrm>
-            <a:off x="11428224" y="351933"/>
-            <a:ext cx="102698" cy="102698"/>
-          </a:xfrm>
-          <a:prstGeom prst="ellipse">
-            <a:avLst/>
-          </a:prstGeom>
-          <a:solidFill>
-            <a:srgbClr val="868D3F"/>
-          </a:solidFill>
-          <a:ln>
-            <a:noFill/>
-          </a:ln>
-        </p:spPr>
-        <p:txBody>
-          <a:bodyPr rtlCol="0" anchor="ctr"/>
-          <a:lstStyle/>
-          <a:p>
-            <a:pPr algn="ctr"/>
-          </a:p>
-        </p:txBody>
-      </p:sp>
-      <p:sp>
-        <p:nvSpPr>
-          <p:cNvPr id="11" name="장식"/>
-          <p:cNvSpPr/>
-          <p:nvPr/>
-        </p:nvSpPr>
-        <p:spPr>
-          <a:xfrm>
-            <a:off x="11597449" y="1195815"/>
-            <a:ext cx="177042" cy="177042"/>
-          </a:xfrm>
-          <a:prstGeom prst="ellipse">
-            <a:avLst/>
-          </a:prstGeom>
-          <a:solidFill>
-            <a:srgbClr val="8C56B3"/>
-          </a:solidFill>
-          <a:ln>
-            <a:noFill/>
-          </a:ln>
-        </p:spPr>
-        <p:txBody>
-          <a:bodyPr rtlCol="0" anchor="ctr"/>
-          <a:lstStyle/>
-          <a:p>
-            <a:pPr algn="ctr"/>
-          </a:p>
-        </p:txBody>
-      </p:sp>
-      <p:sp>
-        <p:nvSpPr>
-          <p:cNvPr id="12" name="장식"/>
-          <p:cNvSpPr/>
-          <p:nvPr/>
-        </p:nvSpPr>
-        <p:spPr>
-          <a:xfrm>
-            <a:off x="11309508" y="479409"/>
-            <a:ext cx="170008" cy="170008"/>
-          </a:xfrm>
-          <a:prstGeom prst="ellipse">
-            <a:avLst/>
-          </a:prstGeom>
-          <a:solidFill>
-            <a:srgbClr val="E3D3EE"/>
-          </a:solidFill>
-          <a:ln>
-            <a:noFill/>
-          </a:ln>
-        </p:spPr>
-        <p:txBody>
-          <a:bodyPr rtlCol="0" anchor="ctr"/>
-          <a:lstStyle/>
-          <a:p>
-            <a:pPr algn="ctr"/>
-          </a:p>
-        </p:txBody>
-      </p:sp>
-      <p:sp>
-        <p:nvSpPr>
-          <p:cNvPr id="13" name="장식"/>
-          <p:cNvSpPr/>
-          <p:nvPr/>
-        </p:nvSpPr>
-        <p:spPr>
-          <a:xfrm>
-            <a:off x="11092695" y="457650"/>
-            <a:ext cx="173296" cy="173296"/>
-          </a:xfrm>
-          <a:prstGeom prst="ellipse">
-            <a:avLst/>
-          </a:prstGeom>
-          <a:solidFill>
-            <a:srgbClr val="868D3F"/>
-          </a:solidFill>
-          <a:ln>
-            <a:noFill/>
-          </a:ln>
-        </p:spPr>
-        <p:txBody>
-          <a:bodyPr rtlCol="0" anchor="ctr"/>
-          <a:lstStyle/>
-          <a:p>
-            <a:pPr algn="ctr"/>
-          </a:p>
-        </p:txBody>
-      </p:sp>
-      <p:sp>
-        <p:nvSpPr>
-          <p:cNvPr id="14" name="장식"/>
-          <p:cNvSpPr/>
-          <p:nvPr/>
-        </p:nvSpPr>
-        <p:spPr>
-          <a:xfrm>
-            <a:off x="10802743" y="209851"/>
-            <a:ext cx="141496" cy="141496"/>
-          </a:xfrm>
-          <a:prstGeom prst="ellipse">
-            <a:avLst/>
-          </a:prstGeom>
-          <a:solidFill>
-            <a:srgbClr val="8C56B3"/>
-          </a:solidFill>
-          <a:ln>
-            <a:noFill/>
-          </a:ln>
-        </p:spPr>
-        <p:txBody>
-          <a:bodyPr rtlCol="0" anchor="ctr"/>
-          <a:lstStyle/>
-          <a:p>
-            <a:pPr algn="ctr"/>
-          </a:p>
-        </p:txBody>
-      </p:sp>
-      <p:sp>
-        <p:nvSpPr>
-          <p:cNvPr id="15" name="장식"/>
-          <p:cNvSpPr/>
-          <p:nvPr/>
-        </p:nvSpPr>
-        <p:spPr>
-          <a:xfrm>
-            <a:off x="11602587" y="1201606"/>
-            <a:ext cx="84341" cy="84341"/>
-          </a:xfrm>
-          <a:prstGeom prst="ellipse">
-            <a:avLst/>
-          </a:prstGeom>
-          <a:solidFill>
-            <a:srgbClr val="E3D3EE"/>
-          </a:solidFill>
-          <a:ln>
-            <a:noFill/>
-          </a:ln>
-        </p:spPr>
-        <p:txBody>
-          <a:bodyPr rtlCol="0" anchor="ctr"/>
-          <a:lstStyle/>
-          <a:p>
-            <a:pPr algn="ctr"/>
-          </a:p>
-        </p:txBody>
-      </p:sp>
-      <p:sp>
-        <p:nvSpPr>
           <p:cNvPr id="2" name="Title 1"/>
           <p:cNvSpPr>
             <a:spLocks noGrp="1"/>
@@ -7922,7 +6285,7 @@
       </p:sp>
       <p:sp>
         <p:nvSpPr>
-          <p:cNvPr id="16" name="사진 자리"/>
+          <p:cNvPr id="5" name="사진 자리"/>
           <p:cNvSpPr/>
           <p:nvPr/>
         </p:nvSpPr>
@@ -7970,7 +6333,7 @@
       </p:sp>
       <p:sp>
         <p:nvSpPr>
-          <p:cNvPr id="17" name="사진 자리"/>
+          <p:cNvPr id="6" name="사진 자리"/>
           <p:cNvSpPr/>
           <p:nvPr/>
         </p:nvSpPr>
@@ -8018,7 +6381,7 @@
       </p:sp>
       <p:sp>
         <p:nvSpPr>
-          <p:cNvPr id="18" name="사진 자리"/>
+          <p:cNvPr id="7" name="사진 자리"/>
           <p:cNvSpPr/>
           <p:nvPr/>
         </p:nvSpPr>
@@ -8066,7 +6429,7 @@
       </p:sp>
       <p:sp>
         <p:nvSpPr>
-          <p:cNvPr id="19" name="사진 자리"/>
+          <p:cNvPr id="8" name="사진 자리"/>
           <p:cNvSpPr/>
           <p:nvPr/>
         </p:nvSpPr>
@@ -8114,7 +6477,7 @@
       </p:sp>
       <p:sp>
         <p:nvSpPr>
-          <p:cNvPr id="20" name="사진 자리"/>
+          <p:cNvPr id="9" name="사진 자리"/>
           <p:cNvSpPr/>
           <p:nvPr/>
         </p:nvSpPr>
@@ -8162,7 +6525,7 @@
       </p:sp>
       <p:sp>
         <p:nvSpPr>
-          <p:cNvPr id="21" name="사진 자리"/>
+          <p:cNvPr id="10" name="사진 자리"/>
           <p:cNvSpPr/>
           <p:nvPr/>
         </p:nvSpPr>
@@ -8210,7 +6573,7 @@
       </p:sp>
       <p:sp>
         <p:nvSpPr>
-          <p:cNvPr id="22" name="사진 자리"/>
+          <p:cNvPr id="11" name="사진 자리"/>
           <p:cNvSpPr/>
           <p:nvPr/>
         </p:nvSpPr>
@@ -8258,7 +6621,7 @@
       </p:sp>
       <p:sp>
         <p:nvSpPr>
-          <p:cNvPr id="23" name="사진 자리"/>
+          <p:cNvPr id="12" name="사진 자리"/>
           <p:cNvSpPr/>
           <p:nvPr/>
         </p:nvSpPr>
@@ -8315,14 +6678,6 @@
 <file path=ppt/slides/slide6.xml><?xml version="1.0" encoding="utf-8"?>
 <p:sld xmlns:a="http://schemas.openxmlformats.org/drawingml/2006/main" xmlns:p="http://schemas.openxmlformats.org/presentationml/2006/main" xmlns:r="http://schemas.openxmlformats.org/officeDocument/2006/relationships">
   <p:cSld>
-    <p:bg>
-      <p:bgPr>
-        <a:solidFill>
-          <a:srgbClr val="FFFFFF"/>
-        </a:solidFill>
-        <a:effectLst/>
-      </p:bgPr>
-    </p:bg>
     <p:spTree>
       <p:nvGrpSpPr>
         <p:cNvPr id="1" name=""/>
@@ -8330,383 +6685,30 @@
         <p:nvPr/>
       </p:nvGrpSpPr>
       <p:grpSpPr/>
-      <p:sp>
-        <p:nvSpPr>
-          <p:cNvPr id="3" name="장식"/>
-          <p:cNvSpPr/>
+      <p:pic>
+        <p:nvPicPr>
+          <p:cNvPr id="3" name="표지 그림" descr="birthday-11.jpg"/>
+          <p:cNvPicPr>
+            <a:picLocks noChangeAspect="1"/>
+          </p:cNvPicPr>
           <p:nvPr/>
-        </p:nvSpPr>
-        <p:spPr>
-          <a:xfrm>
-            <a:off x="7071183" y="-1714500"/>
-            <a:ext cx="7886700" cy="7886700"/>
-          </a:xfrm>
-          <a:prstGeom prst="ellipse">
+        </p:nvPicPr>
+        <p:blipFill>
+          <a:blip r:embed="rId2"/>
+          <a:stretch>
+            <a:fillRect/>
+          </a:stretch>
+        </p:blipFill>
+        <p:spPr>
+          <a:xfrm>
+            <a:off x="0" y="0"/>
+            <a:ext cx="12191695" cy="6858000"/>
+          </a:xfrm>
+          <a:prstGeom prst="rect">
             <a:avLst/>
           </a:prstGeom>
-          <a:solidFill>
-            <a:srgbClr val="E3D3EE"/>
-          </a:solidFill>
-          <a:ln>
-            <a:noFill/>
-          </a:ln>
-        </p:spPr>
-        <p:txBody>
-          <a:bodyPr rtlCol="0" anchor="ctr"/>
-          <a:lstStyle/>
-          <a:p>
-            <a:pPr algn="ctr"/>
-          </a:p>
-        </p:txBody>
-      </p:sp>
-      <p:sp>
-        <p:nvSpPr>
-          <p:cNvPr id="4" name="장식"/>
-          <p:cNvSpPr/>
-          <p:nvPr/>
-        </p:nvSpPr>
-        <p:spPr>
-          <a:xfrm>
-            <a:off x="9509522" y="3977639"/>
-            <a:ext cx="3429000" cy="3429000"/>
-          </a:xfrm>
-          <a:prstGeom prst="ellipse">
-            <a:avLst/>
-          </a:prstGeom>
-          <a:solidFill>
-            <a:srgbClr val="8C56B3"/>
-          </a:solidFill>
-          <a:ln>
-            <a:noFill/>
-          </a:ln>
-        </p:spPr>
-        <p:txBody>
-          <a:bodyPr rtlCol="0" anchor="ctr"/>
-          <a:lstStyle/>
-          <a:p>
-            <a:pPr algn="ctr"/>
-          </a:p>
-        </p:txBody>
-      </p:sp>
-      <p:sp>
-        <p:nvSpPr>
-          <p:cNvPr id="5" name="장식"/>
-          <p:cNvSpPr/>
-          <p:nvPr/>
-        </p:nvSpPr>
-        <p:spPr>
-          <a:xfrm>
-            <a:off x="8548094" y="665468"/>
-            <a:ext cx="439711" cy="439711"/>
-          </a:xfrm>
-          <a:prstGeom prst="ellipse">
-            <a:avLst/>
-          </a:prstGeom>
-          <a:solidFill>
-            <a:srgbClr val="8C56B3"/>
-          </a:solidFill>
-          <a:ln>
-            <a:noFill/>
-          </a:ln>
-        </p:spPr>
-        <p:txBody>
-          <a:bodyPr rtlCol="0" anchor="ctr"/>
-          <a:lstStyle/>
-          <a:p>
-            <a:pPr algn="ctr"/>
-          </a:p>
-        </p:txBody>
-      </p:sp>
-      <p:sp>
-        <p:nvSpPr>
-          <p:cNvPr id="6" name="장식"/>
-          <p:cNvSpPr/>
-          <p:nvPr/>
-        </p:nvSpPr>
-        <p:spPr>
-          <a:xfrm>
-            <a:off x="9870174" y="2648211"/>
-            <a:ext cx="325546" cy="325546"/>
-          </a:xfrm>
-          <a:prstGeom prst="ellipse">
-            <a:avLst/>
-          </a:prstGeom>
-          <a:solidFill>
-            <a:srgbClr val="E3D3EE"/>
-          </a:solidFill>
-          <a:ln>
-            <a:noFill/>
-          </a:ln>
-        </p:spPr>
-        <p:txBody>
-          <a:bodyPr rtlCol="0" anchor="ctr"/>
-          <a:lstStyle/>
-          <a:p>
-            <a:pPr algn="ctr"/>
-          </a:p>
-        </p:txBody>
-      </p:sp>
-      <p:sp>
-        <p:nvSpPr>
-          <p:cNvPr id="7" name="장식"/>
-          <p:cNvSpPr/>
-          <p:nvPr/>
-        </p:nvSpPr>
-        <p:spPr>
-          <a:xfrm>
-            <a:off x="10456902" y="844189"/>
-            <a:ext cx="428847" cy="428847"/>
-          </a:xfrm>
-          <a:prstGeom prst="ellipse">
-            <a:avLst/>
-          </a:prstGeom>
-          <a:solidFill>
-            <a:srgbClr val="868D3F"/>
-          </a:solidFill>
-          <a:ln>
-            <a:noFill/>
-          </a:ln>
-        </p:spPr>
-        <p:txBody>
-          <a:bodyPr rtlCol="0" anchor="ctr"/>
-          <a:lstStyle/>
-          <a:p>
-            <a:pPr algn="ctr"/>
-          </a:p>
-        </p:txBody>
-      </p:sp>
-      <p:sp>
-        <p:nvSpPr>
-          <p:cNvPr id="8" name="장식"/>
-          <p:cNvSpPr/>
-          <p:nvPr/>
-        </p:nvSpPr>
-        <p:spPr>
-          <a:xfrm>
-            <a:off x="10327883" y="2558810"/>
-            <a:ext cx="383917" cy="383917"/>
-          </a:xfrm>
-          <a:prstGeom prst="ellipse">
-            <a:avLst/>
-          </a:prstGeom>
-          <a:solidFill>
-            <a:srgbClr val="8C56B3"/>
-          </a:solidFill>
-          <a:ln>
-            <a:noFill/>
-          </a:ln>
-        </p:spPr>
-        <p:txBody>
-          <a:bodyPr rtlCol="0" anchor="ctr"/>
-          <a:lstStyle/>
-          <a:p>
-            <a:pPr algn="ctr"/>
-          </a:p>
-        </p:txBody>
-      </p:sp>
-      <p:sp>
-        <p:nvSpPr>
-          <p:cNvPr id="9" name="장식"/>
-          <p:cNvSpPr/>
-          <p:nvPr/>
-        </p:nvSpPr>
-        <p:spPr>
-          <a:xfrm>
-            <a:off x="8985224" y="371263"/>
-            <a:ext cx="271256" cy="271256"/>
-          </a:xfrm>
-          <a:prstGeom prst="ellipse">
-            <a:avLst/>
-          </a:prstGeom>
-          <a:solidFill>
-            <a:srgbClr val="E3D3EE"/>
-          </a:solidFill>
-          <a:ln>
-            <a:noFill/>
-          </a:ln>
-        </p:spPr>
-        <p:txBody>
-          <a:bodyPr rtlCol="0" anchor="ctr"/>
-          <a:lstStyle/>
-          <a:p>
-            <a:pPr algn="ctr"/>
-          </a:p>
-        </p:txBody>
-      </p:sp>
-      <p:sp>
-        <p:nvSpPr>
-          <p:cNvPr id="10" name="장식"/>
-          <p:cNvSpPr/>
-          <p:nvPr/>
-        </p:nvSpPr>
-        <p:spPr>
-          <a:xfrm>
-            <a:off x="10054636" y="427995"/>
-            <a:ext cx="294091" cy="294091"/>
-          </a:xfrm>
-          <a:prstGeom prst="ellipse">
-            <a:avLst/>
-          </a:prstGeom>
-          <a:solidFill>
-            <a:srgbClr val="868D3F"/>
-          </a:solidFill>
-          <a:ln>
-            <a:noFill/>
-          </a:ln>
-        </p:spPr>
-        <p:txBody>
-          <a:bodyPr rtlCol="0" anchor="ctr"/>
-          <a:lstStyle/>
-          <a:p>
-            <a:pPr algn="ctr"/>
-          </a:p>
-        </p:txBody>
-      </p:sp>
-      <p:sp>
-        <p:nvSpPr>
-          <p:cNvPr id="11" name="장식"/>
-          <p:cNvSpPr/>
-          <p:nvPr/>
-        </p:nvSpPr>
-        <p:spPr>
-          <a:xfrm>
-            <a:off x="10539235" y="2844566"/>
-            <a:ext cx="506986" cy="506986"/>
-          </a:xfrm>
-          <a:prstGeom prst="ellipse">
-            <a:avLst/>
-          </a:prstGeom>
-          <a:solidFill>
-            <a:srgbClr val="8C56B3"/>
-          </a:solidFill>
-          <a:ln>
-            <a:noFill/>
-          </a:ln>
-        </p:spPr>
-        <p:txBody>
-          <a:bodyPr rtlCol="0" anchor="ctr"/>
-          <a:lstStyle/>
-          <a:p>
-            <a:pPr algn="ctr"/>
-          </a:p>
-        </p:txBody>
-      </p:sp>
-      <p:sp>
-        <p:nvSpPr>
-          <p:cNvPr id="12" name="장식"/>
-          <p:cNvSpPr/>
-          <p:nvPr/>
-        </p:nvSpPr>
-        <p:spPr>
-          <a:xfrm>
-            <a:off x="9714677" y="793042"/>
-            <a:ext cx="486841" cy="486841"/>
-          </a:xfrm>
-          <a:prstGeom prst="ellipse">
-            <a:avLst/>
-          </a:prstGeom>
-          <a:solidFill>
-            <a:srgbClr val="E3D3EE"/>
-          </a:solidFill>
-          <a:ln>
-            <a:noFill/>
-          </a:ln>
-        </p:spPr>
-        <p:txBody>
-          <a:bodyPr rtlCol="0" anchor="ctr"/>
-          <a:lstStyle/>
-          <a:p>
-            <a:pPr algn="ctr"/>
-          </a:p>
-        </p:txBody>
-      </p:sp>
-      <p:sp>
-        <p:nvSpPr>
-          <p:cNvPr id="13" name="장식"/>
-          <p:cNvSpPr/>
-          <p:nvPr/>
-        </p:nvSpPr>
-        <p:spPr>
-          <a:xfrm>
-            <a:off x="9093804" y="730731"/>
-            <a:ext cx="496258" cy="496258"/>
-          </a:xfrm>
-          <a:prstGeom prst="ellipse">
-            <a:avLst/>
-          </a:prstGeom>
-          <a:solidFill>
-            <a:srgbClr val="868D3F"/>
-          </a:solidFill>
-          <a:ln>
-            <a:noFill/>
-          </a:ln>
-        </p:spPr>
-        <p:txBody>
-          <a:bodyPr rtlCol="0" anchor="ctr"/>
-          <a:lstStyle/>
-          <a:p>
-            <a:pPr algn="ctr"/>
-          </a:p>
-        </p:txBody>
-      </p:sp>
-      <p:sp>
-        <p:nvSpPr>
-          <p:cNvPr id="14" name="장식"/>
-          <p:cNvSpPr/>
-          <p:nvPr/>
-        </p:nvSpPr>
-        <p:spPr>
-          <a:xfrm>
-            <a:off x="8263488" y="21126"/>
-            <a:ext cx="405194" cy="405194"/>
-          </a:xfrm>
-          <a:prstGeom prst="ellipse">
-            <a:avLst/>
-          </a:prstGeom>
-          <a:solidFill>
-            <a:srgbClr val="8C56B3"/>
-          </a:solidFill>
-          <a:ln>
-            <a:noFill/>
-          </a:ln>
-        </p:spPr>
-        <p:txBody>
-          <a:bodyPr rtlCol="0" anchor="ctr"/>
-          <a:lstStyle/>
-          <a:p>
-            <a:pPr algn="ctr"/>
-          </a:p>
-        </p:txBody>
-      </p:sp>
-      <p:sp>
-        <p:nvSpPr>
-          <p:cNvPr id="15" name="장식"/>
-          <p:cNvSpPr/>
-          <p:nvPr/>
-        </p:nvSpPr>
-        <p:spPr>
-          <a:xfrm>
-            <a:off x="10553950" y="2861152"/>
-            <a:ext cx="241523" cy="241523"/>
-          </a:xfrm>
-          <a:prstGeom prst="ellipse">
-            <a:avLst/>
-          </a:prstGeom>
-          <a:solidFill>
-            <a:srgbClr val="E3D3EE"/>
-          </a:solidFill>
-          <a:ln>
-            <a:noFill/>
-          </a:ln>
-        </p:spPr>
-        <p:txBody>
-          <a:bodyPr rtlCol="0" anchor="ctr"/>
-          <a:lstStyle/>
-          <a:p>
-            <a:pPr algn="ctr"/>
-          </a:p>
-        </p:txBody>
-      </p:sp>
+        </p:spPr>
+      </p:pic>
       <p:sp>
         <p:nvSpPr>
           <p:cNvPr id="2" name="Title 1"/>
@@ -8720,7 +6722,7 @@
         <p:spPr>
           <a:xfrm>
             <a:off x="853418" y="2057400"/>
-            <a:ext cx="6705432" cy="1463040"/>
+            <a:ext cx="6095847" cy="1554480"/>
           </a:xfrm>
         </p:spPr>
         <p:txBody>
@@ -8740,20 +6742,20 @@
                   <a:srgbClr val="573371"/>
                 </a:solidFill>
               </a:rPr>
-              <a:t>함께해 주셔서 감사합니다</a:t>
-            </a:r>
-          </a:p>
-        </p:txBody>
-      </p:sp>
-      <p:sp>
-        <p:nvSpPr>
-          <p:cNvPr id="16" name="한 줄 문구"/>
+              <a:t>와 주셔서 고맙습니다</a:t>
+            </a:r>
+          </a:p>
+        </p:txBody>
+      </p:sp>
+      <p:sp>
+        <p:nvSpPr>
+          <p:cNvPr id="4" name="한 줄 문구"/>
           <p:cNvSpPr txBox="1"/>
           <p:nvPr/>
         </p:nvSpPr>
         <p:spPr>
           <a:xfrm>
-            <a:off x="853418" y="3611880"/>
+            <a:off x="853418" y="3749039"/>
             <a:ext cx="6095847" cy="822960"/>
           </a:xfrm>
           <a:prstGeom prst="rect">
@@ -8778,20 +6780,20 @@
                   <a:srgbClr val="573371"/>
                 </a:solidFill>
               </a:rPr>
-              <a:t>첫 번째 생일을 축하해 주셔서 고맙습니다</a:t>
-            </a:r>
-          </a:p>
-        </p:txBody>
-      </p:sp>
-      <p:sp>
-        <p:nvSpPr>
-          <p:cNvPr id="17" name="안내 문구"/>
+              <a:t>아이가 한 살이 되었습니다</a:t>
+            </a:r>
+          </a:p>
+        </p:txBody>
+      </p:sp>
+      <p:sp>
+        <p:nvSpPr>
+          <p:cNvPr id="5" name="안내 문구"/>
           <p:cNvSpPr txBox="1"/>
           <p:nvPr/>
         </p:nvSpPr>
         <p:spPr>
           <a:xfrm>
-            <a:off x="853418" y="4480560"/>
+            <a:off x="853418" y="4617720"/>
             <a:ext cx="6095847" cy="914400"/>
           </a:xfrm>
           <a:prstGeom prst="rect">

--- a/public/fun/pack/pptx/birthday/돌잔치_11_성장기록중심_라일락골목.pptx
+++ b/public/fun/pack/pptx/birthday/돌잔치_11_성장기록중심_라일락골목.pptx
@@ -3347,7 +3347,7 @@
             <a:r>
               <a:rPr sz="4000" b="1" i="0">
                 <a:solidFill>
-                  <a:srgbClr val="573371"/>
+                  <a:srgbClr val="4E226D"/>
                 </a:solidFill>
               </a:rPr>
               <a:t>첫 번째 생일</a:t>
@@ -3385,7 +3385,7 @@
             <a:r>
               <a:rPr sz="1700" b="0" i="1">
                 <a:solidFill>
-                  <a:srgbClr val="573371"/>
+                  <a:srgbClr val="4E226D"/>
                 </a:solidFill>
               </a:rPr>
               <a:t>키는 얼마나, 몸무게는 얼마나 늘었을까요</a:t>
@@ -3487,7 +3487,7 @@
             <a:avLst/>
           </a:prstGeom>
           <a:solidFill>
-            <a:srgbClr val="E3D3EE"/>
+            <a:srgbClr val="E8D4F7"/>
           </a:solidFill>
           <a:ln>
             <a:noFill/>
@@ -3516,7 +3516,7 @@
             <a:avLst/>
           </a:prstGeom>
           <a:solidFill>
-            <a:srgbClr val="8C56B3"/>
+            <a:srgbClr val="9651C8"/>
           </a:solidFill>
           <a:ln>
             <a:noFill/>
@@ -3560,7 +3560,7 @@
             <a:r>
               <a:rPr sz="3000" b="1" i="0">
                 <a:solidFill>
-                  <a:srgbClr val="573371"/>
+                  <a:srgbClr val="4E226D"/>
                 </a:solidFill>
               </a:rPr>
               <a:t>우리 아기를 소개합니다</a:t>
@@ -3585,11 +3585,11 @@
             </a:avLst>
           </a:prstGeom>
           <a:solidFill>
-            <a:srgbClr val="E3D3EE"/>
+            <a:srgbClr val="E8D4F7"/>
           </a:solidFill>
           <a:ln w="19050">
             <a:solidFill>
-              <a:srgbClr val="8C56B3"/>
+              <a:srgbClr val="9651C8"/>
             </a:solidFill>
             <a:prstDash val="dash"/>
           </a:ln>
@@ -3608,7 +3608,7 @@
             <a:r>
               <a:rPr sz="1400" b="0" i="0">
                 <a:solidFill>
-                  <a:srgbClr val="573371"/>
+                  <a:srgbClr val="4E226D"/>
                 </a:solidFill>
               </a:rPr>
               <a:t>아기 사진을 넣어 주세요</a:t>
@@ -3648,7 +3648,7 @@
                       <a:r>
                         <a:rPr sz="1500" b="1">
                           <a:solidFill>
-                            <a:srgbClr val="573371"/>
+                            <a:srgbClr val="4E226D"/>
                           </a:solidFill>
                         </a:rPr>
                         <a:t>이름</a:t>
@@ -3658,30 +3658,30 @@
                   <a:tcPr anchor="ctr" marL="73152" marR="73152">
                     <a:lnL w="9525" cap="flat" cmpd="sng" algn="ctr">
                       <a:solidFill>
-                        <a:srgbClr val="E3D3EE"/>
+                        <a:srgbClr val="E8D4F7"/>
                       </a:solidFill>
                       <a:prstDash val="solid"/>
                     </a:lnL>
                     <a:lnR w="9525" cap="flat" cmpd="sng" algn="ctr">
                       <a:solidFill>
-                        <a:srgbClr val="E3D3EE"/>
+                        <a:srgbClr val="E8D4F7"/>
                       </a:solidFill>
                       <a:prstDash val="solid"/>
                     </a:lnR>
                     <a:lnT w="9525" cap="flat" cmpd="sng" algn="ctr">
                       <a:solidFill>
-                        <a:srgbClr val="E3D3EE"/>
+                        <a:srgbClr val="E8D4F7"/>
                       </a:solidFill>
                       <a:prstDash val="solid"/>
                     </a:lnT>
                     <a:lnB w="9525" cap="flat" cmpd="sng" algn="ctr">
                       <a:solidFill>
-                        <a:srgbClr val="E3D3EE"/>
+                        <a:srgbClr val="E8D4F7"/>
                       </a:solidFill>
                       <a:prstDash val="solid"/>
                     </a:lnB>
                     <a:solidFill>
-                      <a:srgbClr val="E3D3EE"/>
+                      <a:srgbClr val="E8D4F7"/>
                     </a:solidFill>
                   </a:tcPr>
                 </a:tc>
@@ -3704,30 +3704,30 @@
                   <a:tcPr anchor="ctr" marL="73152" marR="73152">
                     <a:lnL w="9525" cap="flat" cmpd="sng" algn="ctr">
                       <a:solidFill>
-                        <a:srgbClr val="E3D3EE"/>
+                        <a:srgbClr val="E8D4F7"/>
                       </a:solidFill>
                       <a:prstDash val="solid"/>
                     </a:lnL>
                     <a:lnR w="9525" cap="flat" cmpd="sng" algn="ctr">
                       <a:solidFill>
-                        <a:srgbClr val="E3D3EE"/>
+                        <a:srgbClr val="E8D4F7"/>
                       </a:solidFill>
                       <a:prstDash val="solid"/>
                     </a:lnR>
                     <a:lnT w="9525" cap="flat" cmpd="sng" algn="ctr">
                       <a:solidFill>
-                        <a:srgbClr val="E3D3EE"/>
+                        <a:srgbClr val="E8D4F7"/>
                       </a:solidFill>
                       <a:prstDash val="solid"/>
                     </a:lnT>
                     <a:lnB w="9525" cap="flat" cmpd="sng" algn="ctr">
                       <a:solidFill>
-                        <a:srgbClr val="E3D3EE"/>
+                        <a:srgbClr val="E8D4F7"/>
                       </a:solidFill>
                       <a:prstDash val="solid"/>
                     </a:lnB>
                     <a:solidFill>
-                      <a:srgbClr val="F5F1F9"/>
+                      <a:srgbClr val="F8F3FC"/>
                     </a:solidFill>
                   </a:tcPr>
                 </a:tc>
@@ -3742,7 +3742,7 @@
                       <a:r>
                         <a:rPr sz="1500" b="1">
                           <a:solidFill>
-                            <a:srgbClr val="573371"/>
+                            <a:srgbClr val="4E226D"/>
                           </a:solidFill>
                         </a:rPr>
                         <a:t>생일</a:t>
@@ -3752,30 +3752,30 @@
                   <a:tcPr anchor="ctr" marL="73152" marR="73152">
                     <a:lnL w="9525" cap="flat" cmpd="sng" algn="ctr">
                       <a:solidFill>
-                        <a:srgbClr val="E3D3EE"/>
+                        <a:srgbClr val="E8D4F7"/>
                       </a:solidFill>
                       <a:prstDash val="solid"/>
                     </a:lnL>
                     <a:lnR w="9525" cap="flat" cmpd="sng" algn="ctr">
                       <a:solidFill>
-                        <a:srgbClr val="E3D3EE"/>
+                        <a:srgbClr val="E8D4F7"/>
                       </a:solidFill>
                       <a:prstDash val="solid"/>
                     </a:lnR>
                     <a:lnT w="9525" cap="flat" cmpd="sng" algn="ctr">
                       <a:solidFill>
-                        <a:srgbClr val="E3D3EE"/>
+                        <a:srgbClr val="E8D4F7"/>
                       </a:solidFill>
                       <a:prstDash val="solid"/>
                     </a:lnT>
                     <a:lnB w="9525" cap="flat" cmpd="sng" algn="ctr">
                       <a:solidFill>
-                        <a:srgbClr val="E3D3EE"/>
+                        <a:srgbClr val="E8D4F7"/>
                       </a:solidFill>
                       <a:prstDash val="solid"/>
                     </a:lnB>
                     <a:solidFill>
-                      <a:srgbClr val="E3D3EE"/>
+                      <a:srgbClr val="E8D4F7"/>
                     </a:solidFill>
                   </a:tcPr>
                 </a:tc>
@@ -3798,25 +3798,25 @@
                   <a:tcPr anchor="ctr" marL="73152" marR="73152">
                     <a:lnL w="9525" cap="flat" cmpd="sng" algn="ctr">
                       <a:solidFill>
-                        <a:srgbClr val="E3D3EE"/>
+                        <a:srgbClr val="E8D4F7"/>
                       </a:solidFill>
                       <a:prstDash val="solid"/>
                     </a:lnL>
                     <a:lnR w="9525" cap="flat" cmpd="sng" algn="ctr">
                       <a:solidFill>
-                        <a:srgbClr val="E3D3EE"/>
+                        <a:srgbClr val="E8D4F7"/>
                       </a:solidFill>
                       <a:prstDash val="solid"/>
                     </a:lnR>
                     <a:lnT w="9525" cap="flat" cmpd="sng" algn="ctr">
                       <a:solidFill>
-                        <a:srgbClr val="E3D3EE"/>
+                        <a:srgbClr val="E8D4F7"/>
                       </a:solidFill>
                       <a:prstDash val="solid"/>
                     </a:lnT>
                     <a:lnB w="9525" cap="flat" cmpd="sng" algn="ctr">
                       <a:solidFill>
-                        <a:srgbClr val="E3D3EE"/>
+                        <a:srgbClr val="E8D4F7"/>
                       </a:solidFill>
                       <a:prstDash val="solid"/>
                     </a:lnB>
@@ -3836,7 +3836,7 @@
                       <a:r>
                         <a:rPr sz="1500" b="1">
                           <a:solidFill>
-                            <a:srgbClr val="573371"/>
+                            <a:srgbClr val="4E226D"/>
                           </a:solidFill>
                         </a:rPr>
                         <a:t>키 · 몸무게</a:t>
@@ -3846,30 +3846,30 @@
                   <a:tcPr anchor="ctr" marL="73152" marR="73152">
                     <a:lnL w="9525" cap="flat" cmpd="sng" algn="ctr">
                       <a:solidFill>
-                        <a:srgbClr val="E3D3EE"/>
+                        <a:srgbClr val="E8D4F7"/>
                       </a:solidFill>
                       <a:prstDash val="solid"/>
                     </a:lnL>
                     <a:lnR w="9525" cap="flat" cmpd="sng" algn="ctr">
                       <a:solidFill>
-                        <a:srgbClr val="E3D3EE"/>
+                        <a:srgbClr val="E8D4F7"/>
                       </a:solidFill>
                       <a:prstDash val="solid"/>
                     </a:lnR>
                     <a:lnT w="9525" cap="flat" cmpd="sng" algn="ctr">
                       <a:solidFill>
-                        <a:srgbClr val="E3D3EE"/>
+                        <a:srgbClr val="E8D4F7"/>
                       </a:solidFill>
                       <a:prstDash val="solid"/>
                     </a:lnT>
                     <a:lnB w="9525" cap="flat" cmpd="sng" algn="ctr">
                       <a:solidFill>
-                        <a:srgbClr val="E3D3EE"/>
+                        <a:srgbClr val="E8D4F7"/>
                       </a:solidFill>
                       <a:prstDash val="solid"/>
                     </a:lnB>
                     <a:solidFill>
-                      <a:srgbClr val="E3D3EE"/>
+                      <a:srgbClr val="E8D4F7"/>
                     </a:solidFill>
                   </a:tcPr>
                 </a:tc>
@@ -3892,30 +3892,30 @@
                   <a:tcPr anchor="ctr" marL="73152" marR="73152">
                     <a:lnL w="9525" cap="flat" cmpd="sng" algn="ctr">
                       <a:solidFill>
-                        <a:srgbClr val="E3D3EE"/>
+                        <a:srgbClr val="E8D4F7"/>
                       </a:solidFill>
                       <a:prstDash val="solid"/>
                     </a:lnL>
                     <a:lnR w="9525" cap="flat" cmpd="sng" algn="ctr">
                       <a:solidFill>
-                        <a:srgbClr val="E3D3EE"/>
+                        <a:srgbClr val="E8D4F7"/>
                       </a:solidFill>
                       <a:prstDash val="solid"/>
                     </a:lnR>
                     <a:lnT w="9525" cap="flat" cmpd="sng" algn="ctr">
                       <a:solidFill>
-                        <a:srgbClr val="E3D3EE"/>
+                        <a:srgbClr val="E8D4F7"/>
                       </a:solidFill>
                       <a:prstDash val="solid"/>
                     </a:lnT>
                     <a:lnB w="9525" cap="flat" cmpd="sng" algn="ctr">
                       <a:solidFill>
-                        <a:srgbClr val="E3D3EE"/>
+                        <a:srgbClr val="E8D4F7"/>
                       </a:solidFill>
                       <a:prstDash val="solid"/>
                     </a:lnB>
                     <a:solidFill>
-                      <a:srgbClr val="F5F1F9"/>
+                      <a:srgbClr val="F8F3FC"/>
                     </a:solidFill>
                   </a:tcPr>
                 </a:tc>
@@ -3930,7 +3930,7 @@
                       <a:r>
                         <a:rPr sz="1500" b="1">
                           <a:solidFill>
-                            <a:srgbClr val="573371"/>
+                            <a:srgbClr val="4E226D"/>
                           </a:solidFill>
                         </a:rPr>
                         <a:t>좋아하는 것</a:t>
@@ -3940,30 +3940,30 @@
                   <a:tcPr anchor="ctr" marL="73152" marR="73152">
                     <a:lnL w="9525" cap="flat" cmpd="sng" algn="ctr">
                       <a:solidFill>
-                        <a:srgbClr val="E3D3EE"/>
+                        <a:srgbClr val="E8D4F7"/>
                       </a:solidFill>
                       <a:prstDash val="solid"/>
                     </a:lnL>
                     <a:lnR w="9525" cap="flat" cmpd="sng" algn="ctr">
                       <a:solidFill>
-                        <a:srgbClr val="E3D3EE"/>
+                        <a:srgbClr val="E8D4F7"/>
                       </a:solidFill>
                       <a:prstDash val="solid"/>
                     </a:lnR>
                     <a:lnT w="9525" cap="flat" cmpd="sng" algn="ctr">
                       <a:solidFill>
-                        <a:srgbClr val="E3D3EE"/>
+                        <a:srgbClr val="E8D4F7"/>
                       </a:solidFill>
                       <a:prstDash val="solid"/>
                     </a:lnT>
                     <a:lnB w="9525" cap="flat" cmpd="sng" algn="ctr">
                       <a:solidFill>
-                        <a:srgbClr val="E3D3EE"/>
+                        <a:srgbClr val="E8D4F7"/>
                       </a:solidFill>
                       <a:prstDash val="solid"/>
                     </a:lnB>
                     <a:solidFill>
-                      <a:srgbClr val="E3D3EE"/>
+                      <a:srgbClr val="E8D4F7"/>
                     </a:solidFill>
                   </a:tcPr>
                 </a:tc>
@@ -3986,25 +3986,25 @@
                   <a:tcPr anchor="ctr" marL="73152" marR="73152">
                     <a:lnL w="9525" cap="flat" cmpd="sng" algn="ctr">
                       <a:solidFill>
-                        <a:srgbClr val="E3D3EE"/>
+                        <a:srgbClr val="E8D4F7"/>
                       </a:solidFill>
                       <a:prstDash val="solid"/>
                     </a:lnL>
                     <a:lnR w="9525" cap="flat" cmpd="sng" algn="ctr">
                       <a:solidFill>
-                        <a:srgbClr val="E3D3EE"/>
+                        <a:srgbClr val="E8D4F7"/>
                       </a:solidFill>
                       <a:prstDash val="solid"/>
                     </a:lnR>
                     <a:lnT w="9525" cap="flat" cmpd="sng" algn="ctr">
                       <a:solidFill>
-                        <a:srgbClr val="E3D3EE"/>
+                        <a:srgbClr val="E8D4F7"/>
                       </a:solidFill>
                       <a:prstDash val="solid"/>
                     </a:lnT>
                     <a:lnB w="9525" cap="flat" cmpd="sng" algn="ctr">
                       <a:solidFill>
-                        <a:srgbClr val="E3D3EE"/>
+                        <a:srgbClr val="E8D4F7"/>
                       </a:solidFill>
                       <a:prstDash val="solid"/>
                     </a:lnB>
@@ -4024,7 +4024,7 @@
                       <a:r>
                         <a:rPr sz="1500" b="1">
                           <a:solidFill>
-                            <a:srgbClr val="573371"/>
+                            <a:srgbClr val="4E226D"/>
                           </a:solidFill>
                         </a:rPr>
                         <a:t>별명</a:t>
@@ -4034,30 +4034,30 @@
                   <a:tcPr anchor="ctr" marL="73152" marR="73152">
                     <a:lnL w="9525" cap="flat" cmpd="sng" algn="ctr">
                       <a:solidFill>
-                        <a:srgbClr val="E3D3EE"/>
+                        <a:srgbClr val="E8D4F7"/>
                       </a:solidFill>
                       <a:prstDash val="solid"/>
                     </a:lnL>
                     <a:lnR w="9525" cap="flat" cmpd="sng" algn="ctr">
                       <a:solidFill>
-                        <a:srgbClr val="E3D3EE"/>
+                        <a:srgbClr val="E8D4F7"/>
                       </a:solidFill>
                       <a:prstDash val="solid"/>
                     </a:lnR>
                     <a:lnT w="9525" cap="flat" cmpd="sng" algn="ctr">
                       <a:solidFill>
-                        <a:srgbClr val="E3D3EE"/>
+                        <a:srgbClr val="E8D4F7"/>
                       </a:solidFill>
                       <a:prstDash val="solid"/>
                     </a:lnT>
                     <a:lnB w="9525" cap="flat" cmpd="sng" algn="ctr">
                       <a:solidFill>
-                        <a:srgbClr val="E3D3EE"/>
+                        <a:srgbClr val="E8D4F7"/>
                       </a:solidFill>
                       <a:prstDash val="solid"/>
                     </a:lnB>
                     <a:solidFill>
-                      <a:srgbClr val="E3D3EE"/>
+                      <a:srgbClr val="E8D4F7"/>
                     </a:solidFill>
                   </a:tcPr>
                 </a:tc>
@@ -4080,30 +4080,30 @@
                   <a:tcPr anchor="ctr" marL="73152" marR="73152">
                     <a:lnL w="9525" cap="flat" cmpd="sng" algn="ctr">
                       <a:solidFill>
-                        <a:srgbClr val="E3D3EE"/>
+                        <a:srgbClr val="E8D4F7"/>
                       </a:solidFill>
                       <a:prstDash val="solid"/>
                     </a:lnL>
                     <a:lnR w="9525" cap="flat" cmpd="sng" algn="ctr">
                       <a:solidFill>
-                        <a:srgbClr val="E3D3EE"/>
+                        <a:srgbClr val="E8D4F7"/>
                       </a:solidFill>
                       <a:prstDash val="solid"/>
                     </a:lnR>
                     <a:lnT w="9525" cap="flat" cmpd="sng" algn="ctr">
                       <a:solidFill>
-                        <a:srgbClr val="E3D3EE"/>
+                        <a:srgbClr val="E8D4F7"/>
                       </a:solidFill>
                       <a:prstDash val="solid"/>
                     </a:lnT>
                     <a:lnB w="9525" cap="flat" cmpd="sng" algn="ctr">
                       <a:solidFill>
-                        <a:srgbClr val="E3D3EE"/>
+                        <a:srgbClr val="E8D4F7"/>
                       </a:solidFill>
                       <a:prstDash val="solid"/>
                     </a:lnB>
                     <a:solidFill>
-                      <a:srgbClr val="F5F1F9"/>
+                      <a:srgbClr val="F8F3FC"/>
                     </a:solidFill>
                   </a:tcPr>
                 </a:tc>
@@ -4118,7 +4118,7 @@
                       <a:r>
                         <a:rPr sz="1500" b="1">
                           <a:solidFill>
-                            <a:srgbClr val="573371"/>
+                            <a:srgbClr val="4E226D"/>
                           </a:solidFill>
                         </a:rPr>
                         <a:t>부모의 마음</a:t>
@@ -4128,30 +4128,30 @@
                   <a:tcPr anchor="ctr" marL="73152" marR="73152">
                     <a:lnL w="9525" cap="flat" cmpd="sng" algn="ctr">
                       <a:solidFill>
-                        <a:srgbClr val="E3D3EE"/>
+                        <a:srgbClr val="E8D4F7"/>
                       </a:solidFill>
                       <a:prstDash val="solid"/>
                     </a:lnL>
                     <a:lnR w="9525" cap="flat" cmpd="sng" algn="ctr">
                       <a:solidFill>
-                        <a:srgbClr val="E3D3EE"/>
+                        <a:srgbClr val="E8D4F7"/>
                       </a:solidFill>
                       <a:prstDash val="solid"/>
                     </a:lnR>
                     <a:lnT w="9525" cap="flat" cmpd="sng" algn="ctr">
                       <a:solidFill>
-                        <a:srgbClr val="E3D3EE"/>
+                        <a:srgbClr val="E8D4F7"/>
                       </a:solidFill>
                       <a:prstDash val="solid"/>
                     </a:lnT>
                     <a:lnB w="9525" cap="flat" cmpd="sng" algn="ctr">
                       <a:solidFill>
-                        <a:srgbClr val="E3D3EE"/>
+                        <a:srgbClr val="E8D4F7"/>
                       </a:solidFill>
                       <a:prstDash val="solid"/>
                     </a:lnB>
                     <a:solidFill>
-                      <a:srgbClr val="E3D3EE"/>
+                      <a:srgbClr val="E8D4F7"/>
                     </a:solidFill>
                   </a:tcPr>
                 </a:tc>
@@ -4174,25 +4174,25 @@
                   <a:tcPr anchor="ctr" marL="73152" marR="73152">
                     <a:lnL w="9525" cap="flat" cmpd="sng" algn="ctr">
                       <a:solidFill>
-                        <a:srgbClr val="E3D3EE"/>
+                        <a:srgbClr val="E8D4F7"/>
                       </a:solidFill>
                       <a:prstDash val="solid"/>
                     </a:lnL>
                     <a:lnR w="9525" cap="flat" cmpd="sng" algn="ctr">
                       <a:solidFill>
-                        <a:srgbClr val="E3D3EE"/>
+                        <a:srgbClr val="E8D4F7"/>
                       </a:solidFill>
                       <a:prstDash val="solid"/>
                     </a:lnR>
                     <a:lnT w="9525" cap="flat" cmpd="sng" algn="ctr">
                       <a:solidFill>
-                        <a:srgbClr val="E3D3EE"/>
+                        <a:srgbClr val="E8D4F7"/>
                       </a:solidFill>
                       <a:prstDash val="solid"/>
                     </a:lnT>
                     <a:lnB w="9525" cap="flat" cmpd="sng" algn="ctr">
                       <a:solidFill>
-                        <a:srgbClr val="E3D3EE"/>
+                        <a:srgbClr val="E8D4F7"/>
                       </a:solidFill>
                       <a:prstDash val="solid"/>
                     </a:lnB>
@@ -4247,7 +4247,7 @@
             <a:avLst/>
           </a:prstGeom>
           <a:solidFill>
-            <a:srgbClr val="E3D3EE"/>
+            <a:srgbClr val="E8D4F7"/>
           </a:solidFill>
           <a:ln>
             <a:noFill/>
@@ -4276,7 +4276,7 @@
             <a:avLst/>
           </a:prstGeom>
           <a:solidFill>
-            <a:srgbClr val="8C56B3"/>
+            <a:srgbClr val="9651C8"/>
           </a:solidFill>
           <a:ln>
             <a:noFill/>
@@ -4320,7 +4320,7 @@
             <a:r>
               <a:rPr sz="3000" b="1" i="0">
                 <a:solidFill>
-                  <a:srgbClr val="573371"/>
+                  <a:srgbClr val="4E226D"/>
                 </a:solidFill>
               </a:rPr>
               <a:t>한 해 성장 기록</a:t>
@@ -4343,7 +4343,7 @@
             <a:avLst/>
           </a:prstGeom>
           <a:solidFill>
-            <a:srgbClr val="E3D3EE"/>
+            <a:srgbClr val="E8D4F7"/>
           </a:solidFill>
           <a:ln>
             <a:noFill/>
@@ -4372,7 +4372,7 @@
             <a:avLst/>
           </a:prstGeom>
           <a:solidFill>
-            <a:srgbClr val="8C56B3"/>
+            <a:srgbClr val="9651C8"/>
           </a:solidFill>
           <a:ln w="38100">
             <a:solidFill>
@@ -4418,7 +4418,7 @@
             <a:r>
               <a:rPr sz="1400" b="1" i="0">
                 <a:solidFill>
-                  <a:srgbClr val="8C56B3"/>
+                  <a:srgbClr val="9651C8"/>
                 </a:solidFill>
               </a:rPr>
               <a:t>1개월</a:t>
@@ -4456,7 +4456,7 @@
             <a:r>
               <a:rPr sz="1600" b="1" i="0">
                 <a:solidFill>
-                  <a:srgbClr val="573371"/>
+                  <a:srgbClr val="4E226D"/>
                 </a:solidFill>
               </a:rPr>
               <a:t>처음 눈을 맞춘 날</a:t>
@@ -4517,7 +4517,7 @@
             <a:avLst/>
           </a:prstGeom>
           <a:solidFill>
-            <a:srgbClr val="8C56B3"/>
+            <a:srgbClr val="9651C8"/>
           </a:solidFill>
           <a:ln w="38100">
             <a:solidFill>
@@ -4563,7 +4563,7 @@
             <a:r>
               <a:rPr sz="1400" b="1" i="0">
                 <a:solidFill>
-                  <a:srgbClr val="8C56B3"/>
+                  <a:srgbClr val="9651C8"/>
                 </a:solidFill>
               </a:rPr>
               <a:t>3개월</a:t>
@@ -4601,7 +4601,7 @@
             <a:r>
               <a:rPr sz="1600" b="1" i="0">
                 <a:solidFill>
-                  <a:srgbClr val="573371"/>
+                  <a:srgbClr val="4E226D"/>
                 </a:solidFill>
               </a:rPr>
               <a:t>처음 웃은 날</a:t>
@@ -4662,7 +4662,7 @@
             <a:avLst/>
           </a:prstGeom>
           <a:solidFill>
-            <a:srgbClr val="8C56B3"/>
+            <a:srgbClr val="9651C8"/>
           </a:solidFill>
           <a:ln w="38100">
             <a:solidFill>
@@ -4708,7 +4708,7 @@
             <a:r>
               <a:rPr sz="1400" b="1" i="0">
                 <a:solidFill>
-                  <a:srgbClr val="8C56B3"/>
+                  <a:srgbClr val="9651C8"/>
                 </a:solidFill>
               </a:rPr>
               <a:t>6개월</a:t>
@@ -4746,7 +4746,7 @@
             <a:r>
               <a:rPr sz="1600" b="1" i="0">
                 <a:solidFill>
-                  <a:srgbClr val="573371"/>
+                  <a:srgbClr val="4E226D"/>
                 </a:solidFill>
               </a:rPr>
               <a:t>뒤집기 성공</a:t>
@@ -4807,7 +4807,7 @@
             <a:avLst/>
           </a:prstGeom>
           <a:solidFill>
-            <a:srgbClr val="8C56B3"/>
+            <a:srgbClr val="9651C8"/>
           </a:solidFill>
           <a:ln w="38100">
             <a:solidFill>
@@ -4853,7 +4853,7 @@
             <a:r>
               <a:rPr sz="1400" b="1" i="0">
                 <a:solidFill>
-                  <a:srgbClr val="8C56B3"/>
+                  <a:srgbClr val="9651C8"/>
                 </a:solidFill>
               </a:rPr>
               <a:t>9개월</a:t>
@@ -4891,7 +4891,7 @@
             <a:r>
               <a:rPr sz="1600" b="1" i="0">
                 <a:solidFill>
-                  <a:srgbClr val="573371"/>
+                  <a:srgbClr val="4E226D"/>
                 </a:solidFill>
               </a:rPr>
               <a:t>첫 이유식</a:t>
@@ -4952,7 +4952,7 @@
             <a:avLst/>
           </a:prstGeom>
           <a:solidFill>
-            <a:srgbClr val="8C56B3"/>
+            <a:srgbClr val="9651C8"/>
           </a:solidFill>
           <a:ln w="38100">
             <a:solidFill>
@@ -4998,7 +4998,7 @@
             <a:r>
               <a:rPr sz="1400" b="1" i="0">
                 <a:solidFill>
-                  <a:srgbClr val="8C56B3"/>
+                  <a:srgbClr val="9651C8"/>
                 </a:solidFill>
               </a:rPr>
               <a:t>12개월</a:t>
@@ -5036,7 +5036,7 @@
             <a:r>
               <a:rPr sz="1600" b="1" i="0">
                 <a:solidFill>
-                  <a:srgbClr val="573371"/>
+                  <a:srgbClr val="4E226D"/>
                 </a:solidFill>
               </a:rPr>
               <a:t>첫 걸음</a:t>
@@ -5123,7 +5123,7 @@
             <a:avLst/>
           </a:prstGeom>
           <a:solidFill>
-            <a:srgbClr val="E3D3EE"/>
+            <a:srgbClr val="E8D4F7"/>
           </a:solidFill>
           <a:ln>
             <a:noFill/>
@@ -5152,7 +5152,7 @@
             <a:avLst/>
           </a:prstGeom>
           <a:solidFill>
-            <a:srgbClr val="8C56B3"/>
+            <a:srgbClr val="9651C8"/>
           </a:solidFill>
           <a:ln>
             <a:noFill/>
@@ -5196,7 +5196,7 @@
             <a:r>
               <a:rPr sz="3000" b="1" i="0">
                 <a:solidFill>
-                  <a:srgbClr val="573371"/>
+                  <a:srgbClr val="4E226D"/>
                 </a:solidFill>
               </a:rPr>
               <a:t>키와 몸무게</a:t>
@@ -5249,30 +5249,30 @@
                   <a:tcPr anchor="ctr" marL="73152" marR="73152">
                     <a:lnL w="9525" cap="flat" cmpd="sng" algn="ctr">
                       <a:solidFill>
-                        <a:srgbClr val="8C56B3"/>
+                        <a:srgbClr val="9651C8"/>
                       </a:solidFill>
                       <a:prstDash val="solid"/>
                     </a:lnL>
                     <a:lnR w="9525" cap="flat" cmpd="sng" algn="ctr">
                       <a:solidFill>
-                        <a:srgbClr val="8C56B3"/>
+                        <a:srgbClr val="9651C8"/>
                       </a:solidFill>
                       <a:prstDash val="solid"/>
                     </a:lnR>
                     <a:lnT w="9525" cap="flat" cmpd="sng" algn="ctr">
                       <a:solidFill>
-                        <a:srgbClr val="8C56B3"/>
+                        <a:srgbClr val="9651C8"/>
                       </a:solidFill>
                       <a:prstDash val="solid"/>
                     </a:lnT>
                     <a:lnB w="9525" cap="flat" cmpd="sng" algn="ctr">
                       <a:solidFill>
-                        <a:srgbClr val="8C56B3"/>
+                        <a:srgbClr val="9651C8"/>
                       </a:solidFill>
                       <a:prstDash val="solid"/>
                     </a:lnB>
                     <a:solidFill>
-                      <a:srgbClr val="8C56B3"/>
+                      <a:srgbClr val="9651C8"/>
                     </a:solidFill>
                   </a:tcPr>
                 </a:tc>
@@ -5295,30 +5295,30 @@
                   <a:tcPr anchor="ctr" marL="73152" marR="73152">
                     <a:lnL w="9525" cap="flat" cmpd="sng" algn="ctr">
                       <a:solidFill>
-                        <a:srgbClr val="8C56B3"/>
+                        <a:srgbClr val="9651C8"/>
                       </a:solidFill>
                       <a:prstDash val="solid"/>
                     </a:lnL>
                     <a:lnR w="9525" cap="flat" cmpd="sng" algn="ctr">
                       <a:solidFill>
-                        <a:srgbClr val="8C56B3"/>
+                        <a:srgbClr val="9651C8"/>
                       </a:solidFill>
                       <a:prstDash val="solid"/>
                     </a:lnR>
                     <a:lnT w="9525" cap="flat" cmpd="sng" algn="ctr">
                       <a:solidFill>
-                        <a:srgbClr val="8C56B3"/>
+                        <a:srgbClr val="9651C8"/>
                       </a:solidFill>
                       <a:prstDash val="solid"/>
                     </a:lnT>
                     <a:lnB w="9525" cap="flat" cmpd="sng" algn="ctr">
                       <a:solidFill>
-                        <a:srgbClr val="8C56B3"/>
+                        <a:srgbClr val="9651C8"/>
                       </a:solidFill>
                       <a:prstDash val="solid"/>
                     </a:lnB>
                     <a:solidFill>
-                      <a:srgbClr val="8C56B3"/>
+                      <a:srgbClr val="9651C8"/>
                     </a:solidFill>
                   </a:tcPr>
                 </a:tc>
@@ -5341,30 +5341,30 @@
                   <a:tcPr anchor="ctr" marL="73152" marR="73152">
                     <a:lnL w="9525" cap="flat" cmpd="sng" algn="ctr">
                       <a:solidFill>
-                        <a:srgbClr val="8C56B3"/>
+                        <a:srgbClr val="9651C8"/>
                       </a:solidFill>
                       <a:prstDash val="solid"/>
                     </a:lnL>
                     <a:lnR w="9525" cap="flat" cmpd="sng" algn="ctr">
                       <a:solidFill>
-                        <a:srgbClr val="8C56B3"/>
+                        <a:srgbClr val="9651C8"/>
                       </a:solidFill>
                       <a:prstDash val="solid"/>
                     </a:lnR>
                     <a:lnT w="9525" cap="flat" cmpd="sng" algn="ctr">
                       <a:solidFill>
-                        <a:srgbClr val="8C56B3"/>
+                        <a:srgbClr val="9651C8"/>
                       </a:solidFill>
                       <a:prstDash val="solid"/>
                     </a:lnT>
                     <a:lnB w="9525" cap="flat" cmpd="sng" algn="ctr">
                       <a:solidFill>
-                        <a:srgbClr val="8C56B3"/>
+                        <a:srgbClr val="9651C8"/>
                       </a:solidFill>
                       <a:prstDash val="solid"/>
                     </a:lnB>
                     <a:solidFill>
-                      <a:srgbClr val="8C56B3"/>
+                      <a:srgbClr val="9651C8"/>
                     </a:solidFill>
                   </a:tcPr>
                 </a:tc>
@@ -5387,30 +5387,30 @@
                   <a:tcPr anchor="ctr" marL="73152" marR="73152">
                     <a:lnL w="9525" cap="flat" cmpd="sng" algn="ctr">
                       <a:solidFill>
-                        <a:srgbClr val="8C56B3"/>
+                        <a:srgbClr val="9651C8"/>
                       </a:solidFill>
                       <a:prstDash val="solid"/>
                     </a:lnL>
                     <a:lnR w="9525" cap="flat" cmpd="sng" algn="ctr">
                       <a:solidFill>
-                        <a:srgbClr val="8C56B3"/>
+                        <a:srgbClr val="9651C8"/>
                       </a:solidFill>
                       <a:prstDash val="solid"/>
                     </a:lnR>
                     <a:lnT w="9525" cap="flat" cmpd="sng" algn="ctr">
                       <a:solidFill>
-                        <a:srgbClr val="8C56B3"/>
+                        <a:srgbClr val="9651C8"/>
                       </a:solidFill>
                       <a:prstDash val="solid"/>
                     </a:lnT>
                     <a:lnB w="9525" cap="flat" cmpd="sng" algn="ctr">
                       <a:solidFill>
-                        <a:srgbClr val="8C56B3"/>
+                        <a:srgbClr val="9651C8"/>
                       </a:solidFill>
                       <a:prstDash val="solid"/>
                     </a:lnB>
                     <a:solidFill>
-                      <a:srgbClr val="8C56B3"/>
+                      <a:srgbClr val="9651C8"/>
                     </a:solidFill>
                   </a:tcPr>
                 </a:tc>
@@ -5433,30 +5433,30 @@
                   <a:tcPr anchor="ctr" marL="73152" marR="73152">
                     <a:lnL w="9525" cap="flat" cmpd="sng" algn="ctr">
                       <a:solidFill>
-                        <a:srgbClr val="8C56B3"/>
+                        <a:srgbClr val="9651C8"/>
                       </a:solidFill>
                       <a:prstDash val="solid"/>
                     </a:lnL>
                     <a:lnR w="9525" cap="flat" cmpd="sng" algn="ctr">
                       <a:solidFill>
-                        <a:srgbClr val="8C56B3"/>
+                        <a:srgbClr val="9651C8"/>
                       </a:solidFill>
                       <a:prstDash val="solid"/>
                     </a:lnR>
                     <a:lnT w="9525" cap="flat" cmpd="sng" algn="ctr">
                       <a:solidFill>
-                        <a:srgbClr val="8C56B3"/>
+                        <a:srgbClr val="9651C8"/>
                       </a:solidFill>
                       <a:prstDash val="solid"/>
                     </a:lnT>
                     <a:lnB w="9525" cap="flat" cmpd="sng" algn="ctr">
                       <a:solidFill>
-                        <a:srgbClr val="8C56B3"/>
+                        <a:srgbClr val="9651C8"/>
                       </a:solidFill>
                       <a:prstDash val="solid"/>
                     </a:lnB>
                     <a:solidFill>
-                      <a:srgbClr val="8C56B3"/>
+                      <a:srgbClr val="9651C8"/>
                     </a:solidFill>
                   </a:tcPr>
                 </a:tc>
@@ -5471,7 +5471,7 @@
                       <a:r>
                         <a:rPr sz="1600" b="1">
                           <a:solidFill>
-                            <a:srgbClr val="573371"/>
+                            <a:srgbClr val="4E226D"/>
                           </a:solidFill>
                         </a:rPr>
                         <a:t>키(cm)</a:t>
@@ -5481,30 +5481,30 @@
                   <a:tcPr anchor="ctr" marL="73152" marR="73152">
                     <a:lnL w="9525" cap="flat" cmpd="sng" algn="ctr">
                       <a:solidFill>
-                        <a:srgbClr val="E3D3EE"/>
+                        <a:srgbClr val="E8D4F7"/>
                       </a:solidFill>
                       <a:prstDash val="solid"/>
                     </a:lnL>
                     <a:lnR w="9525" cap="flat" cmpd="sng" algn="ctr">
                       <a:solidFill>
-                        <a:srgbClr val="E3D3EE"/>
+                        <a:srgbClr val="E8D4F7"/>
                       </a:solidFill>
                       <a:prstDash val="solid"/>
                     </a:lnR>
                     <a:lnT w="9525" cap="flat" cmpd="sng" algn="ctr">
                       <a:solidFill>
-                        <a:srgbClr val="E3D3EE"/>
+                        <a:srgbClr val="E8D4F7"/>
                       </a:solidFill>
                       <a:prstDash val="solid"/>
                     </a:lnT>
                     <a:lnB w="9525" cap="flat" cmpd="sng" algn="ctr">
                       <a:solidFill>
-                        <a:srgbClr val="E3D3EE"/>
+                        <a:srgbClr val="E8D4F7"/>
                       </a:solidFill>
                       <a:prstDash val="solid"/>
                     </a:lnB>
                     <a:solidFill>
-                      <a:srgbClr val="E3D3EE"/>
+                      <a:srgbClr val="E8D4F7"/>
                     </a:solidFill>
                   </a:tcPr>
                 </a:tc>
@@ -5527,25 +5527,25 @@
                   <a:tcPr anchor="ctr" marL="73152" marR="73152">
                     <a:lnL w="9525" cap="flat" cmpd="sng" algn="ctr">
                       <a:solidFill>
-                        <a:srgbClr val="E3D3EE"/>
+                        <a:srgbClr val="E8D4F7"/>
                       </a:solidFill>
                       <a:prstDash val="solid"/>
                     </a:lnL>
                     <a:lnR w="9525" cap="flat" cmpd="sng" algn="ctr">
                       <a:solidFill>
-                        <a:srgbClr val="E3D3EE"/>
+                        <a:srgbClr val="E8D4F7"/>
                       </a:solidFill>
                       <a:prstDash val="solid"/>
                     </a:lnR>
                     <a:lnT w="9525" cap="flat" cmpd="sng" algn="ctr">
                       <a:solidFill>
-                        <a:srgbClr val="E3D3EE"/>
+                        <a:srgbClr val="E8D4F7"/>
                       </a:solidFill>
                       <a:prstDash val="solid"/>
                     </a:lnT>
                     <a:lnB w="9525" cap="flat" cmpd="sng" algn="ctr">
                       <a:solidFill>
-                        <a:srgbClr val="E3D3EE"/>
+                        <a:srgbClr val="E8D4F7"/>
                       </a:solidFill>
                       <a:prstDash val="solid"/>
                     </a:lnB>
@@ -5573,25 +5573,25 @@
                   <a:tcPr anchor="ctr" marL="73152" marR="73152">
                     <a:lnL w="9525" cap="flat" cmpd="sng" algn="ctr">
                       <a:solidFill>
-                        <a:srgbClr val="E3D3EE"/>
+                        <a:srgbClr val="E8D4F7"/>
                       </a:solidFill>
                       <a:prstDash val="solid"/>
                     </a:lnL>
                     <a:lnR w="9525" cap="flat" cmpd="sng" algn="ctr">
                       <a:solidFill>
-                        <a:srgbClr val="E3D3EE"/>
+                        <a:srgbClr val="E8D4F7"/>
                       </a:solidFill>
                       <a:prstDash val="solid"/>
                     </a:lnR>
                     <a:lnT w="9525" cap="flat" cmpd="sng" algn="ctr">
                       <a:solidFill>
-                        <a:srgbClr val="E3D3EE"/>
+                        <a:srgbClr val="E8D4F7"/>
                       </a:solidFill>
                       <a:prstDash val="solid"/>
                     </a:lnT>
                     <a:lnB w="9525" cap="flat" cmpd="sng" algn="ctr">
                       <a:solidFill>
-                        <a:srgbClr val="E3D3EE"/>
+                        <a:srgbClr val="E8D4F7"/>
                       </a:solidFill>
                       <a:prstDash val="solid"/>
                     </a:lnB>
@@ -5619,25 +5619,25 @@
                   <a:tcPr anchor="ctr" marL="73152" marR="73152">
                     <a:lnL w="9525" cap="flat" cmpd="sng" algn="ctr">
                       <a:solidFill>
-                        <a:srgbClr val="E3D3EE"/>
+                        <a:srgbClr val="E8D4F7"/>
                       </a:solidFill>
                       <a:prstDash val="solid"/>
                     </a:lnL>
                     <a:lnR w="9525" cap="flat" cmpd="sng" algn="ctr">
                       <a:solidFill>
-                        <a:srgbClr val="E3D3EE"/>
+                        <a:srgbClr val="E8D4F7"/>
                       </a:solidFill>
                       <a:prstDash val="solid"/>
                     </a:lnR>
                     <a:lnT w="9525" cap="flat" cmpd="sng" algn="ctr">
                       <a:solidFill>
-                        <a:srgbClr val="E3D3EE"/>
+                        <a:srgbClr val="E8D4F7"/>
                       </a:solidFill>
                       <a:prstDash val="solid"/>
                     </a:lnT>
                     <a:lnB w="9525" cap="flat" cmpd="sng" algn="ctr">
                       <a:solidFill>
-                        <a:srgbClr val="E3D3EE"/>
+                        <a:srgbClr val="E8D4F7"/>
                       </a:solidFill>
                       <a:prstDash val="solid"/>
                     </a:lnB>
@@ -5665,25 +5665,25 @@
                   <a:tcPr anchor="ctr" marL="73152" marR="73152">
                     <a:lnL w="9525" cap="flat" cmpd="sng" algn="ctr">
                       <a:solidFill>
-                        <a:srgbClr val="E3D3EE"/>
+                        <a:srgbClr val="E8D4F7"/>
                       </a:solidFill>
                       <a:prstDash val="solid"/>
                     </a:lnL>
                     <a:lnR w="9525" cap="flat" cmpd="sng" algn="ctr">
                       <a:solidFill>
-                        <a:srgbClr val="E3D3EE"/>
+                        <a:srgbClr val="E8D4F7"/>
                       </a:solidFill>
                       <a:prstDash val="solid"/>
                     </a:lnR>
                     <a:lnT w="9525" cap="flat" cmpd="sng" algn="ctr">
                       <a:solidFill>
-                        <a:srgbClr val="E3D3EE"/>
+                        <a:srgbClr val="E8D4F7"/>
                       </a:solidFill>
                       <a:prstDash val="solid"/>
                     </a:lnT>
                     <a:lnB w="9525" cap="flat" cmpd="sng" algn="ctr">
                       <a:solidFill>
-                        <a:srgbClr val="E3D3EE"/>
+                        <a:srgbClr val="E8D4F7"/>
                       </a:solidFill>
                       <a:prstDash val="solid"/>
                     </a:lnB>
@@ -5703,7 +5703,7 @@
                       <a:r>
                         <a:rPr sz="1600" b="1">
                           <a:solidFill>
-                            <a:srgbClr val="573371"/>
+                            <a:srgbClr val="4E226D"/>
                           </a:solidFill>
                         </a:rPr>
                         <a:t>몸무게(kg)</a:t>
@@ -5713,30 +5713,30 @@
                   <a:tcPr anchor="ctr" marL="73152" marR="73152">
                     <a:lnL w="9525" cap="flat" cmpd="sng" algn="ctr">
                       <a:solidFill>
-                        <a:srgbClr val="E3D3EE"/>
+                        <a:srgbClr val="E8D4F7"/>
                       </a:solidFill>
                       <a:prstDash val="solid"/>
                     </a:lnL>
                     <a:lnR w="9525" cap="flat" cmpd="sng" algn="ctr">
                       <a:solidFill>
-                        <a:srgbClr val="E3D3EE"/>
+                        <a:srgbClr val="E8D4F7"/>
                       </a:solidFill>
                       <a:prstDash val="solid"/>
                     </a:lnR>
                     <a:lnT w="9525" cap="flat" cmpd="sng" algn="ctr">
                       <a:solidFill>
-                        <a:srgbClr val="E3D3EE"/>
+                        <a:srgbClr val="E8D4F7"/>
                       </a:solidFill>
                       <a:prstDash val="solid"/>
                     </a:lnT>
                     <a:lnB w="9525" cap="flat" cmpd="sng" algn="ctr">
                       <a:solidFill>
-                        <a:srgbClr val="E3D3EE"/>
+                        <a:srgbClr val="E8D4F7"/>
                       </a:solidFill>
                       <a:prstDash val="solid"/>
                     </a:lnB>
                     <a:solidFill>
-                      <a:srgbClr val="E3D3EE"/>
+                      <a:srgbClr val="E8D4F7"/>
                     </a:solidFill>
                   </a:tcPr>
                 </a:tc>
@@ -5759,30 +5759,30 @@
                   <a:tcPr anchor="ctr" marL="73152" marR="73152">
                     <a:lnL w="9525" cap="flat" cmpd="sng" algn="ctr">
                       <a:solidFill>
-                        <a:srgbClr val="E3D3EE"/>
+                        <a:srgbClr val="E8D4F7"/>
                       </a:solidFill>
                       <a:prstDash val="solid"/>
                     </a:lnL>
                     <a:lnR w="9525" cap="flat" cmpd="sng" algn="ctr">
                       <a:solidFill>
-                        <a:srgbClr val="E3D3EE"/>
+                        <a:srgbClr val="E8D4F7"/>
                       </a:solidFill>
                       <a:prstDash val="solid"/>
                     </a:lnR>
                     <a:lnT w="9525" cap="flat" cmpd="sng" algn="ctr">
                       <a:solidFill>
-                        <a:srgbClr val="E3D3EE"/>
+                        <a:srgbClr val="E8D4F7"/>
                       </a:solidFill>
                       <a:prstDash val="solid"/>
                     </a:lnT>
                     <a:lnB w="9525" cap="flat" cmpd="sng" algn="ctr">
                       <a:solidFill>
-                        <a:srgbClr val="E3D3EE"/>
+                        <a:srgbClr val="E8D4F7"/>
                       </a:solidFill>
                       <a:prstDash val="solid"/>
                     </a:lnB>
                     <a:solidFill>
-                      <a:srgbClr val="F5F1F9"/>
+                      <a:srgbClr val="F8F3FC"/>
                     </a:solidFill>
                   </a:tcPr>
                 </a:tc>
@@ -5805,30 +5805,30 @@
                   <a:tcPr anchor="ctr" marL="73152" marR="73152">
                     <a:lnL w="9525" cap="flat" cmpd="sng" algn="ctr">
                       <a:solidFill>
-                        <a:srgbClr val="E3D3EE"/>
+                        <a:srgbClr val="E8D4F7"/>
                       </a:solidFill>
                       <a:prstDash val="solid"/>
                     </a:lnL>
                     <a:lnR w="9525" cap="flat" cmpd="sng" algn="ctr">
                       <a:solidFill>
-                        <a:srgbClr val="E3D3EE"/>
+                        <a:srgbClr val="E8D4F7"/>
                       </a:solidFill>
                       <a:prstDash val="solid"/>
                     </a:lnR>
                     <a:lnT w="9525" cap="flat" cmpd="sng" algn="ctr">
                       <a:solidFill>
-                        <a:srgbClr val="E3D3EE"/>
+                        <a:srgbClr val="E8D4F7"/>
                       </a:solidFill>
                       <a:prstDash val="solid"/>
                     </a:lnT>
                     <a:lnB w="9525" cap="flat" cmpd="sng" algn="ctr">
                       <a:solidFill>
-                        <a:srgbClr val="E3D3EE"/>
+                        <a:srgbClr val="E8D4F7"/>
                       </a:solidFill>
                       <a:prstDash val="solid"/>
                     </a:lnB>
                     <a:solidFill>
-                      <a:srgbClr val="F5F1F9"/>
+                      <a:srgbClr val="F8F3FC"/>
                     </a:solidFill>
                   </a:tcPr>
                 </a:tc>
@@ -5851,30 +5851,30 @@
                   <a:tcPr anchor="ctr" marL="73152" marR="73152">
                     <a:lnL w="9525" cap="flat" cmpd="sng" algn="ctr">
                       <a:solidFill>
-                        <a:srgbClr val="E3D3EE"/>
+                        <a:srgbClr val="E8D4F7"/>
                       </a:solidFill>
                       <a:prstDash val="solid"/>
                     </a:lnL>
                     <a:lnR w="9525" cap="flat" cmpd="sng" algn="ctr">
                       <a:solidFill>
-                        <a:srgbClr val="E3D3EE"/>
+                        <a:srgbClr val="E8D4F7"/>
                       </a:solidFill>
                       <a:prstDash val="solid"/>
                     </a:lnR>
                     <a:lnT w="9525" cap="flat" cmpd="sng" algn="ctr">
                       <a:solidFill>
-                        <a:srgbClr val="E3D3EE"/>
+                        <a:srgbClr val="E8D4F7"/>
                       </a:solidFill>
                       <a:prstDash val="solid"/>
                     </a:lnT>
                     <a:lnB w="9525" cap="flat" cmpd="sng" algn="ctr">
                       <a:solidFill>
-                        <a:srgbClr val="E3D3EE"/>
+                        <a:srgbClr val="E8D4F7"/>
                       </a:solidFill>
                       <a:prstDash val="solid"/>
                     </a:lnB>
                     <a:solidFill>
-                      <a:srgbClr val="F5F1F9"/>
+                      <a:srgbClr val="F8F3FC"/>
                     </a:solidFill>
                   </a:tcPr>
                 </a:tc>
@@ -5897,30 +5897,30 @@
                   <a:tcPr anchor="ctr" marL="73152" marR="73152">
                     <a:lnL w="9525" cap="flat" cmpd="sng" algn="ctr">
                       <a:solidFill>
-                        <a:srgbClr val="E3D3EE"/>
+                        <a:srgbClr val="E8D4F7"/>
                       </a:solidFill>
                       <a:prstDash val="solid"/>
                     </a:lnL>
                     <a:lnR w="9525" cap="flat" cmpd="sng" algn="ctr">
                       <a:solidFill>
-                        <a:srgbClr val="E3D3EE"/>
+                        <a:srgbClr val="E8D4F7"/>
                       </a:solidFill>
                       <a:prstDash val="solid"/>
                     </a:lnR>
                     <a:lnT w="9525" cap="flat" cmpd="sng" algn="ctr">
                       <a:solidFill>
-                        <a:srgbClr val="E3D3EE"/>
+                        <a:srgbClr val="E8D4F7"/>
                       </a:solidFill>
                       <a:prstDash val="solid"/>
                     </a:lnT>
                     <a:lnB w="9525" cap="flat" cmpd="sng" algn="ctr">
                       <a:solidFill>
-                        <a:srgbClr val="E3D3EE"/>
+                        <a:srgbClr val="E8D4F7"/>
                       </a:solidFill>
                       <a:prstDash val="solid"/>
                     </a:lnB>
                     <a:solidFill>
-                      <a:srgbClr val="F5F1F9"/>
+                      <a:srgbClr val="F8F3FC"/>
                     </a:solidFill>
                   </a:tcPr>
                 </a:tc>
@@ -5935,7 +5935,7 @@
                       <a:r>
                         <a:rPr sz="1600" b="1">
                           <a:solidFill>
-                            <a:srgbClr val="573371"/>
+                            <a:srgbClr val="4E226D"/>
                           </a:solidFill>
                         </a:rPr>
                         <a:t>새로 한 것</a:t>
@@ -5945,30 +5945,30 @@
                   <a:tcPr anchor="ctr" marL="73152" marR="73152">
                     <a:lnL w="9525" cap="flat" cmpd="sng" algn="ctr">
                       <a:solidFill>
-                        <a:srgbClr val="E3D3EE"/>
+                        <a:srgbClr val="E8D4F7"/>
                       </a:solidFill>
                       <a:prstDash val="solid"/>
                     </a:lnL>
                     <a:lnR w="9525" cap="flat" cmpd="sng" algn="ctr">
                       <a:solidFill>
-                        <a:srgbClr val="E3D3EE"/>
+                        <a:srgbClr val="E8D4F7"/>
                       </a:solidFill>
                       <a:prstDash val="solid"/>
                     </a:lnR>
                     <a:lnT w="9525" cap="flat" cmpd="sng" algn="ctr">
                       <a:solidFill>
-                        <a:srgbClr val="E3D3EE"/>
+                        <a:srgbClr val="E8D4F7"/>
                       </a:solidFill>
                       <a:prstDash val="solid"/>
                     </a:lnT>
                     <a:lnB w="9525" cap="flat" cmpd="sng" algn="ctr">
                       <a:solidFill>
-                        <a:srgbClr val="E3D3EE"/>
+                        <a:srgbClr val="E8D4F7"/>
                       </a:solidFill>
                       <a:prstDash val="solid"/>
                     </a:lnB>
                     <a:solidFill>
-                      <a:srgbClr val="E3D3EE"/>
+                      <a:srgbClr val="E8D4F7"/>
                     </a:solidFill>
                   </a:tcPr>
                 </a:tc>
@@ -5991,25 +5991,25 @@
                   <a:tcPr anchor="ctr" marL="73152" marR="73152">
                     <a:lnL w="9525" cap="flat" cmpd="sng" algn="ctr">
                       <a:solidFill>
-                        <a:srgbClr val="E3D3EE"/>
+                        <a:srgbClr val="E8D4F7"/>
                       </a:solidFill>
                       <a:prstDash val="solid"/>
                     </a:lnL>
                     <a:lnR w="9525" cap="flat" cmpd="sng" algn="ctr">
                       <a:solidFill>
-                        <a:srgbClr val="E3D3EE"/>
+                        <a:srgbClr val="E8D4F7"/>
                       </a:solidFill>
                       <a:prstDash val="solid"/>
                     </a:lnR>
                     <a:lnT w="9525" cap="flat" cmpd="sng" algn="ctr">
                       <a:solidFill>
-                        <a:srgbClr val="E3D3EE"/>
+                        <a:srgbClr val="E8D4F7"/>
                       </a:solidFill>
                       <a:prstDash val="solid"/>
                     </a:lnT>
                     <a:lnB w="9525" cap="flat" cmpd="sng" algn="ctr">
                       <a:solidFill>
-                        <a:srgbClr val="E3D3EE"/>
+                        <a:srgbClr val="E8D4F7"/>
                       </a:solidFill>
                       <a:prstDash val="solid"/>
                     </a:lnB>
@@ -6037,25 +6037,25 @@
                   <a:tcPr anchor="ctr" marL="73152" marR="73152">
                     <a:lnL w="9525" cap="flat" cmpd="sng" algn="ctr">
                       <a:solidFill>
-                        <a:srgbClr val="E3D3EE"/>
+                        <a:srgbClr val="E8D4F7"/>
                       </a:solidFill>
                       <a:prstDash val="solid"/>
                     </a:lnL>
                     <a:lnR w="9525" cap="flat" cmpd="sng" algn="ctr">
                       <a:solidFill>
-                        <a:srgbClr val="E3D3EE"/>
+                        <a:srgbClr val="E8D4F7"/>
                       </a:solidFill>
                       <a:prstDash val="solid"/>
                     </a:lnR>
                     <a:lnT w="9525" cap="flat" cmpd="sng" algn="ctr">
                       <a:solidFill>
-                        <a:srgbClr val="E3D3EE"/>
+                        <a:srgbClr val="E8D4F7"/>
                       </a:solidFill>
                       <a:prstDash val="solid"/>
                     </a:lnT>
                     <a:lnB w="9525" cap="flat" cmpd="sng" algn="ctr">
                       <a:solidFill>
-                        <a:srgbClr val="E3D3EE"/>
+                        <a:srgbClr val="E8D4F7"/>
                       </a:solidFill>
                       <a:prstDash val="solid"/>
                     </a:lnB>
@@ -6083,25 +6083,25 @@
                   <a:tcPr anchor="ctr" marL="73152" marR="73152">
                     <a:lnL w="9525" cap="flat" cmpd="sng" algn="ctr">
                       <a:solidFill>
-                        <a:srgbClr val="E3D3EE"/>
+                        <a:srgbClr val="E8D4F7"/>
                       </a:solidFill>
                       <a:prstDash val="solid"/>
                     </a:lnL>
                     <a:lnR w="9525" cap="flat" cmpd="sng" algn="ctr">
                       <a:solidFill>
-                        <a:srgbClr val="E3D3EE"/>
+                        <a:srgbClr val="E8D4F7"/>
                       </a:solidFill>
                       <a:prstDash val="solid"/>
                     </a:lnR>
                     <a:lnT w="9525" cap="flat" cmpd="sng" algn="ctr">
                       <a:solidFill>
-                        <a:srgbClr val="E3D3EE"/>
+                        <a:srgbClr val="E8D4F7"/>
                       </a:solidFill>
                       <a:prstDash val="solid"/>
                     </a:lnT>
                     <a:lnB w="9525" cap="flat" cmpd="sng" algn="ctr">
                       <a:solidFill>
-                        <a:srgbClr val="E3D3EE"/>
+                        <a:srgbClr val="E8D4F7"/>
                       </a:solidFill>
                       <a:prstDash val="solid"/>
                     </a:lnB>
@@ -6129,25 +6129,25 @@
                   <a:tcPr anchor="ctr" marL="73152" marR="73152">
                     <a:lnL w="9525" cap="flat" cmpd="sng" algn="ctr">
                       <a:solidFill>
-                        <a:srgbClr val="E3D3EE"/>
+                        <a:srgbClr val="E8D4F7"/>
                       </a:solidFill>
                       <a:prstDash val="solid"/>
                     </a:lnL>
                     <a:lnR w="9525" cap="flat" cmpd="sng" algn="ctr">
                       <a:solidFill>
-                        <a:srgbClr val="E3D3EE"/>
+                        <a:srgbClr val="E8D4F7"/>
                       </a:solidFill>
                       <a:prstDash val="solid"/>
                     </a:lnR>
                     <a:lnT w="9525" cap="flat" cmpd="sng" algn="ctr">
                       <a:solidFill>
-                        <a:srgbClr val="E3D3EE"/>
+                        <a:srgbClr val="E8D4F7"/>
                       </a:solidFill>
                       <a:prstDash val="solid"/>
                     </a:lnT>
                     <a:lnB w="9525" cap="flat" cmpd="sng" algn="ctr">
                       <a:solidFill>
-                        <a:srgbClr val="E3D3EE"/>
+                        <a:srgbClr val="E8D4F7"/>
                       </a:solidFill>
                       <a:prstDash val="solid"/>
                     </a:lnB>
@@ -6202,7 +6202,7 @@
             <a:avLst/>
           </a:prstGeom>
           <a:solidFill>
-            <a:srgbClr val="E3D3EE"/>
+            <a:srgbClr val="E8D4F7"/>
           </a:solidFill>
           <a:ln>
             <a:noFill/>
@@ -6231,7 +6231,7 @@
             <a:avLst/>
           </a:prstGeom>
           <a:solidFill>
-            <a:srgbClr val="8C56B3"/>
+            <a:srgbClr val="9651C8"/>
           </a:solidFill>
           <a:ln>
             <a:noFill/>
@@ -6275,7 +6275,7 @@
             <a:r>
               <a:rPr sz="3000" b="1" i="0">
                 <a:solidFill>
-                  <a:srgbClr val="573371"/>
+                  <a:srgbClr val="4E226D"/>
                 </a:solidFill>
               </a:rPr>
               <a:t>사진 모음</a:t>
@@ -6300,11 +6300,11 @@
             </a:avLst>
           </a:prstGeom>
           <a:solidFill>
-            <a:srgbClr val="E3D3EE"/>
+            <a:srgbClr val="E8D4F7"/>
           </a:solidFill>
           <a:ln w="19050">
             <a:solidFill>
-              <a:srgbClr val="8C56B3"/>
+              <a:srgbClr val="9651C8"/>
             </a:solidFill>
             <a:prstDash val="dash"/>
           </a:ln>
@@ -6323,7 +6323,7 @@
             <a:r>
               <a:rPr sz="1200" b="0" i="0">
                 <a:solidFill>
-                  <a:srgbClr val="573371"/>
+                  <a:srgbClr val="4E226D"/>
                 </a:solidFill>
               </a:rPr>
               <a:t>사진 1</a:t>
@@ -6348,11 +6348,11 @@
             </a:avLst>
           </a:prstGeom>
           <a:solidFill>
-            <a:srgbClr val="E3D3EE"/>
+            <a:srgbClr val="E8D4F7"/>
           </a:solidFill>
           <a:ln w="19050">
             <a:solidFill>
-              <a:srgbClr val="8C56B3"/>
+              <a:srgbClr val="9651C8"/>
             </a:solidFill>
             <a:prstDash val="dash"/>
           </a:ln>
@@ -6371,7 +6371,7 @@
             <a:r>
               <a:rPr sz="1200" b="0" i="0">
                 <a:solidFill>
-                  <a:srgbClr val="573371"/>
+                  <a:srgbClr val="4E226D"/>
                 </a:solidFill>
               </a:rPr>
               <a:t>사진 2</a:t>
@@ -6396,11 +6396,11 @@
             </a:avLst>
           </a:prstGeom>
           <a:solidFill>
-            <a:srgbClr val="E3D3EE"/>
+            <a:srgbClr val="E8D4F7"/>
           </a:solidFill>
           <a:ln w="19050">
             <a:solidFill>
-              <a:srgbClr val="8C56B3"/>
+              <a:srgbClr val="9651C8"/>
             </a:solidFill>
             <a:prstDash val="dash"/>
           </a:ln>
@@ -6419,7 +6419,7 @@
             <a:r>
               <a:rPr sz="1200" b="0" i="0">
                 <a:solidFill>
-                  <a:srgbClr val="573371"/>
+                  <a:srgbClr val="4E226D"/>
                 </a:solidFill>
               </a:rPr>
               <a:t>사진 3</a:t>
@@ -6444,11 +6444,11 @@
             </a:avLst>
           </a:prstGeom>
           <a:solidFill>
-            <a:srgbClr val="E3D3EE"/>
+            <a:srgbClr val="E8D4F7"/>
           </a:solidFill>
           <a:ln w="19050">
             <a:solidFill>
-              <a:srgbClr val="8C56B3"/>
+              <a:srgbClr val="9651C8"/>
             </a:solidFill>
             <a:prstDash val="dash"/>
           </a:ln>
@@ -6467,7 +6467,7 @@
             <a:r>
               <a:rPr sz="1200" b="0" i="0">
                 <a:solidFill>
-                  <a:srgbClr val="573371"/>
+                  <a:srgbClr val="4E226D"/>
                 </a:solidFill>
               </a:rPr>
               <a:t>사진 4</a:t>
@@ -6492,11 +6492,11 @@
             </a:avLst>
           </a:prstGeom>
           <a:solidFill>
-            <a:srgbClr val="E3D3EE"/>
+            <a:srgbClr val="E8D4F7"/>
           </a:solidFill>
           <a:ln w="19050">
             <a:solidFill>
-              <a:srgbClr val="8C56B3"/>
+              <a:srgbClr val="9651C8"/>
             </a:solidFill>
             <a:prstDash val="dash"/>
           </a:ln>
@@ -6515,7 +6515,7 @@
             <a:r>
               <a:rPr sz="1200" b="0" i="0">
                 <a:solidFill>
-                  <a:srgbClr val="573371"/>
+                  <a:srgbClr val="4E226D"/>
                 </a:solidFill>
               </a:rPr>
               <a:t>사진 5</a:t>
@@ -6540,11 +6540,11 @@
             </a:avLst>
           </a:prstGeom>
           <a:solidFill>
-            <a:srgbClr val="E3D3EE"/>
+            <a:srgbClr val="E8D4F7"/>
           </a:solidFill>
           <a:ln w="19050">
             <a:solidFill>
-              <a:srgbClr val="8C56B3"/>
+              <a:srgbClr val="9651C8"/>
             </a:solidFill>
             <a:prstDash val="dash"/>
           </a:ln>
@@ -6563,7 +6563,7 @@
             <a:r>
               <a:rPr sz="1200" b="0" i="0">
                 <a:solidFill>
-                  <a:srgbClr val="573371"/>
+                  <a:srgbClr val="4E226D"/>
                 </a:solidFill>
               </a:rPr>
               <a:t>사진 6</a:t>
@@ -6588,11 +6588,11 @@
             </a:avLst>
           </a:prstGeom>
           <a:solidFill>
-            <a:srgbClr val="E3D3EE"/>
+            <a:srgbClr val="E8D4F7"/>
           </a:solidFill>
           <a:ln w="19050">
             <a:solidFill>
-              <a:srgbClr val="8C56B3"/>
+              <a:srgbClr val="9651C8"/>
             </a:solidFill>
             <a:prstDash val="dash"/>
           </a:ln>
@@ -6611,7 +6611,7 @@
             <a:r>
               <a:rPr sz="1200" b="0" i="0">
                 <a:solidFill>
-                  <a:srgbClr val="573371"/>
+                  <a:srgbClr val="4E226D"/>
                 </a:solidFill>
               </a:rPr>
               <a:t>사진 7</a:t>
@@ -6636,11 +6636,11 @@
             </a:avLst>
           </a:prstGeom>
           <a:solidFill>
-            <a:srgbClr val="E3D3EE"/>
+            <a:srgbClr val="E8D4F7"/>
           </a:solidFill>
           <a:ln w="19050">
             <a:solidFill>
-              <a:srgbClr val="8C56B3"/>
+              <a:srgbClr val="9651C8"/>
             </a:solidFill>
             <a:prstDash val="dash"/>
           </a:ln>
@@ -6659,7 +6659,7 @@
             <a:r>
               <a:rPr sz="1200" b="0" i="0">
                 <a:solidFill>
-                  <a:srgbClr val="573371"/>
+                  <a:srgbClr val="4E226D"/>
                 </a:solidFill>
               </a:rPr>
               <a:t>사진 8</a:t>
@@ -6739,7 +6739,7 @@
             <a:r>
               <a:rPr sz="3400" b="1" i="0">
                 <a:solidFill>
-                  <a:srgbClr val="573371"/>
+                  <a:srgbClr val="4E226D"/>
                 </a:solidFill>
               </a:rPr>
               <a:t>와 주셔서 고맙습니다</a:t>
@@ -6777,7 +6777,7 @@
             <a:r>
               <a:rPr sz="1700" b="0" i="1">
                 <a:solidFill>
-                  <a:srgbClr val="573371"/>
+                  <a:srgbClr val="4E226D"/>
                 </a:solidFill>
               </a:rPr>
               <a:t>아이가 한 살이 되었습니다</a:t>
@@ -6842,34 +6842,34 @@
         <a:sysClr val="window" lastClr="FFFFFF"/>
       </a:lt1>
       <a:dk2>
-        <a:srgbClr val="573371"/>
+        <a:srgbClr val="4E226D"/>
       </a:dk2>
       <a:lt2>
-        <a:srgbClr val="F5F1F9"/>
+        <a:srgbClr val="F8F3FC"/>
       </a:lt2>
       <a:accent1>
-        <a:srgbClr val="8C56B3"/>
+        <a:srgbClr val="9651C8"/>
       </a:accent1>
       <a:accent2>
-        <a:srgbClr val="868D3F"/>
+        <a:srgbClr val="339941"/>
       </a:accent2>
       <a:accent3>
-        <a:srgbClr val="573371"/>
+        <a:srgbClr val="4E226D"/>
       </a:accent3>
       <a:accent4>
-        <a:srgbClr val="E3D3EE"/>
+        <a:srgbClr val="E8D4F7"/>
       </a:accent4>
       <a:accent5>
-        <a:srgbClr val="897279"/>
+        <a:srgbClr val="647584"/>
       </a:accent5>
       <a:accent6>
-        <a:srgbClr val="9A85AA"/>
+        <a:srgbClr val="957AA7"/>
       </a:accent6>
       <a:hlink>
-        <a:srgbClr val="8C56B3"/>
+        <a:srgbClr val="9651C8"/>
       </a:hlink>
       <a:folHlink>
-        <a:srgbClr val="573371"/>
+        <a:srgbClr val="4E226D"/>
       </a:folHlink>
     </a:clrScheme>
     <a:fontScheme name="Office">

--- a/public/fun/pack/pptx/birthday/돌잔치_11_성장기록중심_라일락골목.pptx
+++ b/public/fun/pack/pptx/birthday/돌잔치_11_성장기록중심_라일락골목.pptx
@@ -3286,6 +3286,14 @@
 <file path=ppt/slides/slide1.xml><?xml version="1.0" encoding="utf-8"?>
 <p:sld xmlns:a="http://schemas.openxmlformats.org/drawingml/2006/main" xmlns:p="http://schemas.openxmlformats.org/presentationml/2006/main" xmlns:r="http://schemas.openxmlformats.org/officeDocument/2006/relationships">
   <p:cSld>
+    <p:bg>
+      <p:bgPr>
+        <a:solidFill>
+          <a:srgbClr val="F5EAFD"/>
+        </a:solidFill>
+        <a:effectLst/>
+      </p:bgPr>
+    </p:bg>
     <p:spTree>
       <p:nvGrpSpPr>
         <p:cNvPr id="1" name=""/>
@@ -3293,30 +3301,116 @@
         <p:nvPr/>
       </p:nvGrpSpPr>
       <p:grpSpPr/>
-      <p:pic>
-        <p:nvPicPr>
-          <p:cNvPr id="3" name="표지 그림" descr="birthday-11.jpg"/>
-          <p:cNvPicPr>
-            <a:picLocks noChangeAspect="1"/>
-          </p:cNvPicPr>
+      <p:sp>
+        <p:nvSpPr>
+          <p:cNvPr id="3" name="사진 자리"/>
+          <p:cNvSpPr/>
           <p:nvPr/>
-        </p:nvPicPr>
-        <p:blipFill>
-          <a:blip r:embed="rId2"/>
-          <a:stretch>
-            <a:fillRect/>
-          </a:stretch>
-        </p:blipFill>
+        </p:nvSpPr>
         <p:spPr>
           <a:xfrm>
             <a:off x="0" y="0"/>
-            <a:ext cx="12191695" cy="6858000"/>
+            <a:ext cx="4389010" cy="6858000"/>
           </a:xfrm>
           <a:prstGeom prst="rect">
             <a:avLst/>
           </a:prstGeom>
-        </p:spPr>
-      </p:pic>
+          <a:solidFill>
+            <a:srgbClr val="D2A6F2"/>
+          </a:solidFill>
+          <a:ln>
+            <a:noFill/>
+          </a:ln>
+        </p:spPr>
+        <p:txBody>
+          <a:bodyPr rtlCol="0" anchor="ctr" wrap="square" lIns="54864" rIns="54864" tIns="27432" bIns="27432">
+            <a:noAutofit/>
+          </a:bodyPr>
+          <a:lstStyle/>
+          <a:p>
+            <a:pPr algn="ctr">
+              <a:lnSpc>
+                <a:spcPct val="100000"/>
+              </a:lnSpc>
+            </a:pPr>
+            <a:r>
+              <a:rPr sz="1400" b="0" i="0">
+                <a:solidFill>
+                  <a:srgbClr val="3B2749"/>
+                </a:solidFill>
+              </a:rPr>
+              <a:t>사진을 넣어 주세요</a:t>
+            </a:r>
+          </a:p>
+        </p:txBody>
+      </p:sp>
+      <p:sp>
+        <p:nvSpPr>
+          <p:cNvPr id="4" name="장식"/>
+          <p:cNvSpPr/>
+          <p:nvPr/>
+        </p:nvSpPr>
+        <p:spPr>
+          <a:xfrm>
+            <a:off x="365750" y="365760"/>
+            <a:ext cx="3657508" cy="6126480"/>
+          </a:xfrm>
+          <a:prstGeom prst="rect">
+            <a:avLst/>
+          </a:prstGeom>
+          <a:noFill/>
+          <a:ln w="9525">
+            <a:solidFill>
+              <a:srgbClr val="26231F"/>
+            </a:solidFill>
+          </a:ln>
+        </p:spPr>
+        <p:txBody>
+          <a:bodyPr rtlCol="0" anchor="ctr"/>
+          <a:lstStyle/>
+          <a:p>
+            <a:pPr algn="ctr"/>
+          </a:p>
+        </p:txBody>
+      </p:sp>
+      <p:sp>
+        <p:nvSpPr>
+          <p:cNvPr id="5" name="라벨"/>
+          <p:cNvSpPr txBox="1"/>
+          <p:nvPr/>
+        </p:nvSpPr>
+        <p:spPr>
+          <a:xfrm>
+            <a:off x="6827349" y="2148840"/>
+            <a:ext cx="4632844" cy="274320"/>
+          </a:xfrm>
+          <a:prstGeom prst="rect">
+            <a:avLst/>
+          </a:prstGeom>
+          <a:noFill/>
+        </p:spPr>
+        <p:txBody>
+          <a:bodyPr wrap="square" lIns="54864" rIns="54864" tIns="27432" bIns="27432" anchor="t">
+            <a:noAutofit/>
+          </a:bodyPr>
+          <a:lstStyle/>
+          <a:p>
+            <a:pPr algn="l">
+              <a:lnSpc>
+                <a:spcPct val="115000"/>
+              </a:lnSpc>
+            </a:pPr>
+            <a:r>
+              <a:rPr sz="1000" b="1" i="0" spc="250">
+                <a:solidFill>
+                  <a:srgbClr val="26231F"/>
+                </a:solidFill>
+              </a:rPr>
+              <a:t>FIRST BIRTHDAY</a:t>
+            </a:r>
+          </a:p>
+        </p:txBody>
+      </p:sp>
       <p:sp>
         <p:nvSpPr>
           <p:cNvPr id="2" name="Title 1"/>
@@ -3329,8 +3423,8 @@
         </p:nvSpPr>
         <p:spPr>
           <a:xfrm>
-            <a:off x="853418" y="2057400"/>
-            <a:ext cx="6095847" cy="1554480"/>
+            <a:off x="6827349" y="2606040"/>
+            <a:ext cx="4632844" cy="1188720"/>
           </a:xfrm>
         </p:spPr>
         <p:txBody>
@@ -3347,7 +3441,7 @@
             <a:r>
               <a:rPr sz="4000" b="1" i="0">
                 <a:solidFill>
-                  <a:srgbClr val="4E226D"/>
+                  <a:srgbClr val="26231F"/>
                 </a:solidFill>
               </a:rPr>
               <a:t>첫 번째 생일</a:t>
@@ -3357,14 +3451,14 @@
       </p:sp>
       <p:sp>
         <p:nvSpPr>
-          <p:cNvPr id="4" name="한 줄 문구"/>
+          <p:cNvPr id="6" name="한 줄 문구"/>
           <p:cNvSpPr txBox="1"/>
           <p:nvPr/>
         </p:nvSpPr>
         <p:spPr>
           <a:xfrm>
-            <a:off x="853418" y="3749039"/>
-            <a:ext cx="6095847" cy="822960"/>
+            <a:off x="6827349" y="3886200"/>
+            <a:ext cx="4632844" cy="822960"/>
           </a:xfrm>
           <a:prstGeom prst="rect">
             <a:avLst/>
@@ -3383,9 +3477,9 @@
               </a:lnSpc>
             </a:pPr>
             <a:r>
-              <a:rPr sz="1700" b="0" i="1">
+              <a:rPr sz="1700" b="0" i="0">
                 <a:solidFill>
-                  <a:srgbClr val="4E226D"/>
+                  <a:srgbClr val="26231F"/>
                 </a:solidFill>
               </a:rPr>
               <a:t>키는 얼마나, 몸무게는 얼마나 늘었을까요</a:t>
@@ -3395,14 +3489,14 @@
       </p:sp>
       <p:sp>
         <p:nvSpPr>
-          <p:cNvPr id="5" name="안내 문구"/>
+          <p:cNvPr id="7" name="안내 문구"/>
           <p:cNvSpPr txBox="1"/>
           <p:nvPr/>
         </p:nvSpPr>
         <p:spPr>
           <a:xfrm>
-            <a:off x="853418" y="4617720"/>
-            <a:ext cx="6095847" cy="914400"/>
+            <a:off x="6827349" y="4754880"/>
+            <a:ext cx="4632844" cy="914400"/>
           </a:xfrm>
           <a:prstGeom prst="rect">
             <a:avLst/>
@@ -3423,10 +3517,10 @@
             <a:r>
               <a:rPr sz="1400" b="0" i="0">
                 <a:solidFill>
-                  <a:srgbClr val="666666"/>
+                  <a:srgbClr val="26231F"/>
                 </a:solidFill>
               </a:rPr>
-              <a:t>아기 이름 · 2027. 00. 00</a:t>
+              <a:t>아기 이름 · 날짜 입력</a:t>
             </a:r>
           </a:p>
           <a:p>
@@ -3438,7 +3532,7 @@
             <a:r>
               <a:rPr sz="1400" b="0" i="0">
                 <a:solidFill>
-                  <a:srgbClr val="666666"/>
+                  <a:srgbClr val="26231F"/>
                 </a:solidFill>
               </a:rPr>
               <a:t>장소를 입력하세요</a:t>
@@ -3480,14 +3574,14 @@
         </p:nvSpPr>
         <p:spPr>
           <a:xfrm>
-            <a:off x="9905695" y="-1463040"/>
-            <a:ext cx="3840480" cy="3840480"/>
-          </a:xfrm>
-          <a:prstGeom prst="ellipse">
+            <a:off x="640080" y="6400800"/>
+            <a:ext cx="10911535" cy="10972"/>
+          </a:xfrm>
+          <a:prstGeom prst="rect">
             <a:avLst/>
           </a:prstGeom>
           <a:solidFill>
-            <a:srgbClr val="E8D4F7"/>
+            <a:srgbClr val="26231F"/>
           </a:solidFill>
           <a:ln>
             <a:noFill/>
@@ -3503,20 +3597,58 @@
       </p:sp>
       <p:sp>
         <p:nvSpPr>
-          <p:cNvPr id="4" name="장식"/>
+          <p:cNvPr id="4" name="하단 라벨"/>
+          <p:cNvSpPr txBox="1"/>
+          <p:nvPr/>
+        </p:nvSpPr>
+        <p:spPr>
+          <a:xfrm>
+            <a:off x="640080" y="6437376"/>
+            <a:ext cx="5486400" cy="274320"/>
+          </a:xfrm>
+          <a:prstGeom prst="rect">
+            <a:avLst/>
+          </a:prstGeom>
+          <a:noFill/>
+        </p:spPr>
+        <p:txBody>
+          <a:bodyPr wrap="square" lIns="54864" rIns="54864" tIns="27432" bIns="27432" anchor="ctr">
+            <a:noAutofit/>
+          </a:bodyPr>
+          <a:lstStyle/>
+          <a:p>
+            <a:pPr algn="l">
+              <a:lnSpc>
+                <a:spcPct val="115000"/>
+              </a:lnSpc>
+            </a:pPr>
+            <a:r>
+              <a:rPr sz="900" b="1" i="0" spc="250">
+                <a:solidFill>
+                  <a:srgbClr val="26231F"/>
+                </a:solidFill>
+              </a:rPr>
+              <a:t>FIRST BIRTHDAY</a:t>
+            </a:r>
+          </a:p>
+        </p:txBody>
+      </p:sp>
+      <p:sp>
+        <p:nvSpPr>
+          <p:cNvPr id="5" name="포인트"/>
           <p:cNvSpPr/>
           <p:nvPr/>
         </p:nvSpPr>
         <p:spPr>
           <a:xfrm>
-            <a:off x="11094415" y="274320"/>
-            <a:ext cx="411480" cy="411480"/>
-          </a:xfrm>
-          <a:prstGeom prst="ellipse">
+            <a:off x="11213287" y="6473952"/>
+            <a:ext cx="219456" cy="219456"/>
+          </a:xfrm>
+          <a:prstGeom prst="moon">
             <a:avLst/>
           </a:prstGeom>
           <a:solidFill>
-            <a:srgbClr val="9651C8"/>
+            <a:srgbClr val="C997ED"/>
           </a:solidFill>
           <a:ln>
             <a:noFill/>
@@ -3542,8 +3674,8 @@
         </p:nvSpPr>
         <p:spPr>
           <a:xfrm>
-            <a:off x="640080" y="457200"/>
-            <a:ext cx="9722815" cy="868680"/>
+            <a:off x="640080" y="502920"/>
+            <a:ext cx="10911535" cy="914400"/>
           </a:xfrm>
         </p:spPr>
         <p:txBody>
@@ -3560,7 +3692,7 @@
             <a:r>
               <a:rPr sz="3000" b="1" i="0">
                 <a:solidFill>
-                  <a:srgbClr val="4E226D"/>
+                  <a:srgbClr val="26231F"/>
                 </a:solidFill>
               </a:rPr>
               <a:t>우리 아기를 소개합니다</a:t>
@@ -3570,14 +3702,14 @@
       </p:sp>
       <p:sp>
         <p:nvSpPr>
-          <p:cNvPr id="5" name="사진 자리"/>
+          <p:cNvPr id="6" name="사진 자리"/>
           <p:cNvSpPr/>
           <p:nvPr/>
         </p:nvSpPr>
         <p:spPr>
           <a:xfrm>
             <a:off x="640080" y="1600200"/>
-            <a:ext cx="3840480" cy="4617720"/>
+            <a:ext cx="3840480" cy="4389120"/>
           </a:xfrm>
           <a:prstGeom prst="roundRect">
             <a:avLst>
@@ -3585,12 +3717,10 @@
             </a:avLst>
           </a:prstGeom>
           <a:solidFill>
-            <a:srgbClr val="E8D4F7"/>
+            <a:srgbClr val="E9D1FA"/>
           </a:solidFill>
           <a:ln w="19050">
-            <a:solidFill>
-              <a:srgbClr val="9651C8"/>
-            </a:solidFill>
+            <a:noFill/>
             <a:prstDash val="dash"/>
           </a:ln>
         </p:spPr>
@@ -3608,7 +3738,7 @@
             <a:r>
               <a:rPr sz="1400" b="0" i="0">
                 <a:solidFill>
-                  <a:srgbClr val="4E226D"/>
+                  <a:srgbClr val="8E8780"/>
                 </a:solidFill>
               </a:rPr>
               <a:t>아기 사진을 넣어 주세요</a:t>
@@ -3618,7 +3748,7 @@
       </p:sp>
       <p:graphicFrame>
         <p:nvGraphicFramePr>
-          <p:cNvPr id="6" name="표"/>
+          <p:cNvPr id="7" name="표"/>
           <p:cNvGraphicFramePr>
             <a:graphicFrameLocks noGrp="1"/>
           </p:cNvGraphicFramePr>
@@ -3648,7 +3778,7 @@
                       <a:r>
                         <a:rPr sz="1500" b="1">
                           <a:solidFill>
-                            <a:srgbClr val="4E226D"/>
+                            <a:srgbClr val="3B2749"/>
                           </a:solidFill>
                         </a:rPr>
                         <a:t>이름</a:t>
@@ -3658,30 +3788,30 @@
                   <a:tcPr anchor="ctr" marL="73152" marR="73152">
                     <a:lnL w="9525" cap="flat" cmpd="sng" algn="ctr">
                       <a:solidFill>
-                        <a:srgbClr val="E8D4F7"/>
+                        <a:srgbClr val="E9D1FA"/>
                       </a:solidFill>
                       <a:prstDash val="solid"/>
                     </a:lnL>
                     <a:lnR w="9525" cap="flat" cmpd="sng" algn="ctr">
                       <a:solidFill>
-                        <a:srgbClr val="E8D4F7"/>
+                        <a:srgbClr val="E9D1FA"/>
                       </a:solidFill>
                       <a:prstDash val="solid"/>
                     </a:lnR>
                     <a:lnT w="9525" cap="flat" cmpd="sng" algn="ctr">
                       <a:solidFill>
-                        <a:srgbClr val="E8D4F7"/>
+                        <a:srgbClr val="E9D1FA"/>
                       </a:solidFill>
                       <a:prstDash val="solid"/>
                     </a:lnT>
                     <a:lnB w="9525" cap="flat" cmpd="sng" algn="ctr">
                       <a:solidFill>
-                        <a:srgbClr val="E8D4F7"/>
+                        <a:srgbClr val="E9D1FA"/>
                       </a:solidFill>
                       <a:prstDash val="solid"/>
                     </a:lnB>
                     <a:solidFill>
-                      <a:srgbClr val="E8D4F7"/>
+                      <a:srgbClr val="E9D1FA"/>
                     </a:solidFill>
                   </a:tcPr>
                 </a:tc>
@@ -3694,7 +3824,7 @@
                       <a:r>
                         <a:rPr sz="1500" b="0">
                           <a:solidFill>
-                            <a:srgbClr val="2B2B2B"/>
+                            <a:srgbClr val="26231F"/>
                           </a:solidFill>
                         </a:rPr>
                         <a:t>입력하세요</a:t>
@@ -3704,30 +3834,30 @@
                   <a:tcPr anchor="ctr" marL="73152" marR="73152">
                     <a:lnL w="9525" cap="flat" cmpd="sng" algn="ctr">
                       <a:solidFill>
-                        <a:srgbClr val="E8D4F7"/>
+                        <a:srgbClr val="E9D1FA"/>
                       </a:solidFill>
                       <a:prstDash val="solid"/>
                     </a:lnL>
                     <a:lnR w="9525" cap="flat" cmpd="sng" algn="ctr">
                       <a:solidFill>
-                        <a:srgbClr val="E8D4F7"/>
+                        <a:srgbClr val="E9D1FA"/>
                       </a:solidFill>
                       <a:prstDash val="solid"/>
                     </a:lnR>
                     <a:lnT w="9525" cap="flat" cmpd="sng" algn="ctr">
                       <a:solidFill>
-                        <a:srgbClr val="E8D4F7"/>
+                        <a:srgbClr val="E9D1FA"/>
                       </a:solidFill>
                       <a:prstDash val="solid"/>
                     </a:lnT>
                     <a:lnB w="9525" cap="flat" cmpd="sng" algn="ctr">
                       <a:solidFill>
-                        <a:srgbClr val="E8D4F7"/>
+                        <a:srgbClr val="E9D1FA"/>
                       </a:solidFill>
                       <a:prstDash val="solid"/>
                     </a:lnB>
                     <a:solidFill>
-                      <a:srgbClr val="F8F3FC"/>
+                      <a:srgbClr val="F5EAFD"/>
                     </a:solidFill>
                   </a:tcPr>
                 </a:tc>
@@ -3742,7 +3872,7 @@
                       <a:r>
                         <a:rPr sz="1500" b="1">
                           <a:solidFill>
-                            <a:srgbClr val="4E226D"/>
+                            <a:srgbClr val="3B2749"/>
                           </a:solidFill>
                         </a:rPr>
                         <a:t>생일</a:t>
@@ -3752,30 +3882,30 @@
                   <a:tcPr anchor="ctr" marL="73152" marR="73152">
                     <a:lnL w="9525" cap="flat" cmpd="sng" algn="ctr">
                       <a:solidFill>
-                        <a:srgbClr val="E8D4F7"/>
+                        <a:srgbClr val="E9D1FA"/>
                       </a:solidFill>
                       <a:prstDash val="solid"/>
                     </a:lnL>
                     <a:lnR w="9525" cap="flat" cmpd="sng" algn="ctr">
                       <a:solidFill>
-                        <a:srgbClr val="E8D4F7"/>
+                        <a:srgbClr val="E9D1FA"/>
                       </a:solidFill>
                       <a:prstDash val="solid"/>
                     </a:lnR>
                     <a:lnT w="9525" cap="flat" cmpd="sng" algn="ctr">
                       <a:solidFill>
-                        <a:srgbClr val="E8D4F7"/>
+                        <a:srgbClr val="E9D1FA"/>
                       </a:solidFill>
                       <a:prstDash val="solid"/>
                     </a:lnT>
                     <a:lnB w="9525" cap="flat" cmpd="sng" algn="ctr">
                       <a:solidFill>
-                        <a:srgbClr val="E8D4F7"/>
+                        <a:srgbClr val="E9D1FA"/>
                       </a:solidFill>
                       <a:prstDash val="solid"/>
                     </a:lnB>
                     <a:solidFill>
-                      <a:srgbClr val="E8D4F7"/>
+                      <a:srgbClr val="E9D1FA"/>
                     </a:solidFill>
                   </a:tcPr>
                 </a:tc>
@@ -3788,7 +3918,7 @@
                       <a:r>
                         <a:rPr sz="1500" b="0">
                           <a:solidFill>
-                            <a:srgbClr val="2B2B2B"/>
+                            <a:srgbClr val="26231F"/>
                           </a:solidFill>
                         </a:rPr>
                         <a:t>입력하세요</a:t>
@@ -3798,25 +3928,25 @@
                   <a:tcPr anchor="ctr" marL="73152" marR="73152">
                     <a:lnL w="9525" cap="flat" cmpd="sng" algn="ctr">
                       <a:solidFill>
-                        <a:srgbClr val="E8D4F7"/>
+                        <a:srgbClr val="E9D1FA"/>
                       </a:solidFill>
                       <a:prstDash val="solid"/>
                     </a:lnL>
                     <a:lnR w="9525" cap="flat" cmpd="sng" algn="ctr">
                       <a:solidFill>
-                        <a:srgbClr val="E8D4F7"/>
+                        <a:srgbClr val="E9D1FA"/>
                       </a:solidFill>
                       <a:prstDash val="solid"/>
                     </a:lnR>
                     <a:lnT w="9525" cap="flat" cmpd="sng" algn="ctr">
                       <a:solidFill>
-                        <a:srgbClr val="E8D4F7"/>
+                        <a:srgbClr val="E9D1FA"/>
                       </a:solidFill>
                       <a:prstDash val="solid"/>
                     </a:lnT>
                     <a:lnB w="9525" cap="flat" cmpd="sng" algn="ctr">
                       <a:solidFill>
-                        <a:srgbClr val="E8D4F7"/>
+                        <a:srgbClr val="E9D1FA"/>
                       </a:solidFill>
                       <a:prstDash val="solid"/>
                     </a:lnB>
@@ -3836,7 +3966,7 @@
                       <a:r>
                         <a:rPr sz="1500" b="1">
                           <a:solidFill>
-                            <a:srgbClr val="4E226D"/>
+                            <a:srgbClr val="3B2749"/>
                           </a:solidFill>
                         </a:rPr>
                         <a:t>키 · 몸무게</a:t>
@@ -3846,30 +3976,30 @@
                   <a:tcPr anchor="ctr" marL="73152" marR="73152">
                     <a:lnL w="9525" cap="flat" cmpd="sng" algn="ctr">
                       <a:solidFill>
-                        <a:srgbClr val="E8D4F7"/>
+                        <a:srgbClr val="E9D1FA"/>
                       </a:solidFill>
                       <a:prstDash val="solid"/>
                     </a:lnL>
                     <a:lnR w="9525" cap="flat" cmpd="sng" algn="ctr">
                       <a:solidFill>
-                        <a:srgbClr val="E8D4F7"/>
+                        <a:srgbClr val="E9D1FA"/>
                       </a:solidFill>
                       <a:prstDash val="solid"/>
                     </a:lnR>
                     <a:lnT w="9525" cap="flat" cmpd="sng" algn="ctr">
                       <a:solidFill>
-                        <a:srgbClr val="E8D4F7"/>
+                        <a:srgbClr val="E9D1FA"/>
                       </a:solidFill>
                       <a:prstDash val="solid"/>
                     </a:lnT>
                     <a:lnB w="9525" cap="flat" cmpd="sng" algn="ctr">
                       <a:solidFill>
-                        <a:srgbClr val="E8D4F7"/>
+                        <a:srgbClr val="E9D1FA"/>
                       </a:solidFill>
                       <a:prstDash val="solid"/>
                     </a:lnB>
                     <a:solidFill>
-                      <a:srgbClr val="E8D4F7"/>
+                      <a:srgbClr val="E9D1FA"/>
                     </a:solidFill>
                   </a:tcPr>
                 </a:tc>
@@ -3882,7 +4012,7 @@
                       <a:r>
                         <a:rPr sz="1500" b="0">
                           <a:solidFill>
-                            <a:srgbClr val="2B2B2B"/>
+                            <a:srgbClr val="26231F"/>
                           </a:solidFill>
                         </a:rPr>
                         <a:t>입력하세요</a:t>
@@ -3892,30 +4022,30 @@
                   <a:tcPr anchor="ctr" marL="73152" marR="73152">
                     <a:lnL w="9525" cap="flat" cmpd="sng" algn="ctr">
                       <a:solidFill>
-                        <a:srgbClr val="E8D4F7"/>
+                        <a:srgbClr val="E9D1FA"/>
                       </a:solidFill>
                       <a:prstDash val="solid"/>
                     </a:lnL>
                     <a:lnR w="9525" cap="flat" cmpd="sng" algn="ctr">
                       <a:solidFill>
-                        <a:srgbClr val="E8D4F7"/>
+                        <a:srgbClr val="E9D1FA"/>
                       </a:solidFill>
                       <a:prstDash val="solid"/>
                     </a:lnR>
                     <a:lnT w="9525" cap="flat" cmpd="sng" algn="ctr">
                       <a:solidFill>
-                        <a:srgbClr val="E8D4F7"/>
+                        <a:srgbClr val="E9D1FA"/>
                       </a:solidFill>
                       <a:prstDash val="solid"/>
                     </a:lnT>
                     <a:lnB w="9525" cap="flat" cmpd="sng" algn="ctr">
                       <a:solidFill>
-                        <a:srgbClr val="E8D4F7"/>
+                        <a:srgbClr val="E9D1FA"/>
                       </a:solidFill>
                       <a:prstDash val="solid"/>
                     </a:lnB>
                     <a:solidFill>
-                      <a:srgbClr val="F8F3FC"/>
+                      <a:srgbClr val="F5EAFD"/>
                     </a:solidFill>
                   </a:tcPr>
                 </a:tc>
@@ -3930,7 +4060,7 @@
                       <a:r>
                         <a:rPr sz="1500" b="1">
                           <a:solidFill>
-                            <a:srgbClr val="4E226D"/>
+                            <a:srgbClr val="3B2749"/>
                           </a:solidFill>
                         </a:rPr>
                         <a:t>좋아하는 것</a:t>
@@ -3940,30 +4070,30 @@
                   <a:tcPr anchor="ctr" marL="73152" marR="73152">
                     <a:lnL w="9525" cap="flat" cmpd="sng" algn="ctr">
                       <a:solidFill>
-                        <a:srgbClr val="E8D4F7"/>
+                        <a:srgbClr val="E9D1FA"/>
                       </a:solidFill>
                       <a:prstDash val="solid"/>
                     </a:lnL>
                     <a:lnR w="9525" cap="flat" cmpd="sng" algn="ctr">
                       <a:solidFill>
-                        <a:srgbClr val="E8D4F7"/>
+                        <a:srgbClr val="E9D1FA"/>
                       </a:solidFill>
                       <a:prstDash val="solid"/>
                     </a:lnR>
                     <a:lnT w="9525" cap="flat" cmpd="sng" algn="ctr">
                       <a:solidFill>
-                        <a:srgbClr val="E8D4F7"/>
+                        <a:srgbClr val="E9D1FA"/>
                       </a:solidFill>
                       <a:prstDash val="solid"/>
                     </a:lnT>
                     <a:lnB w="9525" cap="flat" cmpd="sng" algn="ctr">
                       <a:solidFill>
-                        <a:srgbClr val="E8D4F7"/>
+                        <a:srgbClr val="E9D1FA"/>
                       </a:solidFill>
                       <a:prstDash val="solid"/>
                     </a:lnB>
                     <a:solidFill>
-                      <a:srgbClr val="E8D4F7"/>
+                      <a:srgbClr val="E9D1FA"/>
                     </a:solidFill>
                   </a:tcPr>
                 </a:tc>
@@ -3976,7 +4106,7 @@
                       <a:r>
                         <a:rPr sz="1500" b="0">
                           <a:solidFill>
-                            <a:srgbClr val="2B2B2B"/>
+                            <a:srgbClr val="26231F"/>
                           </a:solidFill>
                         </a:rPr>
                         <a:t>입력하세요</a:t>
@@ -3986,25 +4116,25 @@
                   <a:tcPr anchor="ctr" marL="73152" marR="73152">
                     <a:lnL w="9525" cap="flat" cmpd="sng" algn="ctr">
                       <a:solidFill>
-                        <a:srgbClr val="E8D4F7"/>
+                        <a:srgbClr val="E9D1FA"/>
                       </a:solidFill>
                       <a:prstDash val="solid"/>
                     </a:lnL>
                     <a:lnR w="9525" cap="flat" cmpd="sng" algn="ctr">
                       <a:solidFill>
-                        <a:srgbClr val="E8D4F7"/>
+                        <a:srgbClr val="E9D1FA"/>
                       </a:solidFill>
                       <a:prstDash val="solid"/>
                     </a:lnR>
                     <a:lnT w="9525" cap="flat" cmpd="sng" algn="ctr">
                       <a:solidFill>
-                        <a:srgbClr val="E8D4F7"/>
+                        <a:srgbClr val="E9D1FA"/>
                       </a:solidFill>
                       <a:prstDash val="solid"/>
                     </a:lnT>
                     <a:lnB w="9525" cap="flat" cmpd="sng" algn="ctr">
                       <a:solidFill>
-                        <a:srgbClr val="E8D4F7"/>
+                        <a:srgbClr val="E9D1FA"/>
                       </a:solidFill>
                       <a:prstDash val="solid"/>
                     </a:lnB>
@@ -4024,7 +4154,7 @@
                       <a:r>
                         <a:rPr sz="1500" b="1">
                           <a:solidFill>
-                            <a:srgbClr val="4E226D"/>
+                            <a:srgbClr val="3B2749"/>
                           </a:solidFill>
                         </a:rPr>
                         <a:t>별명</a:t>
@@ -4034,30 +4164,30 @@
                   <a:tcPr anchor="ctr" marL="73152" marR="73152">
                     <a:lnL w="9525" cap="flat" cmpd="sng" algn="ctr">
                       <a:solidFill>
-                        <a:srgbClr val="E8D4F7"/>
+                        <a:srgbClr val="E9D1FA"/>
                       </a:solidFill>
                       <a:prstDash val="solid"/>
                     </a:lnL>
                     <a:lnR w="9525" cap="flat" cmpd="sng" algn="ctr">
                       <a:solidFill>
-                        <a:srgbClr val="E8D4F7"/>
+                        <a:srgbClr val="E9D1FA"/>
                       </a:solidFill>
                       <a:prstDash val="solid"/>
                     </a:lnR>
                     <a:lnT w="9525" cap="flat" cmpd="sng" algn="ctr">
                       <a:solidFill>
-                        <a:srgbClr val="E8D4F7"/>
+                        <a:srgbClr val="E9D1FA"/>
                       </a:solidFill>
                       <a:prstDash val="solid"/>
                     </a:lnT>
                     <a:lnB w="9525" cap="flat" cmpd="sng" algn="ctr">
                       <a:solidFill>
-                        <a:srgbClr val="E8D4F7"/>
+                        <a:srgbClr val="E9D1FA"/>
                       </a:solidFill>
                       <a:prstDash val="solid"/>
                     </a:lnB>
                     <a:solidFill>
-                      <a:srgbClr val="E8D4F7"/>
+                      <a:srgbClr val="E9D1FA"/>
                     </a:solidFill>
                   </a:tcPr>
                 </a:tc>
@@ -4070,7 +4200,7 @@
                       <a:r>
                         <a:rPr sz="1500" b="0">
                           <a:solidFill>
-                            <a:srgbClr val="2B2B2B"/>
+                            <a:srgbClr val="26231F"/>
                           </a:solidFill>
                         </a:rPr>
                         <a:t>입력하세요</a:t>
@@ -4080,30 +4210,30 @@
                   <a:tcPr anchor="ctr" marL="73152" marR="73152">
                     <a:lnL w="9525" cap="flat" cmpd="sng" algn="ctr">
                       <a:solidFill>
-                        <a:srgbClr val="E8D4F7"/>
+                        <a:srgbClr val="E9D1FA"/>
                       </a:solidFill>
                       <a:prstDash val="solid"/>
                     </a:lnL>
                     <a:lnR w="9525" cap="flat" cmpd="sng" algn="ctr">
                       <a:solidFill>
-                        <a:srgbClr val="E8D4F7"/>
+                        <a:srgbClr val="E9D1FA"/>
                       </a:solidFill>
                       <a:prstDash val="solid"/>
                     </a:lnR>
                     <a:lnT w="9525" cap="flat" cmpd="sng" algn="ctr">
                       <a:solidFill>
-                        <a:srgbClr val="E8D4F7"/>
+                        <a:srgbClr val="E9D1FA"/>
                       </a:solidFill>
                       <a:prstDash val="solid"/>
                     </a:lnT>
                     <a:lnB w="9525" cap="flat" cmpd="sng" algn="ctr">
                       <a:solidFill>
-                        <a:srgbClr val="E8D4F7"/>
+                        <a:srgbClr val="E9D1FA"/>
                       </a:solidFill>
                       <a:prstDash val="solid"/>
                     </a:lnB>
                     <a:solidFill>
-                      <a:srgbClr val="F8F3FC"/>
+                      <a:srgbClr val="F5EAFD"/>
                     </a:solidFill>
                   </a:tcPr>
                 </a:tc>
@@ -4118,7 +4248,7 @@
                       <a:r>
                         <a:rPr sz="1500" b="1">
                           <a:solidFill>
-                            <a:srgbClr val="4E226D"/>
+                            <a:srgbClr val="3B2749"/>
                           </a:solidFill>
                         </a:rPr>
                         <a:t>부모의 마음</a:t>
@@ -4128,30 +4258,30 @@
                   <a:tcPr anchor="ctr" marL="73152" marR="73152">
                     <a:lnL w="9525" cap="flat" cmpd="sng" algn="ctr">
                       <a:solidFill>
-                        <a:srgbClr val="E8D4F7"/>
+                        <a:srgbClr val="E9D1FA"/>
                       </a:solidFill>
                       <a:prstDash val="solid"/>
                     </a:lnL>
                     <a:lnR w="9525" cap="flat" cmpd="sng" algn="ctr">
                       <a:solidFill>
-                        <a:srgbClr val="E8D4F7"/>
+                        <a:srgbClr val="E9D1FA"/>
                       </a:solidFill>
                       <a:prstDash val="solid"/>
                     </a:lnR>
                     <a:lnT w="9525" cap="flat" cmpd="sng" algn="ctr">
                       <a:solidFill>
-                        <a:srgbClr val="E8D4F7"/>
+                        <a:srgbClr val="E9D1FA"/>
                       </a:solidFill>
                       <a:prstDash val="solid"/>
                     </a:lnT>
                     <a:lnB w="9525" cap="flat" cmpd="sng" algn="ctr">
                       <a:solidFill>
-                        <a:srgbClr val="E8D4F7"/>
+                        <a:srgbClr val="E9D1FA"/>
                       </a:solidFill>
                       <a:prstDash val="solid"/>
                     </a:lnB>
                     <a:solidFill>
-                      <a:srgbClr val="E8D4F7"/>
+                      <a:srgbClr val="E9D1FA"/>
                     </a:solidFill>
                   </a:tcPr>
                 </a:tc>
@@ -4164,7 +4294,7 @@
                       <a:r>
                         <a:rPr sz="1500" b="0">
                           <a:solidFill>
-                            <a:srgbClr val="2B2B2B"/>
+                            <a:srgbClr val="26231F"/>
                           </a:solidFill>
                         </a:rPr>
                         <a:t>입력하세요</a:t>
@@ -4174,25 +4304,25 @@
                   <a:tcPr anchor="ctr" marL="73152" marR="73152">
                     <a:lnL w="9525" cap="flat" cmpd="sng" algn="ctr">
                       <a:solidFill>
-                        <a:srgbClr val="E8D4F7"/>
+                        <a:srgbClr val="E9D1FA"/>
                       </a:solidFill>
                       <a:prstDash val="solid"/>
                     </a:lnL>
                     <a:lnR w="9525" cap="flat" cmpd="sng" algn="ctr">
                       <a:solidFill>
-                        <a:srgbClr val="E8D4F7"/>
+                        <a:srgbClr val="E9D1FA"/>
                       </a:solidFill>
                       <a:prstDash val="solid"/>
                     </a:lnR>
                     <a:lnT w="9525" cap="flat" cmpd="sng" algn="ctr">
                       <a:solidFill>
-                        <a:srgbClr val="E8D4F7"/>
+                        <a:srgbClr val="E9D1FA"/>
                       </a:solidFill>
                       <a:prstDash val="solid"/>
                     </a:lnT>
                     <a:lnB w="9525" cap="flat" cmpd="sng" algn="ctr">
                       <a:solidFill>
-                        <a:srgbClr val="E8D4F7"/>
+                        <a:srgbClr val="E9D1FA"/>
                       </a:solidFill>
                       <a:prstDash val="solid"/>
                     </a:lnB>
@@ -4240,14 +4370,14 @@
         </p:nvSpPr>
         <p:spPr>
           <a:xfrm>
-            <a:off x="9905695" y="-1463040"/>
-            <a:ext cx="3840480" cy="3840480"/>
-          </a:xfrm>
-          <a:prstGeom prst="ellipse">
+            <a:off x="640080" y="6400800"/>
+            <a:ext cx="10911535" cy="10972"/>
+          </a:xfrm>
+          <a:prstGeom prst="rect">
             <a:avLst/>
           </a:prstGeom>
           <a:solidFill>
-            <a:srgbClr val="E8D4F7"/>
+            <a:srgbClr val="26231F"/>
           </a:solidFill>
           <a:ln>
             <a:noFill/>
@@ -4263,20 +4393,58 @@
       </p:sp>
       <p:sp>
         <p:nvSpPr>
-          <p:cNvPr id="4" name="장식"/>
+          <p:cNvPr id="4" name="하단 라벨"/>
+          <p:cNvSpPr txBox="1"/>
+          <p:nvPr/>
+        </p:nvSpPr>
+        <p:spPr>
+          <a:xfrm>
+            <a:off x="640080" y="6437376"/>
+            <a:ext cx="5486400" cy="274320"/>
+          </a:xfrm>
+          <a:prstGeom prst="rect">
+            <a:avLst/>
+          </a:prstGeom>
+          <a:noFill/>
+        </p:spPr>
+        <p:txBody>
+          <a:bodyPr wrap="square" lIns="54864" rIns="54864" tIns="27432" bIns="27432" anchor="ctr">
+            <a:noAutofit/>
+          </a:bodyPr>
+          <a:lstStyle/>
+          <a:p>
+            <a:pPr algn="l">
+              <a:lnSpc>
+                <a:spcPct val="115000"/>
+              </a:lnSpc>
+            </a:pPr>
+            <a:r>
+              <a:rPr sz="900" b="1" i="0" spc="250">
+                <a:solidFill>
+                  <a:srgbClr val="26231F"/>
+                </a:solidFill>
+              </a:rPr>
+              <a:t>FIRST BIRTHDAY</a:t>
+            </a:r>
+          </a:p>
+        </p:txBody>
+      </p:sp>
+      <p:sp>
+        <p:nvSpPr>
+          <p:cNvPr id="5" name="포인트"/>
           <p:cNvSpPr/>
           <p:nvPr/>
         </p:nvSpPr>
         <p:spPr>
           <a:xfrm>
-            <a:off x="11094415" y="274320"/>
-            <a:ext cx="411480" cy="411480"/>
-          </a:xfrm>
-          <a:prstGeom prst="ellipse">
+            <a:off x="11213287" y="6473952"/>
+            <a:ext cx="219456" cy="219456"/>
+          </a:xfrm>
+          <a:prstGeom prst="moon">
             <a:avLst/>
           </a:prstGeom>
           <a:solidFill>
-            <a:srgbClr val="9651C8"/>
+            <a:srgbClr val="C997ED"/>
           </a:solidFill>
           <a:ln>
             <a:noFill/>
@@ -4302,8 +4470,8 @@
         </p:nvSpPr>
         <p:spPr>
           <a:xfrm>
-            <a:off x="640080" y="457200"/>
-            <a:ext cx="9722815" cy="868680"/>
+            <a:off x="640080" y="502920"/>
+            <a:ext cx="10911535" cy="914400"/>
           </a:xfrm>
         </p:spPr>
         <p:txBody>
@@ -4320,7 +4488,7 @@
             <a:r>
               <a:rPr sz="3000" b="1" i="0">
                 <a:solidFill>
-                  <a:srgbClr val="4E226D"/>
+                  <a:srgbClr val="26231F"/>
                 </a:solidFill>
               </a:rPr>
               <a:t>한 해 성장 기록</a:t>
@@ -4330,7 +4498,7 @@
       </p:sp>
       <p:sp>
         <p:nvSpPr>
-          <p:cNvPr id="5" name="타임라인 선"/>
+          <p:cNvPr id="6" name="타임라인 선"/>
           <p:cNvSpPr/>
           <p:nvPr/>
         </p:nvSpPr>
@@ -4343,7 +4511,7 @@
             <a:avLst/>
           </a:prstGeom>
           <a:solidFill>
-            <a:srgbClr val="E8D4F7"/>
+            <a:srgbClr val="E9D1FA"/>
           </a:solidFill>
           <a:ln>
             <a:noFill/>
@@ -4359,7 +4527,7 @@
       </p:sp>
       <p:sp>
         <p:nvSpPr>
-          <p:cNvPr id="6" name="때 1"/>
+          <p:cNvPr id="7" name="때 1"/>
           <p:cNvSpPr/>
           <p:nvPr/>
         </p:nvSpPr>
@@ -4372,7 +4540,7 @@
             <a:avLst/>
           </a:prstGeom>
           <a:solidFill>
-            <a:srgbClr val="9651C8"/>
+            <a:srgbClr val="C997ED"/>
           </a:solidFill>
           <a:ln w="38100">
             <a:solidFill>
@@ -4390,7 +4558,7 @@
       </p:sp>
       <p:sp>
         <p:nvSpPr>
-          <p:cNvPr id="7" name="TextBox 6"/>
+          <p:cNvPr id="8" name="TextBox 7"/>
           <p:cNvSpPr txBox="1"/>
           <p:nvPr/>
         </p:nvSpPr>
@@ -4418,7 +4586,7 @@
             <a:r>
               <a:rPr sz="1400" b="1" i="0">
                 <a:solidFill>
-                  <a:srgbClr val="9651C8"/>
+                  <a:srgbClr val="C997ED"/>
                 </a:solidFill>
               </a:rPr>
               <a:t>1개월</a:t>
@@ -4428,7 +4596,7 @@
       </p:sp>
       <p:sp>
         <p:nvSpPr>
-          <p:cNvPr id="8" name="TextBox 7"/>
+          <p:cNvPr id="9" name="TextBox 8"/>
           <p:cNvSpPr txBox="1"/>
           <p:nvPr/>
         </p:nvSpPr>
@@ -4456,7 +4624,7 @@
             <a:r>
               <a:rPr sz="1600" b="1" i="0">
                 <a:solidFill>
-                  <a:srgbClr val="4E226D"/>
+                  <a:srgbClr val="3B2749"/>
                 </a:solidFill>
               </a:rPr>
               <a:t>처음 눈을 맞춘 날</a:t>
@@ -4466,7 +4634,7 @@
       </p:sp>
       <p:sp>
         <p:nvSpPr>
-          <p:cNvPr id="9" name="TextBox 8"/>
+          <p:cNvPr id="10" name="TextBox 9"/>
           <p:cNvSpPr txBox="1"/>
           <p:nvPr/>
         </p:nvSpPr>
@@ -4494,7 +4662,7 @@
             <a:r>
               <a:rPr sz="1300" b="0" i="0">
                 <a:solidFill>
-                  <a:srgbClr val="2B2B2B"/>
+                  <a:srgbClr val="26231F"/>
                 </a:solidFill>
               </a:rPr>
               <a:t>기억을 적어 주세요</a:t>
@@ -4504,7 +4672,7 @@
       </p:sp>
       <p:sp>
         <p:nvSpPr>
-          <p:cNvPr id="10" name="때 2"/>
+          <p:cNvPr id="11" name="때 2"/>
           <p:cNvSpPr/>
           <p:nvPr/>
         </p:nvSpPr>
@@ -4517,7 +4685,7 @@
             <a:avLst/>
           </a:prstGeom>
           <a:solidFill>
-            <a:srgbClr val="9651C8"/>
+            <a:srgbClr val="C997ED"/>
           </a:solidFill>
           <a:ln w="38100">
             <a:solidFill>
@@ -4535,7 +4703,7 @@
       </p:sp>
       <p:sp>
         <p:nvSpPr>
-          <p:cNvPr id="11" name="TextBox 10"/>
+          <p:cNvPr id="12" name="TextBox 11"/>
           <p:cNvSpPr txBox="1"/>
           <p:nvPr/>
         </p:nvSpPr>
@@ -4563,7 +4731,7 @@
             <a:r>
               <a:rPr sz="1400" b="1" i="0">
                 <a:solidFill>
-                  <a:srgbClr val="9651C8"/>
+                  <a:srgbClr val="C997ED"/>
                 </a:solidFill>
               </a:rPr>
               <a:t>3개월</a:t>
@@ -4573,7 +4741,7 @@
       </p:sp>
       <p:sp>
         <p:nvSpPr>
-          <p:cNvPr id="12" name="TextBox 11"/>
+          <p:cNvPr id="13" name="TextBox 12"/>
           <p:cNvSpPr txBox="1"/>
           <p:nvPr/>
         </p:nvSpPr>
@@ -4601,7 +4769,7 @@
             <a:r>
               <a:rPr sz="1600" b="1" i="0">
                 <a:solidFill>
-                  <a:srgbClr val="4E226D"/>
+                  <a:srgbClr val="3B2749"/>
                 </a:solidFill>
               </a:rPr>
               <a:t>처음 웃은 날</a:t>
@@ -4611,7 +4779,7 @@
       </p:sp>
       <p:sp>
         <p:nvSpPr>
-          <p:cNvPr id="13" name="TextBox 12"/>
+          <p:cNvPr id="14" name="TextBox 13"/>
           <p:cNvSpPr txBox="1"/>
           <p:nvPr/>
         </p:nvSpPr>
@@ -4639,7 +4807,7 @@
             <a:r>
               <a:rPr sz="1300" b="0" i="0">
                 <a:solidFill>
-                  <a:srgbClr val="2B2B2B"/>
+                  <a:srgbClr val="26231F"/>
                 </a:solidFill>
               </a:rPr>
               <a:t>기억을 적어 주세요</a:t>
@@ -4649,7 +4817,7 @@
       </p:sp>
       <p:sp>
         <p:nvSpPr>
-          <p:cNvPr id="14" name="때 3"/>
+          <p:cNvPr id="15" name="때 3"/>
           <p:cNvSpPr/>
           <p:nvPr/>
         </p:nvSpPr>
@@ -4662,7 +4830,7 @@
             <a:avLst/>
           </a:prstGeom>
           <a:solidFill>
-            <a:srgbClr val="9651C8"/>
+            <a:srgbClr val="C997ED"/>
           </a:solidFill>
           <a:ln w="38100">
             <a:solidFill>
@@ -4680,7 +4848,7 @@
       </p:sp>
       <p:sp>
         <p:nvSpPr>
-          <p:cNvPr id="15" name="TextBox 14"/>
+          <p:cNvPr id="16" name="TextBox 15"/>
           <p:cNvSpPr txBox="1"/>
           <p:nvPr/>
         </p:nvSpPr>
@@ -4708,7 +4876,7 @@
             <a:r>
               <a:rPr sz="1400" b="1" i="0">
                 <a:solidFill>
-                  <a:srgbClr val="9651C8"/>
+                  <a:srgbClr val="C997ED"/>
                 </a:solidFill>
               </a:rPr>
               <a:t>6개월</a:t>
@@ -4718,7 +4886,7 @@
       </p:sp>
       <p:sp>
         <p:nvSpPr>
-          <p:cNvPr id="16" name="TextBox 15"/>
+          <p:cNvPr id="17" name="TextBox 16"/>
           <p:cNvSpPr txBox="1"/>
           <p:nvPr/>
         </p:nvSpPr>
@@ -4746,7 +4914,7 @@
             <a:r>
               <a:rPr sz="1600" b="1" i="0">
                 <a:solidFill>
-                  <a:srgbClr val="4E226D"/>
+                  <a:srgbClr val="3B2749"/>
                 </a:solidFill>
               </a:rPr>
               <a:t>뒤집기 성공</a:t>
@@ -4756,7 +4924,7 @@
       </p:sp>
       <p:sp>
         <p:nvSpPr>
-          <p:cNvPr id="17" name="TextBox 16"/>
+          <p:cNvPr id="18" name="TextBox 17"/>
           <p:cNvSpPr txBox="1"/>
           <p:nvPr/>
         </p:nvSpPr>
@@ -4784,7 +4952,7 @@
             <a:r>
               <a:rPr sz="1300" b="0" i="0">
                 <a:solidFill>
-                  <a:srgbClr val="2B2B2B"/>
+                  <a:srgbClr val="26231F"/>
                 </a:solidFill>
               </a:rPr>
               <a:t>기억을 적어 주세요</a:t>
@@ -4794,7 +4962,7 @@
       </p:sp>
       <p:sp>
         <p:nvSpPr>
-          <p:cNvPr id="18" name="때 4"/>
+          <p:cNvPr id="19" name="때 4"/>
           <p:cNvSpPr/>
           <p:nvPr/>
         </p:nvSpPr>
@@ -4807,7 +4975,7 @@
             <a:avLst/>
           </a:prstGeom>
           <a:solidFill>
-            <a:srgbClr val="9651C8"/>
+            <a:srgbClr val="C997ED"/>
           </a:solidFill>
           <a:ln w="38100">
             <a:solidFill>
@@ -4825,7 +4993,7 @@
       </p:sp>
       <p:sp>
         <p:nvSpPr>
-          <p:cNvPr id="19" name="TextBox 18"/>
+          <p:cNvPr id="20" name="TextBox 19"/>
           <p:cNvSpPr txBox="1"/>
           <p:nvPr/>
         </p:nvSpPr>
@@ -4853,7 +5021,7 @@
             <a:r>
               <a:rPr sz="1400" b="1" i="0">
                 <a:solidFill>
-                  <a:srgbClr val="9651C8"/>
+                  <a:srgbClr val="C997ED"/>
                 </a:solidFill>
               </a:rPr>
               <a:t>9개월</a:t>
@@ -4863,7 +5031,7 @@
       </p:sp>
       <p:sp>
         <p:nvSpPr>
-          <p:cNvPr id="20" name="TextBox 19"/>
+          <p:cNvPr id="21" name="TextBox 20"/>
           <p:cNvSpPr txBox="1"/>
           <p:nvPr/>
         </p:nvSpPr>
@@ -4891,7 +5059,7 @@
             <a:r>
               <a:rPr sz="1600" b="1" i="0">
                 <a:solidFill>
-                  <a:srgbClr val="4E226D"/>
+                  <a:srgbClr val="3B2749"/>
                 </a:solidFill>
               </a:rPr>
               <a:t>첫 이유식</a:t>
@@ -4901,7 +5069,7 @@
       </p:sp>
       <p:sp>
         <p:nvSpPr>
-          <p:cNvPr id="21" name="TextBox 20"/>
+          <p:cNvPr id="22" name="TextBox 21"/>
           <p:cNvSpPr txBox="1"/>
           <p:nvPr/>
         </p:nvSpPr>
@@ -4929,7 +5097,7 @@
             <a:r>
               <a:rPr sz="1300" b="0" i="0">
                 <a:solidFill>
-                  <a:srgbClr val="2B2B2B"/>
+                  <a:srgbClr val="26231F"/>
                 </a:solidFill>
               </a:rPr>
               <a:t>기억을 적어 주세요</a:t>
@@ -4939,7 +5107,7 @@
       </p:sp>
       <p:sp>
         <p:nvSpPr>
-          <p:cNvPr id="22" name="때 5"/>
+          <p:cNvPr id="23" name="때 5"/>
           <p:cNvSpPr/>
           <p:nvPr/>
         </p:nvSpPr>
@@ -4952,7 +5120,7 @@
             <a:avLst/>
           </a:prstGeom>
           <a:solidFill>
-            <a:srgbClr val="9651C8"/>
+            <a:srgbClr val="C997ED"/>
           </a:solidFill>
           <a:ln w="38100">
             <a:solidFill>
@@ -4970,7 +5138,7 @@
       </p:sp>
       <p:sp>
         <p:nvSpPr>
-          <p:cNvPr id="23" name="TextBox 22"/>
+          <p:cNvPr id="24" name="TextBox 23"/>
           <p:cNvSpPr txBox="1"/>
           <p:nvPr/>
         </p:nvSpPr>
@@ -4998,7 +5166,7 @@
             <a:r>
               <a:rPr sz="1400" b="1" i="0">
                 <a:solidFill>
-                  <a:srgbClr val="9651C8"/>
+                  <a:srgbClr val="C997ED"/>
                 </a:solidFill>
               </a:rPr>
               <a:t>12개월</a:t>
@@ -5008,7 +5176,7 @@
       </p:sp>
       <p:sp>
         <p:nvSpPr>
-          <p:cNvPr id="24" name="TextBox 23"/>
+          <p:cNvPr id="25" name="TextBox 24"/>
           <p:cNvSpPr txBox="1"/>
           <p:nvPr/>
         </p:nvSpPr>
@@ -5036,7 +5204,7 @@
             <a:r>
               <a:rPr sz="1600" b="1" i="0">
                 <a:solidFill>
-                  <a:srgbClr val="4E226D"/>
+                  <a:srgbClr val="3B2749"/>
                 </a:solidFill>
               </a:rPr>
               <a:t>첫 걸음</a:t>
@@ -5046,7 +5214,7 @@
       </p:sp>
       <p:sp>
         <p:nvSpPr>
-          <p:cNvPr id="25" name="TextBox 24"/>
+          <p:cNvPr id="26" name="TextBox 25"/>
           <p:cNvSpPr txBox="1"/>
           <p:nvPr/>
         </p:nvSpPr>
@@ -5074,7 +5242,7 @@
             <a:r>
               <a:rPr sz="1300" b="0" i="0">
                 <a:solidFill>
-                  <a:srgbClr val="2B2B2B"/>
+                  <a:srgbClr val="26231F"/>
                 </a:solidFill>
               </a:rPr>
               <a:t>기억을 적어 주세요</a:t>
@@ -5116,14 +5284,14 @@
         </p:nvSpPr>
         <p:spPr>
           <a:xfrm>
-            <a:off x="9905695" y="-1463040"/>
-            <a:ext cx="3840480" cy="3840480"/>
-          </a:xfrm>
-          <a:prstGeom prst="ellipse">
+            <a:off x="640080" y="6400800"/>
+            <a:ext cx="10911535" cy="10972"/>
+          </a:xfrm>
+          <a:prstGeom prst="rect">
             <a:avLst/>
           </a:prstGeom>
           <a:solidFill>
-            <a:srgbClr val="E8D4F7"/>
+            <a:srgbClr val="26231F"/>
           </a:solidFill>
           <a:ln>
             <a:noFill/>
@@ -5139,20 +5307,58 @@
       </p:sp>
       <p:sp>
         <p:nvSpPr>
-          <p:cNvPr id="4" name="장식"/>
+          <p:cNvPr id="4" name="하단 라벨"/>
+          <p:cNvSpPr txBox="1"/>
+          <p:nvPr/>
+        </p:nvSpPr>
+        <p:spPr>
+          <a:xfrm>
+            <a:off x="640080" y="6437376"/>
+            <a:ext cx="5486400" cy="274320"/>
+          </a:xfrm>
+          <a:prstGeom prst="rect">
+            <a:avLst/>
+          </a:prstGeom>
+          <a:noFill/>
+        </p:spPr>
+        <p:txBody>
+          <a:bodyPr wrap="square" lIns="54864" rIns="54864" tIns="27432" bIns="27432" anchor="ctr">
+            <a:noAutofit/>
+          </a:bodyPr>
+          <a:lstStyle/>
+          <a:p>
+            <a:pPr algn="l">
+              <a:lnSpc>
+                <a:spcPct val="115000"/>
+              </a:lnSpc>
+            </a:pPr>
+            <a:r>
+              <a:rPr sz="900" b="1" i="0" spc="250">
+                <a:solidFill>
+                  <a:srgbClr val="26231F"/>
+                </a:solidFill>
+              </a:rPr>
+              <a:t>FIRST BIRTHDAY</a:t>
+            </a:r>
+          </a:p>
+        </p:txBody>
+      </p:sp>
+      <p:sp>
+        <p:nvSpPr>
+          <p:cNvPr id="5" name="포인트"/>
           <p:cNvSpPr/>
           <p:nvPr/>
         </p:nvSpPr>
         <p:spPr>
           <a:xfrm>
-            <a:off x="11094415" y="274320"/>
-            <a:ext cx="411480" cy="411480"/>
-          </a:xfrm>
-          <a:prstGeom prst="ellipse">
+            <a:off x="11213287" y="6473952"/>
+            <a:ext cx="219456" cy="219456"/>
+          </a:xfrm>
+          <a:prstGeom prst="moon">
             <a:avLst/>
           </a:prstGeom>
           <a:solidFill>
-            <a:srgbClr val="9651C8"/>
+            <a:srgbClr val="C997ED"/>
           </a:solidFill>
           <a:ln>
             <a:noFill/>
@@ -5178,8 +5384,8 @@
         </p:nvSpPr>
         <p:spPr>
           <a:xfrm>
-            <a:off x="640080" y="457200"/>
-            <a:ext cx="9722815" cy="868680"/>
+            <a:off x="640080" y="502920"/>
+            <a:ext cx="10911535" cy="914400"/>
           </a:xfrm>
         </p:spPr>
         <p:txBody>
@@ -5196,7 +5402,7 @@
             <a:r>
               <a:rPr sz="3000" b="1" i="0">
                 <a:solidFill>
-                  <a:srgbClr val="4E226D"/>
+                  <a:srgbClr val="26231F"/>
                 </a:solidFill>
               </a:rPr>
               <a:t>키와 몸무게</a:t>
@@ -5206,7 +5412,7 @@
       </p:sp>
       <p:graphicFrame>
         <p:nvGraphicFramePr>
-          <p:cNvPr id="5" name="표"/>
+          <p:cNvPr id="6" name="표"/>
           <p:cNvGraphicFramePr>
             <a:graphicFrameLocks noGrp="1"/>
           </p:cNvGraphicFramePr>
@@ -5239,7 +5445,7 @@
                       <a:r>
                         <a:rPr sz="1600" b="1">
                           <a:solidFill>
-                            <a:srgbClr val="FFFFFF"/>
+                            <a:srgbClr val="26231F"/>
                           </a:solidFill>
                         </a:rPr>
                         <a:t/>
@@ -5249,30 +5455,30 @@
                   <a:tcPr anchor="ctr" marL="73152" marR="73152">
                     <a:lnL w="9525" cap="flat" cmpd="sng" algn="ctr">
                       <a:solidFill>
-                        <a:srgbClr val="9651C8"/>
+                        <a:srgbClr val="C997ED"/>
                       </a:solidFill>
                       <a:prstDash val="solid"/>
                     </a:lnL>
                     <a:lnR w="9525" cap="flat" cmpd="sng" algn="ctr">
                       <a:solidFill>
-                        <a:srgbClr val="9651C8"/>
+                        <a:srgbClr val="C997ED"/>
                       </a:solidFill>
                       <a:prstDash val="solid"/>
                     </a:lnR>
                     <a:lnT w="9525" cap="flat" cmpd="sng" algn="ctr">
                       <a:solidFill>
-                        <a:srgbClr val="9651C8"/>
+                        <a:srgbClr val="C997ED"/>
                       </a:solidFill>
                       <a:prstDash val="solid"/>
                     </a:lnT>
                     <a:lnB w="9525" cap="flat" cmpd="sng" algn="ctr">
                       <a:solidFill>
-                        <a:srgbClr val="9651C8"/>
+                        <a:srgbClr val="C997ED"/>
                       </a:solidFill>
                       <a:prstDash val="solid"/>
                     </a:lnB>
                     <a:solidFill>
-                      <a:srgbClr val="9651C8"/>
+                      <a:srgbClr val="C997ED"/>
                     </a:solidFill>
                   </a:tcPr>
                 </a:tc>
@@ -5285,7 +5491,7 @@
                       <a:r>
                         <a:rPr sz="1600" b="1">
                           <a:solidFill>
-                            <a:srgbClr val="FFFFFF"/>
+                            <a:srgbClr val="26231F"/>
                           </a:solidFill>
                         </a:rPr>
                         <a:t>3개월</a:t>
@@ -5295,30 +5501,30 @@
                   <a:tcPr anchor="ctr" marL="73152" marR="73152">
                     <a:lnL w="9525" cap="flat" cmpd="sng" algn="ctr">
                       <a:solidFill>
-                        <a:srgbClr val="9651C8"/>
+                        <a:srgbClr val="C997ED"/>
                       </a:solidFill>
                       <a:prstDash val="solid"/>
                     </a:lnL>
                     <a:lnR w="9525" cap="flat" cmpd="sng" algn="ctr">
                       <a:solidFill>
-                        <a:srgbClr val="9651C8"/>
+                        <a:srgbClr val="C997ED"/>
                       </a:solidFill>
                       <a:prstDash val="solid"/>
                     </a:lnR>
                     <a:lnT w="9525" cap="flat" cmpd="sng" algn="ctr">
                       <a:solidFill>
-                        <a:srgbClr val="9651C8"/>
+                        <a:srgbClr val="C997ED"/>
                       </a:solidFill>
                       <a:prstDash val="solid"/>
                     </a:lnT>
                     <a:lnB w="9525" cap="flat" cmpd="sng" algn="ctr">
                       <a:solidFill>
-                        <a:srgbClr val="9651C8"/>
+                        <a:srgbClr val="C997ED"/>
                       </a:solidFill>
                       <a:prstDash val="solid"/>
                     </a:lnB>
                     <a:solidFill>
-                      <a:srgbClr val="9651C8"/>
+                      <a:srgbClr val="C997ED"/>
                     </a:solidFill>
                   </a:tcPr>
                 </a:tc>
@@ -5331,7 +5537,7 @@
                       <a:r>
                         <a:rPr sz="1600" b="1">
                           <a:solidFill>
-                            <a:srgbClr val="FFFFFF"/>
+                            <a:srgbClr val="26231F"/>
                           </a:solidFill>
                         </a:rPr>
                         <a:t>6개월</a:t>
@@ -5341,30 +5547,30 @@
                   <a:tcPr anchor="ctr" marL="73152" marR="73152">
                     <a:lnL w="9525" cap="flat" cmpd="sng" algn="ctr">
                       <a:solidFill>
-                        <a:srgbClr val="9651C8"/>
+                        <a:srgbClr val="C997ED"/>
                       </a:solidFill>
                       <a:prstDash val="solid"/>
                     </a:lnL>
                     <a:lnR w="9525" cap="flat" cmpd="sng" algn="ctr">
                       <a:solidFill>
-                        <a:srgbClr val="9651C8"/>
+                        <a:srgbClr val="C997ED"/>
                       </a:solidFill>
                       <a:prstDash val="solid"/>
                     </a:lnR>
                     <a:lnT w="9525" cap="flat" cmpd="sng" algn="ctr">
                       <a:solidFill>
-                        <a:srgbClr val="9651C8"/>
+                        <a:srgbClr val="C997ED"/>
                       </a:solidFill>
                       <a:prstDash val="solid"/>
                     </a:lnT>
                     <a:lnB w="9525" cap="flat" cmpd="sng" algn="ctr">
                       <a:solidFill>
-                        <a:srgbClr val="9651C8"/>
+                        <a:srgbClr val="C997ED"/>
                       </a:solidFill>
                       <a:prstDash val="solid"/>
                     </a:lnB>
                     <a:solidFill>
-                      <a:srgbClr val="9651C8"/>
+                      <a:srgbClr val="C997ED"/>
                     </a:solidFill>
                   </a:tcPr>
                 </a:tc>
@@ -5377,7 +5583,7 @@
                       <a:r>
                         <a:rPr sz="1600" b="1">
                           <a:solidFill>
-                            <a:srgbClr val="FFFFFF"/>
+                            <a:srgbClr val="26231F"/>
                           </a:solidFill>
                         </a:rPr>
                         <a:t>9개월</a:t>
@@ -5387,30 +5593,30 @@
                   <a:tcPr anchor="ctr" marL="73152" marR="73152">
                     <a:lnL w="9525" cap="flat" cmpd="sng" algn="ctr">
                       <a:solidFill>
-                        <a:srgbClr val="9651C8"/>
+                        <a:srgbClr val="C997ED"/>
                       </a:solidFill>
                       <a:prstDash val="solid"/>
                     </a:lnL>
                     <a:lnR w="9525" cap="flat" cmpd="sng" algn="ctr">
                       <a:solidFill>
-                        <a:srgbClr val="9651C8"/>
+                        <a:srgbClr val="C997ED"/>
                       </a:solidFill>
                       <a:prstDash val="solid"/>
                     </a:lnR>
                     <a:lnT w="9525" cap="flat" cmpd="sng" algn="ctr">
                       <a:solidFill>
-                        <a:srgbClr val="9651C8"/>
+                        <a:srgbClr val="C997ED"/>
                       </a:solidFill>
                       <a:prstDash val="solid"/>
                     </a:lnT>
                     <a:lnB w="9525" cap="flat" cmpd="sng" algn="ctr">
                       <a:solidFill>
-                        <a:srgbClr val="9651C8"/>
+                        <a:srgbClr val="C997ED"/>
                       </a:solidFill>
                       <a:prstDash val="solid"/>
                     </a:lnB>
                     <a:solidFill>
-                      <a:srgbClr val="9651C8"/>
+                      <a:srgbClr val="C997ED"/>
                     </a:solidFill>
                   </a:tcPr>
                 </a:tc>
@@ -5423,7 +5629,7 @@
                       <a:r>
                         <a:rPr sz="1600" b="1">
                           <a:solidFill>
-                            <a:srgbClr val="FFFFFF"/>
+                            <a:srgbClr val="26231F"/>
                           </a:solidFill>
                         </a:rPr>
                         <a:t>12개월</a:t>
@@ -5433,30 +5639,30 @@
                   <a:tcPr anchor="ctr" marL="73152" marR="73152">
                     <a:lnL w="9525" cap="flat" cmpd="sng" algn="ctr">
                       <a:solidFill>
-                        <a:srgbClr val="9651C8"/>
+                        <a:srgbClr val="C997ED"/>
                       </a:solidFill>
                       <a:prstDash val="solid"/>
                     </a:lnL>
                     <a:lnR w="9525" cap="flat" cmpd="sng" algn="ctr">
                       <a:solidFill>
-                        <a:srgbClr val="9651C8"/>
+                        <a:srgbClr val="C997ED"/>
                       </a:solidFill>
                       <a:prstDash val="solid"/>
                     </a:lnR>
                     <a:lnT w="9525" cap="flat" cmpd="sng" algn="ctr">
                       <a:solidFill>
-                        <a:srgbClr val="9651C8"/>
+                        <a:srgbClr val="C997ED"/>
                       </a:solidFill>
                       <a:prstDash val="solid"/>
                     </a:lnT>
                     <a:lnB w="9525" cap="flat" cmpd="sng" algn="ctr">
                       <a:solidFill>
-                        <a:srgbClr val="9651C8"/>
+                        <a:srgbClr val="C997ED"/>
                       </a:solidFill>
                       <a:prstDash val="solid"/>
                     </a:lnB>
                     <a:solidFill>
-                      <a:srgbClr val="9651C8"/>
+                      <a:srgbClr val="C997ED"/>
                     </a:solidFill>
                   </a:tcPr>
                 </a:tc>
@@ -5471,7 +5677,7 @@
                       <a:r>
                         <a:rPr sz="1600" b="1">
                           <a:solidFill>
-                            <a:srgbClr val="4E226D"/>
+                            <a:srgbClr val="3B2749"/>
                           </a:solidFill>
                         </a:rPr>
                         <a:t>키(cm)</a:t>
@@ -5481,30 +5687,30 @@
                   <a:tcPr anchor="ctr" marL="73152" marR="73152">
                     <a:lnL w="9525" cap="flat" cmpd="sng" algn="ctr">
                       <a:solidFill>
-                        <a:srgbClr val="E8D4F7"/>
+                        <a:srgbClr val="E9D1FA"/>
                       </a:solidFill>
                       <a:prstDash val="solid"/>
                     </a:lnL>
                     <a:lnR w="9525" cap="flat" cmpd="sng" algn="ctr">
                       <a:solidFill>
-                        <a:srgbClr val="E8D4F7"/>
+                        <a:srgbClr val="E9D1FA"/>
                       </a:solidFill>
                       <a:prstDash val="solid"/>
                     </a:lnR>
                     <a:lnT w="9525" cap="flat" cmpd="sng" algn="ctr">
                       <a:solidFill>
-                        <a:srgbClr val="E8D4F7"/>
+                        <a:srgbClr val="E9D1FA"/>
                       </a:solidFill>
                       <a:prstDash val="solid"/>
                     </a:lnT>
                     <a:lnB w="9525" cap="flat" cmpd="sng" algn="ctr">
                       <a:solidFill>
-                        <a:srgbClr val="E8D4F7"/>
+                        <a:srgbClr val="E9D1FA"/>
                       </a:solidFill>
                       <a:prstDash val="solid"/>
                     </a:lnB>
                     <a:solidFill>
-                      <a:srgbClr val="E8D4F7"/>
+                      <a:srgbClr val="E9D1FA"/>
                     </a:solidFill>
                   </a:tcPr>
                 </a:tc>
@@ -5517,7 +5723,7 @@
                       <a:r>
                         <a:rPr sz="1600" b="0">
                           <a:solidFill>
-                            <a:srgbClr val="2B2B2B"/>
+                            <a:srgbClr val="26231F"/>
                           </a:solidFill>
                         </a:rPr>
                         <a:t/>
@@ -5527,25 +5733,25 @@
                   <a:tcPr anchor="ctr" marL="73152" marR="73152">
                     <a:lnL w="9525" cap="flat" cmpd="sng" algn="ctr">
                       <a:solidFill>
-                        <a:srgbClr val="E8D4F7"/>
+                        <a:srgbClr val="E9D1FA"/>
                       </a:solidFill>
                       <a:prstDash val="solid"/>
                     </a:lnL>
                     <a:lnR w="9525" cap="flat" cmpd="sng" algn="ctr">
                       <a:solidFill>
-                        <a:srgbClr val="E8D4F7"/>
+                        <a:srgbClr val="E9D1FA"/>
                       </a:solidFill>
                       <a:prstDash val="solid"/>
                     </a:lnR>
                     <a:lnT w="9525" cap="flat" cmpd="sng" algn="ctr">
                       <a:solidFill>
-                        <a:srgbClr val="E8D4F7"/>
+                        <a:srgbClr val="E9D1FA"/>
                       </a:solidFill>
                       <a:prstDash val="solid"/>
                     </a:lnT>
                     <a:lnB w="9525" cap="flat" cmpd="sng" algn="ctr">
                       <a:solidFill>
-                        <a:srgbClr val="E8D4F7"/>
+                        <a:srgbClr val="E9D1FA"/>
                       </a:solidFill>
                       <a:prstDash val="solid"/>
                     </a:lnB>
@@ -5563,7 +5769,7 @@
                       <a:r>
                         <a:rPr sz="1600" b="0">
                           <a:solidFill>
-                            <a:srgbClr val="2B2B2B"/>
+                            <a:srgbClr val="26231F"/>
                           </a:solidFill>
                         </a:rPr>
                         <a:t/>
@@ -5573,25 +5779,25 @@
                   <a:tcPr anchor="ctr" marL="73152" marR="73152">
                     <a:lnL w="9525" cap="flat" cmpd="sng" algn="ctr">
                       <a:solidFill>
-                        <a:srgbClr val="E8D4F7"/>
+                        <a:srgbClr val="E9D1FA"/>
                       </a:solidFill>
                       <a:prstDash val="solid"/>
                     </a:lnL>
                     <a:lnR w="9525" cap="flat" cmpd="sng" algn="ctr">
                       <a:solidFill>
-                        <a:srgbClr val="E8D4F7"/>
+                        <a:srgbClr val="E9D1FA"/>
                       </a:solidFill>
                       <a:prstDash val="solid"/>
                     </a:lnR>
                     <a:lnT w="9525" cap="flat" cmpd="sng" algn="ctr">
                       <a:solidFill>
-                        <a:srgbClr val="E8D4F7"/>
+                        <a:srgbClr val="E9D1FA"/>
                       </a:solidFill>
                       <a:prstDash val="solid"/>
                     </a:lnT>
                     <a:lnB w="9525" cap="flat" cmpd="sng" algn="ctr">
                       <a:solidFill>
-                        <a:srgbClr val="E8D4F7"/>
+                        <a:srgbClr val="E9D1FA"/>
                       </a:solidFill>
                       <a:prstDash val="solid"/>
                     </a:lnB>
@@ -5609,7 +5815,7 @@
                       <a:r>
                         <a:rPr sz="1600" b="0">
                           <a:solidFill>
-                            <a:srgbClr val="2B2B2B"/>
+                            <a:srgbClr val="26231F"/>
                           </a:solidFill>
                         </a:rPr>
                         <a:t/>
@@ -5619,25 +5825,25 @@
                   <a:tcPr anchor="ctr" marL="73152" marR="73152">
                     <a:lnL w="9525" cap="flat" cmpd="sng" algn="ctr">
                       <a:solidFill>
-                        <a:srgbClr val="E8D4F7"/>
+                        <a:srgbClr val="E9D1FA"/>
                       </a:solidFill>
                       <a:prstDash val="solid"/>
                     </a:lnL>
                     <a:lnR w="9525" cap="flat" cmpd="sng" algn="ctr">
                       <a:solidFill>
-                        <a:srgbClr val="E8D4F7"/>
+                        <a:srgbClr val="E9D1FA"/>
                       </a:solidFill>
                       <a:prstDash val="solid"/>
                     </a:lnR>
                     <a:lnT w="9525" cap="flat" cmpd="sng" algn="ctr">
                       <a:solidFill>
-                        <a:srgbClr val="E8D4F7"/>
+                        <a:srgbClr val="E9D1FA"/>
                       </a:solidFill>
                       <a:prstDash val="solid"/>
                     </a:lnT>
                     <a:lnB w="9525" cap="flat" cmpd="sng" algn="ctr">
                       <a:solidFill>
-                        <a:srgbClr val="E8D4F7"/>
+                        <a:srgbClr val="E9D1FA"/>
                       </a:solidFill>
                       <a:prstDash val="solid"/>
                     </a:lnB>
@@ -5655,7 +5861,7 @@
                       <a:r>
                         <a:rPr sz="1600" b="0">
                           <a:solidFill>
-                            <a:srgbClr val="2B2B2B"/>
+                            <a:srgbClr val="26231F"/>
                           </a:solidFill>
                         </a:rPr>
                         <a:t/>
@@ -5665,25 +5871,25 @@
                   <a:tcPr anchor="ctr" marL="73152" marR="73152">
                     <a:lnL w="9525" cap="flat" cmpd="sng" algn="ctr">
                       <a:solidFill>
-                        <a:srgbClr val="E8D4F7"/>
+                        <a:srgbClr val="E9D1FA"/>
                       </a:solidFill>
                       <a:prstDash val="solid"/>
                     </a:lnL>
                     <a:lnR w="9525" cap="flat" cmpd="sng" algn="ctr">
                       <a:solidFill>
-                        <a:srgbClr val="E8D4F7"/>
+                        <a:srgbClr val="E9D1FA"/>
                       </a:solidFill>
                       <a:prstDash val="solid"/>
                     </a:lnR>
                     <a:lnT w="9525" cap="flat" cmpd="sng" algn="ctr">
                       <a:solidFill>
-                        <a:srgbClr val="E8D4F7"/>
+                        <a:srgbClr val="E9D1FA"/>
                       </a:solidFill>
                       <a:prstDash val="solid"/>
                     </a:lnT>
                     <a:lnB w="9525" cap="flat" cmpd="sng" algn="ctr">
                       <a:solidFill>
-                        <a:srgbClr val="E8D4F7"/>
+                        <a:srgbClr val="E9D1FA"/>
                       </a:solidFill>
                       <a:prstDash val="solid"/>
                     </a:lnB>
@@ -5703,7 +5909,7 @@
                       <a:r>
                         <a:rPr sz="1600" b="1">
                           <a:solidFill>
-                            <a:srgbClr val="4E226D"/>
+                            <a:srgbClr val="3B2749"/>
                           </a:solidFill>
                         </a:rPr>
                         <a:t>몸무게(kg)</a:t>
@@ -5713,30 +5919,30 @@
                   <a:tcPr anchor="ctr" marL="73152" marR="73152">
                     <a:lnL w="9525" cap="flat" cmpd="sng" algn="ctr">
                       <a:solidFill>
-                        <a:srgbClr val="E8D4F7"/>
+                        <a:srgbClr val="E9D1FA"/>
                       </a:solidFill>
                       <a:prstDash val="solid"/>
                     </a:lnL>
                     <a:lnR w="9525" cap="flat" cmpd="sng" algn="ctr">
                       <a:solidFill>
-                        <a:srgbClr val="E8D4F7"/>
+                        <a:srgbClr val="E9D1FA"/>
                       </a:solidFill>
                       <a:prstDash val="solid"/>
                     </a:lnR>
                     <a:lnT w="9525" cap="flat" cmpd="sng" algn="ctr">
                       <a:solidFill>
-                        <a:srgbClr val="E8D4F7"/>
+                        <a:srgbClr val="E9D1FA"/>
                       </a:solidFill>
                       <a:prstDash val="solid"/>
                     </a:lnT>
                     <a:lnB w="9525" cap="flat" cmpd="sng" algn="ctr">
                       <a:solidFill>
-                        <a:srgbClr val="E8D4F7"/>
+                        <a:srgbClr val="E9D1FA"/>
                       </a:solidFill>
                       <a:prstDash val="solid"/>
                     </a:lnB>
                     <a:solidFill>
-                      <a:srgbClr val="E8D4F7"/>
+                      <a:srgbClr val="E9D1FA"/>
                     </a:solidFill>
                   </a:tcPr>
                 </a:tc>
@@ -5749,7 +5955,7 @@
                       <a:r>
                         <a:rPr sz="1600" b="0">
                           <a:solidFill>
-                            <a:srgbClr val="2B2B2B"/>
+                            <a:srgbClr val="26231F"/>
                           </a:solidFill>
                         </a:rPr>
                         <a:t/>
@@ -5759,30 +5965,30 @@
                   <a:tcPr anchor="ctr" marL="73152" marR="73152">
                     <a:lnL w="9525" cap="flat" cmpd="sng" algn="ctr">
                       <a:solidFill>
-                        <a:srgbClr val="E8D4F7"/>
+                        <a:srgbClr val="E9D1FA"/>
                       </a:solidFill>
                       <a:prstDash val="solid"/>
                     </a:lnL>
                     <a:lnR w="9525" cap="flat" cmpd="sng" algn="ctr">
                       <a:solidFill>
-                        <a:srgbClr val="E8D4F7"/>
+                        <a:srgbClr val="E9D1FA"/>
                       </a:solidFill>
                       <a:prstDash val="solid"/>
                     </a:lnR>
                     <a:lnT w="9525" cap="flat" cmpd="sng" algn="ctr">
                       <a:solidFill>
-                        <a:srgbClr val="E8D4F7"/>
+                        <a:srgbClr val="E9D1FA"/>
                       </a:solidFill>
                       <a:prstDash val="solid"/>
                     </a:lnT>
                     <a:lnB w="9525" cap="flat" cmpd="sng" algn="ctr">
                       <a:solidFill>
-                        <a:srgbClr val="E8D4F7"/>
+                        <a:srgbClr val="E9D1FA"/>
                       </a:solidFill>
                       <a:prstDash val="solid"/>
                     </a:lnB>
                     <a:solidFill>
-                      <a:srgbClr val="F8F3FC"/>
+                      <a:srgbClr val="F5EAFD"/>
                     </a:solidFill>
                   </a:tcPr>
                 </a:tc>
@@ -5795,7 +6001,7 @@
                       <a:r>
                         <a:rPr sz="1600" b="0">
                           <a:solidFill>
-                            <a:srgbClr val="2B2B2B"/>
+                            <a:srgbClr val="26231F"/>
                           </a:solidFill>
                         </a:rPr>
                         <a:t/>
@@ -5805,30 +6011,30 @@
                   <a:tcPr anchor="ctr" marL="73152" marR="73152">
                     <a:lnL w="9525" cap="flat" cmpd="sng" algn="ctr">
                       <a:solidFill>
-                        <a:srgbClr val="E8D4F7"/>
+                        <a:srgbClr val="E9D1FA"/>
                       </a:solidFill>
                       <a:prstDash val="solid"/>
                     </a:lnL>
                     <a:lnR w="9525" cap="flat" cmpd="sng" algn="ctr">
                       <a:solidFill>
-                        <a:srgbClr val="E8D4F7"/>
+                        <a:srgbClr val="E9D1FA"/>
                       </a:solidFill>
                       <a:prstDash val="solid"/>
                     </a:lnR>
                     <a:lnT w="9525" cap="flat" cmpd="sng" algn="ctr">
                       <a:solidFill>
-                        <a:srgbClr val="E8D4F7"/>
+                        <a:srgbClr val="E9D1FA"/>
                       </a:solidFill>
                       <a:prstDash val="solid"/>
                     </a:lnT>
                     <a:lnB w="9525" cap="flat" cmpd="sng" algn="ctr">
                       <a:solidFill>
-                        <a:srgbClr val="E8D4F7"/>
+                        <a:srgbClr val="E9D1FA"/>
                       </a:solidFill>
                       <a:prstDash val="solid"/>
                     </a:lnB>
                     <a:solidFill>
-                      <a:srgbClr val="F8F3FC"/>
+                      <a:srgbClr val="F5EAFD"/>
                     </a:solidFill>
                   </a:tcPr>
                 </a:tc>
@@ -5841,7 +6047,7 @@
                       <a:r>
                         <a:rPr sz="1600" b="0">
                           <a:solidFill>
-                            <a:srgbClr val="2B2B2B"/>
+                            <a:srgbClr val="26231F"/>
                           </a:solidFill>
                         </a:rPr>
                         <a:t/>
@@ -5851,30 +6057,30 @@
                   <a:tcPr anchor="ctr" marL="73152" marR="73152">
                     <a:lnL w="9525" cap="flat" cmpd="sng" algn="ctr">
                       <a:solidFill>
-                        <a:srgbClr val="E8D4F7"/>
+                        <a:srgbClr val="E9D1FA"/>
                       </a:solidFill>
                       <a:prstDash val="solid"/>
                     </a:lnL>
                     <a:lnR w="9525" cap="flat" cmpd="sng" algn="ctr">
                       <a:solidFill>
-                        <a:srgbClr val="E8D4F7"/>
+                        <a:srgbClr val="E9D1FA"/>
                       </a:solidFill>
                       <a:prstDash val="solid"/>
                     </a:lnR>
                     <a:lnT w="9525" cap="flat" cmpd="sng" algn="ctr">
                       <a:solidFill>
-                        <a:srgbClr val="E8D4F7"/>
+                        <a:srgbClr val="E9D1FA"/>
                       </a:solidFill>
                       <a:prstDash val="solid"/>
                     </a:lnT>
                     <a:lnB w="9525" cap="flat" cmpd="sng" algn="ctr">
                       <a:solidFill>
-                        <a:srgbClr val="E8D4F7"/>
+                        <a:srgbClr val="E9D1FA"/>
                       </a:solidFill>
                       <a:prstDash val="solid"/>
                     </a:lnB>
                     <a:solidFill>
-                      <a:srgbClr val="F8F3FC"/>
+                      <a:srgbClr val="F5EAFD"/>
                     </a:solidFill>
                   </a:tcPr>
                 </a:tc>
@@ -5887,7 +6093,7 @@
                       <a:r>
                         <a:rPr sz="1600" b="0">
                           <a:solidFill>
-                            <a:srgbClr val="2B2B2B"/>
+                            <a:srgbClr val="26231F"/>
                           </a:solidFill>
                         </a:rPr>
                         <a:t/>
@@ -5897,30 +6103,30 @@
                   <a:tcPr anchor="ctr" marL="73152" marR="73152">
                     <a:lnL w="9525" cap="flat" cmpd="sng" algn="ctr">
                       <a:solidFill>
-                        <a:srgbClr val="E8D4F7"/>
+                        <a:srgbClr val="E9D1FA"/>
                       </a:solidFill>
                       <a:prstDash val="solid"/>
                     </a:lnL>
                     <a:lnR w="9525" cap="flat" cmpd="sng" algn="ctr">
                       <a:solidFill>
-                        <a:srgbClr val="E8D4F7"/>
+                        <a:srgbClr val="E9D1FA"/>
                       </a:solidFill>
                       <a:prstDash val="solid"/>
                     </a:lnR>
                     <a:lnT w="9525" cap="flat" cmpd="sng" algn="ctr">
                       <a:solidFill>
-                        <a:srgbClr val="E8D4F7"/>
+                        <a:srgbClr val="E9D1FA"/>
                       </a:solidFill>
                       <a:prstDash val="solid"/>
                     </a:lnT>
                     <a:lnB w="9525" cap="flat" cmpd="sng" algn="ctr">
                       <a:solidFill>
-                        <a:srgbClr val="E8D4F7"/>
+                        <a:srgbClr val="E9D1FA"/>
                       </a:solidFill>
                       <a:prstDash val="solid"/>
                     </a:lnB>
                     <a:solidFill>
-                      <a:srgbClr val="F8F3FC"/>
+                      <a:srgbClr val="F5EAFD"/>
                     </a:solidFill>
                   </a:tcPr>
                 </a:tc>
@@ -5935,7 +6141,7 @@
                       <a:r>
                         <a:rPr sz="1600" b="1">
                           <a:solidFill>
-                            <a:srgbClr val="4E226D"/>
+                            <a:srgbClr val="3B2749"/>
                           </a:solidFill>
                         </a:rPr>
                         <a:t>새로 한 것</a:t>
@@ -5945,30 +6151,30 @@
                   <a:tcPr anchor="ctr" marL="73152" marR="73152">
                     <a:lnL w="9525" cap="flat" cmpd="sng" algn="ctr">
                       <a:solidFill>
-                        <a:srgbClr val="E8D4F7"/>
+                        <a:srgbClr val="E9D1FA"/>
                       </a:solidFill>
                       <a:prstDash val="solid"/>
                     </a:lnL>
                     <a:lnR w="9525" cap="flat" cmpd="sng" algn="ctr">
                       <a:solidFill>
-                        <a:srgbClr val="E8D4F7"/>
+                        <a:srgbClr val="E9D1FA"/>
                       </a:solidFill>
                       <a:prstDash val="solid"/>
                     </a:lnR>
                     <a:lnT w="9525" cap="flat" cmpd="sng" algn="ctr">
                       <a:solidFill>
-                        <a:srgbClr val="E8D4F7"/>
+                        <a:srgbClr val="E9D1FA"/>
                       </a:solidFill>
                       <a:prstDash val="solid"/>
                     </a:lnT>
                     <a:lnB w="9525" cap="flat" cmpd="sng" algn="ctr">
                       <a:solidFill>
-                        <a:srgbClr val="E8D4F7"/>
+                        <a:srgbClr val="E9D1FA"/>
                       </a:solidFill>
                       <a:prstDash val="solid"/>
                     </a:lnB>
                     <a:solidFill>
-                      <a:srgbClr val="E8D4F7"/>
+                      <a:srgbClr val="E9D1FA"/>
                     </a:solidFill>
                   </a:tcPr>
                 </a:tc>
@@ -5981,7 +6187,7 @@
                       <a:r>
                         <a:rPr sz="1600" b="0">
                           <a:solidFill>
-                            <a:srgbClr val="2B2B2B"/>
+                            <a:srgbClr val="26231F"/>
                           </a:solidFill>
                         </a:rPr>
                         <a:t/>
@@ -5991,25 +6197,25 @@
                   <a:tcPr anchor="ctr" marL="73152" marR="73152">
                     <a:lnL w="9525" cap="flat" cmpd="sng" algn="ctr">
                       <a:solidFill>
-                        <a:srgbClr val="E8D4F7"/>
+                        <a:srgbClr val="E9D1FA"/>
                       </a:solidFill>
                       <a:prstDash val="solid"/>
                     </a:lnL>
                     <a:lnR w="9525" cap="flat" cmpd="sng" algn="ctr">
                       <a:solidFill>
-                        <a:srgbClr val="E8D4F7"/>
+                        <a:srgbClr val="E9D1FA"/>
                       </a:solidFill>
                       <a:prstDash val="solid"/>
                     </a:lnR>
                     <a:lnT w="9525" cap="flat" cmpd="sng" algn="ctr">
                       <a:solidFill>
-                        <a:srgbClr val="E8D4F7"/>
+                        <a:srgbClr val="E9D1FA"/>
                       </a:solidFill>
                       <a:prstDash val="solid"/>
                     </a:lnT>
                     <a:lnB w="9525" cap="flat" cmpd="sng" algn="ctr">
                       <a:solidFill>
-                        <a:srgbClr val="E8D4F7"/>
+                        <a:srgbClr val="E9D1FA"/>
                       </a:solidFill>
                       <a:prstDash val="solid"/>
                     </a:lnB>
@@ -6027,7 +6233,7 @@
                       <a:r>
                         <a:rPr sz="1600" b="0">
                           <a:solidFill>
-                            <a:srgbClr val="2B2B2B"/>
+                            <a:srgbClr val="26231F"/>
                           </a:solidFill>
                         </a:rPr>
                         <a:t/>
@@ -6037,25 +6243,25 @@
                   <a:tcPr anchor="ctr" marL="73152" marR="73152">
                     <a:lnL w="9525" cap="flat" cmpd="sng" algn="ctr">
                       <a:solidFill>
-                        <a:srgbClr val="E8D4F7"/>
+                        <a:srgbClr val="E9D1FA"/>
                       </a:solidFill>
                       <a:prstDash val="solid"/>
                     </a:lnL>
                     <a:lnR w="9525" cap="flat" cmpd="sng" algn="ctr">
                       <a:solidFill>
-                        <a:srgbClr val="E8D4F7"/>
+                        <a:srgbClr val="E9D1FA"/>
                       </a:solidFill>
                       <a:prstDash val="solid"/>
                     </a:lnR>
                     <a:lnT w="9525" cap="flat" cmpd="sng" algn="ctr">
                       <a:solidFill>
-                        <a:srgbClr val="E8D4F7"/>
+                        <a:srgbClr val="E9D1FA"/>
                       </a:solidFill>
                       <a:prstDash val="solid"/>
                     </a:lnT>
                     <a:lnB w="9525" cap="flat" cmpd="sng" algn="ctr">
                       <a:solidFill>
-                        <a:srgbClr val="E8D4F7"/>
+                        <a:srgbClr val="E9D1FA"/>
                       </a:solidFill>
                       <a:prstDash val="solid"/>
                     </a:lnB>
@@ -6073,7 +6279,7 @@
                       <a:r>
                         <a:rPr sz="1600" b="0">
                           <a:solidFill>
-                            <a:srgbClr val="2B2B2B"/>
+                            <a:srgbClr val="26231F"/>
                           </a:solidFill>
                         </a:rPr>
                         <a:t/>
@@ -6083,25 +6289,25 @@
                   <a:tcPr anchor="ctr" marL="73152" marR="73152">
                     <a:lnL w="9525" cap="flat" cmpd="sng" algn="ctr">
                       <a:solidFill>
-                        <a:srgbClr val="E8D4F7"/>
+                        <a:srgbClr val="E9D1FA"/>
                       </a:solidFill>
                       <a:prstDash val="solid"/>
                     </a:lnL>
                     <a:lnR w="9525" cap="flat" cmpd="sng" algn="ctr">
                       <a:solidFill>
-                        <a:srgbClr val="E8D4F7"/>
+                        <a:srgbClr val="E9D1FA"/>
                       </a:solidFill>
                       <a:prstDash val="solid"/>
                     </a:lnR>
                     <a:lnT w="9525" cap="flat" cmpd="sng" algn="ctr">
                       <a:solidFill>
-                        <a:srgbClr val="E8D4F7"/>
+                        <a:srgbClr val="E9D1FA"/>
                       </a:solidFill>
                       <a:prstDash val="solid"/>
                     </a:lnT>
                     <a:lnB w="9525" cap="flat" cmpd="sng" algn="ctr">
                       <a:solidFill>
-                        <a:srgbClr val="E8D4F7"/>
+                        <a:srgbClr val="E9D1FA"/>
                       </a:solidFill>
                       <a:prstDash val="solid"/>
                     </a:lnB>
@@ -6119,7 +6325,7 @@
                       <a:r>
                         <a:rPr sz="1600" b="0">
                           <a:solidFill>
-                            <a:srgbClr val="2B2B2B"/>
+                            <a:srgbClr val="26231F"/>
                           </a:solidFill>
                         </a:rPr>
                         <a:t/>
@@ -6129,25 +6335,25 @@
                   <a:tcPr anchor="ctr" marL="73152" marR="73152">
                     <a:lnL w="9525" cap="flat" cmpd="sng" algn="ctr">
                       <a:solidFill>
-                        <a:srgbClr val="E8D4F7"/>
+                        <a:srgbClr val="E9D1FA"/>
                       </a:solidFill>
                       <a:prstDash val="solid"/>
                     </a:lnL>
                     <a:lnR w="9525" cap="flat" cmpd="sng" algn="ctr">
                       <a:solidFill>
-                        <a:srgbClr val="E8D4F7"/>
+                        <a:srgbClr val="E9D1FA"/>
                       </a:solidFill>
                       <a:prstDash val="solid"/>
                     </a:lnR>
                     <a:lnT w="9525" cap="flat" cmpd="sng" algn="ctr">
                       <a:solidFill>
-                        <a:srgbClr val="E8D4F7"/>
+                        <a:srgbClr val="E9D1FA"/>
                       </a:solidFill>
                       <a:prstDash val="solid"/>
                     </a:lnT>
                     <a:lnB w="9525" cap="flat" cmpd="sng" algn="ctr">
                       <a:solidFill>
-                        <a:srgbClr val="E8D4F7"/>
+                        <a:srgbClr val="E9D1FA"/>
                       </a:solidFill>
                       <a:prstDash val="solid"/>
                     </a:lnB>
@@ -6195,14 +6401,14 @@
         </p:nvSpPr>
         <p:spPr>
           <a:xfrm>
-            <a:off x="9905695" y="-1463040"/>
-            <a:ext cx="3840480" cy="3840480"/>
-          </a:xfrm>
-          <a:prstGeom prst="ellipse">
+            <a:off x="640080" y="6400800"/>
+            <a:ext cx="10911535" cy="10972"/>
+          </a:xfrm>
+          <a:prstGeom prst="rect">
             <a:avLst/>
           </a:prstGeom>
           <a:solidFill>
-            <a:srgbClr val="E8D4F7"/>
+            <a:srgbClr val="26231F"/>
           </a:solidFill>
           <a:ln>
             <a:noFill/>
@@ -6218,20 +6424,58 @@
       </p:sp>
       <p:sp>
         <p:nvSpPr>
-          <p:cNvPr id="4" name="장식"/>
+          <p:cNvPr id="4" name="하단 라벨"/>
+          <p:cNvSpPr txBox="1"/>
+          <p:nvPr/>
+        </p:nvSpPr>
+        <p:spPr>
+          <a:xfrm>
+            <a:off x="640080" y="6437376"/>
+            <a:ext cx="5486400" cy="274320"/>
+          </a:xfrm>
+          <a:prstGeom prst="rect">
+            <a:avLst/>
+          </a:prstGeom>
+          <a:noFill/>
+        </p:spPr>
+        <p:txBody>
+          <a:bodyPr wrap="square" lIns="54864" rIns="54864" tIns="27432" bIns="27432" anchor="ctr">
+            <a:noAutofit/>
+          </a:bodyPr>
+          <a:lstStyle/>
+          <a:p>
+            <a:pPr algn="l">
+              <a:lnSpc>
+                <a:spcPct val="115000"/>
+              </a:lnSpc>
+            </a:pPr>
+            <a:r>
+              <a:rPr sz="900" b="1" i="0" spc="250">
+                <a:solidFill>
+                  <a:srgbClr val="26231F"/>
+                </a:solidFill>
+              </a:rPr>
+              <a:t>FIRST BIRTHDAY</a:t>
+            </a:r>
+          </a:p>
+        </p:txBody>
+      </p:sp>
+      <p:sp>
+        <p:nvSpPr>
+          <p:cNvPr id="5" name="포인트"/>
           <p:cNvSpPr/>
           <p:nvPr/>
         </p:nvSpPr>
         <p:spPr>
           <a:xfrm>
-            <a:off x="11094415" y="274320"/>
-            <a:ext cx="411480" cy="411480"/>
-          </a:xfrm>
-          <a:prstGeom prst="ellipse">
+            <a:off x="11213287" y="6473952"/>
+            <a:ext cx="219456" cy="219456"/>
+          </a:xfrm>
+          <a:prstGeom prst="moon">
             <a:avLst/>
           </a:prstGeom>
           <a:solidFill>
-            <a:srgbClr val="9651C8"/>
+            <a:srgbClr val="C997ED"/>
           </a:solidFill>
           <a:ln>
             <a:noFill/>
@@ -6257,8 +6501,8 @@
         </p:nvSpPr>
         <p:spPr>
           <a:xfrm>
-            <a:off x="640080" y="457200"/>
-            <a:ext cx="9722815" cy="868680"/>
+            <a:off x="640080" y="502920"/>
+            <a:ext cx="10911535" cy="914400"/>
           </a:xfrm>
         </p:spPr>
         <p:txBody>
@@ -6275,7 +6519,7 @@
             <a:r>
               <a:rPr sz="3000" b="1" i="0">
                 <a:solidFill>
-                  <a:srgbClr val="4E226D"/>
+                  <a:srgbClr val="26231F"/>
                 </a:solidFill>
               </a:rPr>
               <a:t>사진 모음</a:t>
@@ -6285,14 +6529,14 @@
       </p:sp>
       <p:sp>
         <p:nvSpPr>
-          <p:cNvPr id="5" name="사진 자리"/>
+          <p:cNvPr id="6" name="사진 자리"/>
           <p:cNvSpPr/>
           <p:nvPr/>
         </p:nvSpPr>
         <p:spPr>
           <a:xfrm>
             <a:off x="640080" y="1600200"/>
-            <a:ext cx="2590723" cy="2308860"/>
+            <a:ext cx="2590723" cy="2194560"/>
           </a:xfrm>
           <a:prstGeom prst="roundRect">
             <a:avLst>
@@ -6300,12 +6544,10 @@
             </a:avLst>
           </a:prstGeom>
           <a:solidFill>
-            <a:srgbClr val="E8D4F7"/>
+            <a:srgbClr val="E9D1FA"/>
           </a:solidFill>
           <a:ln w="19050">
-            <a:solidFill>
-              <a:srgbClr val="9651C8"/>
-            </a:solidFill>
+            <a:noFill/>
             <a:prstDash val="dash"/>
           </a:ln>
         </p:spPr>
@@ -6323,7 +6565,7 @@
             <a:r>
               <a:rPr sz="1200" b="0" i="0">
                 <a:solidFill>
-                  <a:srgbClr val="4E226D"/>
+                  <a:srgbClr val="8E8780"/>
                 </a:solidFill>
               </a:rPr>
               <a:t>사진 1</a:t>
@@ -6333,14 +6575,14 @@
       </p:sp>
       <p:sp>
         <p:nvSpPr>
-          <p:cNvPr id="6" name="사진 자리"/>
+          <p:cNvPr id="7" name="사진 자리"/>
           <p:cNvSpPr/>
           <p:nvPr/>
         </p:nvSpPr>
         <p:spPr>
           <a:xfrm>
             <a:off x="3413683" y="1600200"/>
-            <a:ext cx="2590723" cy="2308860"/>
+            <a:ext cx="2590723" cy="2194560"/>
           </a:xfrm>
           <a:prstGeom prst="roundRect">
             <a:avLst>
@@ -6348,12 +6590,10 @@
             </a:avLst>
           </a:prstGeom>
           <a:solidFill>
-            <a:srgbClr val="E8D4F7"/>
+            <a:srgbClr val="E9D1FA"/>
           </a:solidFill>
           <a:ln w="19050">
-            <a:solidFill>
-              <a:srgbClr val="9651C8"/>
-            </a:solidFill>
+            <a:noFill/>
             <a:prstDash val="dash"/>
           </a:ln>
         </p:spPr>
@@ -6371,7 +6611,7 @@
             <a:r>
               <a:rPr sz="1200" b="0" i="0">
                 <a:solidFill>
-                  <a:srgbClr val="4E226D"/>
+                  <a:srgbClr val="8E8780"/>
                 </a:solidFill>
               </a:rPr>
               <a:t>사진 2</a:t>
@@ -6381,14 +6621,14 @@
       </p:sp>
       <p:sp>
         <p:nvSpPr>
-          <p:cNvPr id="7" name="사진 자리"/>
+          <p:cNvPr id="8" name="사진 자리"/>
           <p:cNvSpPr/>
           <p:nvPr/>
         </p:nvSpPr>
         <p:spPr>
           <a:xfrm>
             <a:off x="6187287" y="1600200"/>
-            <a:ext cx="2590723" cy="2308860"/>
+            <a:ext cx="2590723" cy="2194560"/>
           </a:xfrm>
           <a:prstGeom prst="roundRect">
             <a:avLst>
@@ -6396,12 +6636,10 @@
             </a:avLst>
           </a:prstGeom>
           <a:solidFill>
-            <a:srgbClr val="E8D4F7"/>
+            <a:srgbClr val="E9D1FA"/>
           </a:solidFill>
           <a:ln w="19050">
-            <a:solidFill>
-              <a:srgbClr val="9651C8"/>
-            </a:solidFill>
+            <a:noFill/>
             <a:prstDash val="dash"/>
           </a:ln>
         </p:spPr>
@@ -6419,7 +6657,7 @@
             <a:r>
               <a:rPr sz="1200" b="0" i="0">
                 <a:solidFill>
-                  <a:srgbClr val="4E226D"/>
+                  <a:srgbClr val="8E8780"/>
                 </a:solidFill>
               </a:rPr>
               <a:t>사진 3</a:t>
@@ -6429,14 +6667,14 @@
       </p:sp>
       <p:sp>
         <p:nvSpPr>
-          <p:cNvPr id="8" name="사진 자리"/>
+          <p:cNvPr id="9" name="사진 자리"/>
           <p:cNvSpPr/>
           <p:nvPr/>
         </p:nvSpPr>
         <p:spPr>
           <a:xfrm>
             <a:off x="8960891" y="1600200"/>
-            <a:ext cx="2590723" cy="2308860"/>
+            <a:ext cx="2590723" cy="2194560"/>
           </a:xfrm>
           <a:prstGeom prst="roundRect">
             <a:avLst>
@@ -6444,12 +6682,10 @@
             </a:avLst>
           </a:prstGeom>
           <a:solidFill>
-            <a:srgbClr val="E8D4F7"/>
+            <a:srgbClr val="E9D1FA"/>
           </a:solidFill>
           <a:ln w="19050">
-            <a:solidFill>
-              <a:srgbClr val="9651C8"/>
-            </a:solidFill>
+            <a:noFill/>
             <a:prstDash val="dash"/>
           </a:ln>
         </p:spPr>
@@ -6467,7 +6703,7 @@
             <a:r>
               <a:rPr sz="1200" b="0" i="0">
                 <a:solidFill>
-                  <a:srgbClr val="4E226D"/>
+                  <a:srgbClr val="8E8780"/>
                 </a:solidFill>
               </a:rPr>
               <a:t>사진 4</a:t>
@@ -6477,14 +6713,14 @@
       </p:sp>
       <p:sp>
         <p:nvSpPr>
-          <p:cNvPr id="9" name="사진 자리"/>
+          <p:cNvPr id="10" name="사진 자리"/>
           <p:cNvSpPr/>
           <p:nvPr/>
         </p:nvSpPr>
         <p:spPr>
           <a:xfrm>
-            <a:off x="640080" y="4091939"/>
-            <a:ext cx="2590723" cy="2308860"/>
+            <a:off x="640080" y="3977639"/>
+            <a:ext cx="2590723" cy="2194560"/>
           </a:xfrm>
           <a:prstGeom prst="roundRect">
             <a:avLst>
@@ -6492,12 +6728,10 @@
             </a:avLst>
           </a:prstGeom>
           <a:solidFill>
-            <a:srgbClr val="E8D4F7"/>
+            <a:srgbClr val="E9D1FA"/>
           </a:solidFill>
           <a:ln w="19050">
-            <a:solidFill>
-              <a:srgbClr val="9651C8"/>
-            </a:solidFill>
+            <a:noFill/>
             <a:prstDash val="dash"/>
           </a:ln>
         </p:spPr>
@@ -6515,7 +6749,7 @@
             <a:r>
               <a:rPr sz="1200" b="0" i="0">
                 <a:solidFill>
-                  <a:srgbClr val="4E226D"/>
+                  <a:srgbClr val="8E8780"/>
                 </a:solidFill>
               </a:rPr>
               <a:t>사진 5</a:t>
@@ -6525,14 +6759,14 @@
       </p:sp>
       <p:sp>
         <p:nvSpPr>
-          <p:cNvPr id="10" name="사진 자리"/>
+          <p:cNvPr id="11" name="사진 자리"/>
           <p:cNvSpPr/>
           <p:nvPr/>
         </p:nvSpPr>
         <p:spPr>
           <a:xfrm>
-            <a:off x="3413683" y="4091939"/>
-            <a:ext cx="2590723" cy="2308860"/>
+            <a:off x="3413683" y="3977639"/>
+            <a:ext cx="2590723" cy="2194560"/>
           </a:xfrm>
           <a:prstGeom prst="roundRect">
             <a:avLst>
@@ -6540,12 +6774,10 @@
             </a:avLst>
           </a:prstGeom>
           <a:solidFill>
-            <a:srgbClr val="E8D4F7"/>
+            <a:srgbClr val="E9D1FA"/>
           </a:solidFill>
           <a:ln w="19050">
-            <a:solidFill>
-              <a:srgbClr val="9651C8"/>
-            </a:solidFill>
+            <a:noFill/>
             <a:prstDash val="dash"/>
           </a:ln>
         </p:spPr>
@@ -6563,7 +6795,7 @@
             <a:r>
               <a:rPr sz="1200" b="0" i="0">
                 <a:solidFill>
-                  <a:srgbClr val="4E226D"/>
+                  <a:srgbClr val="8E8780"/>
                 </a:solidFill>
               </a:rPr>
               <a:t>사진 6</a:t>
@@ -6573,14 +6805,14 @@
       </p:sp>
       <p:sp>
         <p:nvSpPr>
-          <p:cNvPr id="11" name="사진 자리"/>
+          <p:cNvPr id="12" name="사진 자리"/>
           <p:cNvSpPr/>
           <p:nvPr/>
         </p:nvSpPr>
         <p:spPr>
           <a:xfrm>
-            <a:off x="6187287" y="4091939"/>
-            <a:ext cx="2590723" cy="2308860"/>
+            <a:off x="6187287" y="3977639"/>
+            <a:ext cx="2590723" cy="2194560"/>
           </a:xfrm>
           <a:prstGeom prst="roundRect">
             <a:avLst>
@@ -6588,12 +6820,10 @@
             </a:avLst>
           </a:prstGeom>
           <a:solidFill>
-            <a:srgbClr val="E8D4F7"/>
+            <a:srgbClr val="E9D1FA"/>
           </a:solidFill>
           <a:ln w="19050">
-            <a:solidFill>
-              <a:srgbClr val="9651C8"/>
-            </a:solidFill>
+            <a:noFill/>
             <a:prstDash val="dash"/>
           </a:ln>
         </p:spPr>
@@ -6611,7 +6841,7 @@
             <a:r>
               <a:rPr sz="1200" b="0" i="0">
                 <a:solidFill>
-                  <a:srgbClr val="4E226D"/>
+                  <a:srgbClr val="8E8780"/>
                 </a:solidFill>
               </a:rPr>
               <a:t>사진 7</a:t>
@@ -6621,14 +6851,14 @@
       </p:sp>
       <p:sp>
         <p:nvSpPr>
-          <p:cNvPr id="12" name="사진 자리"/>
+          <p:cNvPr id="13" name="사진 자리"/>
           <p:cNvSpPr/>
           <p:nvPr/>
         </p:nvSpPr>
         <p:spPr>
           <a:xfrm>
-            <a:off x="8960891" y="4091939"/>
-            <a:ext cx="2590723" cy="2308860"/>
+            <a:off x="8960891" y="3977639"/>
+            <a:ext cx="2590723" cy="2194560"/>
           </a:xfrm>
           <a:prstGeom prst="roundRect">
             <a:avLst>
@@ -6636,12 +6866,10 @@
             </a:avLst>
           </a:prstGeom>
           <a:solidFill>
-            <a:srgbClr val="E8D4F7"/>
+            <a:srgbClr val="E9D1FA"/>
           </a:solidFill>
           <a:ln w="19050">
-            <a:solidFill>
-              <a:srgbClr val="9651C8"/>
-            </a:solidFill>
+            <a:noFill/>
             <a:prstDash val="dash"/>
           </a:ln>
         </p:spPr>
@@ -6659,7 +6887,7 @@
             <a:r>
               <a:rPr sz="1200" b="0" i="0">
                 <a:solidFill>
-                  <a:srgbClr val="4E226D"/>
+                  <a:srgbClr val="8E8780"/>
                 </a:solidFill>
               </a:rPr>
               <a:t>사진 8</a:t>
@@ -6678,6 +6906,14 @@
 <file path=ppt/slides/slide6.xml><?xml version="1.0" encoding="utf-8"?>
 <p:sld xmlns:a="http://schemas.openxmlformats.org/drawingml/2006/main" xmlns:p="http://schemas.openxmlformats.org/presentationml/2006/main" xmlns:r="http://schemas.openxmlformats.org/officeDocument/2006/relationships">
   <p:cSld>
+    <p:bg>
+      <p:bgPr>
+        <a:solidFill>
+          <a:srgbClr val="F5EAFD"/>
+        </a:solidFill>
+        <a:effectLst/>
+      </p:bgPr>
+    </p:bg>
     <p:spTree>
       <p:nvGrpSpPr>
         <p:cNvPr id="1" name=""/>
@@ -6685,30 +6921,116 @@
         <p:nvPr/>
       </p:nvGrpSpPr>
       <p:grpSpPr/>
-      <p:pic>
-        <p:nvPicPr>
-          <p:cNvPr id="3" name="표지 그림" descr="birthday-11.jpg"/>
-          <p:cNvPicPr>
-            <a:picLocks noChangeAspect="1"/>
-          </p:cNvPicPr>
+      <p:sp>
+        <p:nvSpPr>
+          <p:cNvPr id="3" name="사진 자리"/>
+          <p:cNvSpPr/>
           <p:nvPr/>
-        </p:nvPicPr>
-        <p:blipFill>
-          <a:blip r:embed="rId2"/>
-          <a:stretch>
-            <a:fillRect/>
-          </a:stretch>
-        </p:blipFill>
+        </p:nvSpPr>
         <p:spPr>
           <a:xfrm>
             <a:off x="0" y="0"/>
-            <a:ext cx="12191695" cy="6858000"/>
+            <a:ext cx="4389010" cy="6858000"/>
           </a:xfrm>
           <a:prstGeom prst="rect">
             <a:avLst/>
           </a:prstGeom>
-        </p:spPr>
-      </p:pic>
+          <a:solidFill>
+            <a:srgbClr val="D2A6F2"/>
+          </a:solidFill>
+          <a:ln>
+            <a:noFill/>
+          </a:ln>
+        </p:spPr>
+        <p:txBody>
+          <a:bodyPr rtlCol="0" anchor="ctr" wrap="square" lIns="54864" rIns="54864" tIns="27432" bIns="27432">
+            <a:noAutofit/>
+          </a:bodyPr>
+          <a:lstStyle/>
+          <a:p>
+            <a:pPr algn="ctr">
+              <a:lnSpc>
+                <a:spcPct val="100000"/>
+              </a:lnSpc>
+            </a:pPr>
+            <a:r>
+              <a:rPr sz="1400" b="0" i="0">
+                <a:solidFill>
+                  <a:srgbClr val="3B2749"/>
+                </a:solidFill>
+              </a:rPr>
+              <a:t>사진을 넣어 주세요</a:t>
+            </a:r>
+          </a:p>
+        </p:txBody>
+      </p:sp>
+      <p:sp>
+        <p:nvSpPr>
+          <p:cNvPr id="4" name="장식"/>
+          <p:cNvSpPr/>
+          <p:nvPr/>
+        </p:nvSpPr>
+        <p:spPr>
+          <a:xfrm>
+            <a:off x="365750" y="365760"/>
+            <a:ext cx="3657508" cy="6126480"/>
+          </a:xfrm>
+          <a:prstGeom prst="rect">
+            <a:avLst/>
+          </a:prstGeom>
+          <a:noFill/>
+          <a:ln w="9525">
+            <a:solidFill>
+              <a:srgbClr val="26231F"/>
+            </a:solidFill>
+          </a:ln>
+        </p:spPr>
+        <p:txBody>
+          <a:bodyPr rtlCol="0" anchor="ctr"/>
+          <a:lstStyle/>
+          <a:p>
+            <a:pPr algn="ctr"/>
+          </a:p>
+        </p:txBody>
+      </p:sp>
+      <p:sp>
+        <p:nvSpPr>
+          <p:cNvPr id="5" name="라벨"/>
+          <p:cNvSpPr txBox="1"/>
+          <p:nvPr/>
+        </p:nvSpPr>
+        <p:spPr>
+          <a:xfrm>
+            <a:off x="6827349" y="2148840"/>
+            <a:ext cx="4632844" cy="274320"/>
+          </a:xfrm>
+          <a:prstGeom prst="rect">
+            <a:avLst/>
+          </a:prstGeom>
+          <a:noFill/>
+        </p:spPr>
+        <p:txBody>
+          <a:bodyPr wrap="square" lIns="54864" rIns="54864" tIns="27432" bIns="27432" anchor="t">
+            <a:noAutofit/>
+          </a:bodyPr>
+          <a:lstStyle/>
+          <a:p>
+            <a:pPr algn="l">
+              <a:lnSpc>
+                <a:spcPct val="115000"/>
+              </a:lnSpc>
+            </a:pPr>
+            <a:r>
+              <a:rPr sz="1000" b="1" i="0" spc="250">
+                <a:solidFill>
+                  <a:srgbClr val="26231F"/>
+                </a:solidFill>
+              </a:rPr>
+              <a:t>FIRST BIRTHDAY</a:t>
+            </a:r>
+          </a:p>
+        </p:txBody>
+      </p:sp>
       <p:sp>
         <p:nvSpPr>
           <p:cNvPr id="2" name="Title 1"/>
@@ -6721,8 +7043,8 @@
         </p:nvSpPr>
         <p:spPr>
           <a:xfrm>
-            <a:off x="853418" y="2057400"/>
-            <a:ext cx="6095847" cy="1554480"/>
+            <a:off x="6827349" y="2606040"/>
+            <a:ext cx="4632844" cy="1188720"/>
           </a:xfrm>
         </p:spPr>
         <p:txBody>
@@ -6739,7 +7061,7 @@
             <a:r>
               <a:rPr sz="3400" b="1" i="0">
                 <a:solidFill>
-                  <a:srgbClr val="4E226D"/>
+                  <a:srgbClr val="26231F"/>
                 </a:solidFill>
               </a:rPr>
               <a:t>와 주셔서 고맙습니다</a:t>
@@ -6749,14 +7071,14 @@
       </p:sp>
       <p:sp>
         <p:nvSpPr>
-          <p:cNvPr id="4" name="한 줄 문구"/>
+          <p:cNvPr id="6" name="한 줄 문구"/>
           <p:cNvSpPr txBox="1"/>
           <p:nvPr/>
         </p:nvSpPr>
         <p:spPr>
           <a:xfrm>
-            <a:off x="853418" y="3749039"/>
-            <a:ext cx="6095847" cy="822960"/>
+            <a:off x="6827349" y="3886200"/>
+            <a:ext cx="4632844" cy="822960"/>
           </a:xfrm>
           <a:prstGeom prst="rect">
             <a:avLst/>
@@ -6775,9 +7097,9 @@
               </a:lnSpc>
             </a:pPr>
             <a:r>
-              <a:rPr sz="1700" b="0" i="1">
+              <a:rPr sz="1700" b="0" i="0">
                 <a:solidFill>
-                  <a:srgbClr val="4E226D"/>
+                  <a:srgbClr val="26231F"/>
                 </a:solidFill>
               </a:rPr>
               <a:t>아이가 한 살이 되었습니다</a:t>
@@ -6787,14 +7109,14 @@
       </p:sp>
       <p:sp>
         <p:nvSpPr>
-          <p:cNvPr id="5" name="안내 문구"/>
+          <p:cNvPr id="7" name="안내 문구"/>
           <p:cNvSpPr txBox="1"/>
           <p:nvPr/>
         </p:nvSpPr>
         <p:spPr>
           <a:xfrm>
-            <a:off x="853418" y="4617720"/>
-            <a:ext cx="6095847" cy="914400"/>
+            <a:off x="6827349" y="4754880"/>
+            <a:ext cx="4632844" cy="914400"/>
           </a:xfrm>
           <a:prstGeom prst="rect">
             <a:avLst/>
@@ -6815,7 +7137,7 @@
             <a:r>
               <a:rPr sz="1400" b="0" i="0">
                 <a:solidFill>
-                  <a:srgbClr val="666666"/>
+                  <a:srgbClr val="26231F"/>
                 </a:solidFill>
               </a:rPr>
               <a:t>아기 이름 · 부모 이름</a:t>
@@ -6842,34 +7164,34 @@
         <a:sysClr val="window" lastClr="FFFFFF"/>
       </a:lt1>
       <a:dk2>
-        <a:srgbClr val="4E226D"/>
+        <a:srgbClr val="3B2749"/>
       </a:dk2>
       <a:lt2>
-        <a:srgbClr val="F8F3FC"/>
+        <a:srgbClr val="F5EAFD"/>
       </a:lt2>
       <a:accent1>
-        <a:srgbClr val="9651C8"/>
+        <a:srgbClr val="C997ED"/>
       </a:accent1>
       <a:accent2>
-        <a:srgbClr val="339941"/>
+        <a:srgbClr val="F3BAF0"/>
       </a:accent2>
       <a:accent3>
-        <a:srgbClr val="4E226D"/>
+        <a:srgbClr val="3B2749"/>
       </a:accent3>
       <a:accent4>
-        <a:srgbClr val="E8D4F7"/>
+        <a:srgbClr val="E9D1FA"/>
       </a:accent4>
       <a:accent5>
-        <a:srgbClr val="647584"/>
+        <a:srgbClr val="DEA8EE"/>
       </a:accent5>
       <a:accent6>
-        <a:srgbClr val="957AA7"/>
+        <a:srgbClr val="897D92"/>
       </a:accent6>
       <a:hlink>
-        <a:srgbClr val="9651C8"/>
+        <a:srgbClr val="C997ED"/>
       </a:hlink>
       <a:folHlink>
-        <a:srgbClr val="4E226D"/>
+        <a:srgbClr val="3B2749"/>
       </a:folHlink>
     </a:clrScheme>
     <a:fontScheme name="Office">
